--- a/Progression_P6/P6-L12_Celebration_and_the_Road_Ahead.pptx
+++ b/Progression_P6/P6-L12_Celebration_and_the_Road_Ahead.pptx
@@ -1,6 +1,6 @@
 
 <file path=ppt/presentation.xml><?xml version="1.0" encoding="utf-8"?>
-<p:presentation xmlns:a="http://schemas.openxmlformats.org/drawingml/2006/main" xmlns:r="http://schemas.openxmlformats.org/officeDocument/2006/relationships" xmlns:p="http://schemas.openxmlformats.org/presentationml/2006/main" saveSubsetFonts="1" autoCompressPictures="0">
+<p:presentation xmlns:a="http://schemas.openxmlformats.org/drawingml/2006/main" xmlns:r="http://schemas.openxmlformats.org/officeDocument/2006/relationships" xmlns:p="http://schemas.openxmlformats.org/presentationml/2006/main" embedTrueTypeFonts="1" saveSubsetFonts="1" autoCompressPictures="0">
   <p:sldMasterIdLst>
     <p:sldMasterId id="2147483648" r:id="rId1"/>
   </p:sldMasterIdLst>
@@ -28,6 +28,13 @@
   </p:notesMasterIdLst>
   <p:sldSz cx="12192000" cy="6858000"/>
   <p:notesSz cx="6858000" cy="12192000"/>
+  <p:embeddedFontLst>
+    <p:embeddedFont>
+      <p:font typeface="Amiri" pitchFamily="2" charset="-78"/>
+      <p:regular r:id="rIdFont1"/>
+      <p:bold r:id="rIdFont2"/>
+    </p:embeddedFont>
+  </p:embeddedFontLst>
   <p:defaultTextStyle>
     <a:lvl1pPr marL="0" algn="l" defTabSz="914400" rtl="0" eaLnBrk="1" latinLnBrk="0" hangingPunct="1">
       <a:defRPr sz="1800" kern="1200">
@@ -384,8 +391,7 @@
           <a:schemeClr val="tx1"/>
         </a:solidFill>
         <a:latin typeface="+mn-lt"/>
-        <a:ea typeface="+mn-ea"/>
-        <a:cs typeface="+mn-cs"/>
+        <a:cs typeface="Amiri" pitchFamily="2" charset="-78"/>
       </a:defRPr>
     </a:lvl1pPr>
     <a:lvl2pPr marL="457200" algn="l" defTabSz="914400" rtl="0" eaLnBrk="1" latinLnBrk="0" hangingPunct="1">
@@ -394,8 +400,7 @@
           <a:schemeClr val="tx1"/>
         </a:solidFill>
         <a:latin typeface="+mn-lt"/>
-        <a:ea typeface="+mn-ea"/>
-        <a:cs typeface="+mn-cs"/>
+        <a:cs typeface="Amiri" pitchFamily="2" charset="-78"/>
       </a:defRPr>
     </a:lvl2pPr>
     <a:lvl3pPr marL="914400" algn="l" defTabSz="914400" rtl="0" eaLnBrk="1" latinLnBrk="0" hangingPunct="1">
@@ -404,8 +409,7 @@
           <a:schemeClr val="tx1"/>
         </a:solidFill>
         <a:latin typeface="+mn-lt"/>
-        <a:ea typeface="+mn-ea"/>
-        <a:cs typeface="+mn-cs"/>
+        <a:cs typeface="Amiri" pitchFamily="2" charset="-78"/>
       </a:defRPr>
     </a:lvl3pPr>
     <a:lvl4pPr marL="1371600" algn="l" defTabSz="914400" rtl="0" eaLnBrk="1" latinLnBrk="0" hangingPunct="1">
@@ -414,8 +418,7 @@
           <a:schemeClr val="tx1"/>
         </a:solidFill>
         <a:latin typeface="+mn-lt"/>
-        <a:ea typeface="+mn-ea"/>
-        <a:cs typeface="+mn-cs"/>
+        <a:cs typeface="Amiri" pitchFamily="2" charset="-78"/>
       </a:defRPr>
     </a:lvl4pPr>
     <a:lvl5pPr marL="1828800" algn="l" defTabSz="914400" rtl="0" eaLnBrk="1" latinLnBrk="0" hangingPunct="1">
@@ -424,8 +427,7 @@
           <a:schemeClr val="tx1"/>
         </a:solidFill>
         <a:latin typeface="+mn-lt"/>
-        <a:ea typeface="+mn-ea"/>
-        <a:cs typeface="+mn-cs"/>
+        <a:cs typeface="Amiri" pitchFamily="2" charset="-78"/>
       </a:defRPr>
     </a:lvl5pPr>
     <a:lvl6pPr marL="2286000" algn="l" defTabSz="914400" rtl="0" eaLnBrk="1" latinLnBrk="0" hangingPunct="1">
@@ -434,8 +436,7 @@
           <a:schemeClr val="tx1"/>
         </a:solidFill>
         <a:latin typeface="+mn-lt"/>
-        <a:ea typeface="+mn-ea"/>
-        <a:cs typeface="+mn-cs"/>
+        <a:cs typeface="Amiri" pitchFamily="2" charset="-78"/>
       </a:defRPr>
     </a:lvl6pPr>
     <a:lvl7pPr marL="2743200" algn="l" defTabSz="914400" rtl="0" eaLnBrk="1" latinLnBrk="0" hangingPunct="1">
@@ -444,8 +445,7 @@
           <a:schemeClr val="tx1"/>
         </a:solidFill>
         <a:latin typeface="+mn-lt"/>
-        <a:ea typeface="+mn-ea"/>
-        <a:cs typeface="+mn-cs"/>
+        <a:cs typeface="Amiri" pitchFamily="2" charset="-78"/>
       </a:defRPr>
     </a:lvl7pPr>
     <a:lvl8pPr marL="3200400" algn="l" defTabSz="914400" rtl="0" eaLnBrk="1" latinLnBrk="0" hangingPunct="1">
@@ -454,8 +454,7 @@
           <a:schemeClr val="tx1"/>
         </a:solidFill>
         <a:latin typeface="+mn-lt"/>
-        <a:ea typeface="+mn-ea"/>
-        <a:cs typeface="+mn-cs"/>
+        <a:cs typeface="Amiri" pitchFamily="2" charset="-78"/>
       </a:defRPr>
     </a:lvl8pPr>
     <a:lvl9pPr marL="3657600" algn="l" defTabSz="914400" rtl="0" eaLnBrk="1" latinLnBrk="0" hangingPunct="1">
@@ -464,8 +463,7 @@
           <a:schemeClr val="tx1"/>
         </a:solidFill>
         <a:latin typeface="+mn-lt"/>
-        <a:ea typeface="+mn-ea"/>
-        <a:cs typeface="+mn-cs"/>
+        <a:cs typeface="Amiri" pitchFamily="2" charset="-78"/>
       </a:defRPr>
     </a:lvl9pPr>
   </p:notesStyle>
@@ -2072,8 +2070,7 @@
             <a:schemeClr val="tx1"/>
           </a:solidFill>
           <a:latin typeface="+mj-lt"/>
-          <a:ea typeface="+mj-ea"/>
-          <a:cs typeface="+mj-cs"/>
+          <a:cs typeface="Amiri" pitchFamily="2" charset="-78"/>
         </a:defRPr>
       </a:lvl1pPr>
     </p:titleStyle>
@@ -2089,8 +2086,7 @@
             <a:schemeClr val="tx1"/>
           </a:solidFill>
           <a:latin typeface="+mn-lt"/>
-          <a:ea typeface="+mn-ea"/>
-          <a:cs typeface="+mn-cs"/>
+          <a:cs typeface="Amiri" pitchFamily="2" charset="-78"/>
         </a:defRPr>
       </a:lvl1pPr>
       <a:lvl2pPr marL="742950" indent="-285750" algn="l" defTabSz="914400" rtl="0" eaLnBrk="1" latinLnBrk="0" hangingPunct="1">
@@ -2104,8 +2100,7 @@
             <a:schemeClr val="tx1"/>
           </a:solidFill>
           <a:latin typeface="+mn-lt"/>
-          <a:ea typeface="+mn-ea"/>
-          <a:cs typeface="+mn-cs"/>
+          <a:cs typeface="Amiri" pitchFamily="2" charset="-78"/>
         </a:defRPr>
       </a:lvl2pPr>
       <a:lvl3pPr marL="1143000" indent="-228600" algn="l" defTabSz="914400" rtl="0" eaLnBrk="1" latinLnBrk="0" hangingPunct="1">
@@ -2119,8 +2114,7 @@
             <a:schemeClr val="tx1"/>
           </a:solidFill>
           <a:latin typeface="+mn-lt"/>
-          <a:ea typeface="+mn-ea"/>
-          <a:cs typeface="+mn-cs"/>
+          <a:cs typeface="Amiri" pitchFamily="2" charset="-78"/>
         </a:defRPr>
       </a:lvl3pPr>
       <a:lvl4pPr marL="1600200" indent="-228600" algn="l" defTabSz="914400" rtl="0" eaLnBrk="1" latinLnBrk="0" hangingPunct="1">
@@ -2134,8 +2128,7 @@
             <a:schemeClr val="tx1"/>
           </a:solidFill>
           <a:latin typeface="+mn-lt"/>
-          <a:ea typeface="+mn-ea"/>
-          <a:cs typeface="+mn-cs"/>
+          <a:cs typeface="Amiri" pitchFamily="2" charset="-78"/>
         </a:defRPr>
       </a:lvl4pPr>
       <a:lvl5pPr marL="2057400" indent="-228600" algn="l" defTabSz="914400" rtl="0" eaLnBrk="1" latinLnBrk="0" hangingPunct="1">
@@ -2149,8 +2142,7 @@
             <a:schemeClr val="tx1"/>
           </a:solidFill>
           <a:latin typeface="+mn-lt"/>
-          <a:ea typeface="+mn-ea"/>
-          <a:cs typeface="+mn-cs"/>
+          <a:cs typeface="Amiri" pitchFamily="2" charset="-78"/>
         </a:defRPr>
       </a:lvl5pPr>
       <a:lvl6pPr marL="2514600" indent="-228600" algn="l" defTabSz="914400" rtl="0" eaLnBrk="1" latinLnBrk="0" hangingPunct="1">
@@ -2164,8 +2156,7 @@
             <a:schemeClr val="tx1"/>
           </a:solidFill>
           <a:latin typeface="+mn-lt"/>
-          <a:ea typeface="+mn-ea"/>
-          <a:cs typeface="+mn-cs"/>
+          <a:cs typeface="Amiri" pitchFamily="2" charset="-78"/>
         </a:defRPr>
       </a:lvl6pPr>
       <a:lvl7pPr marL="2971800" indent="-228600" algn="l" defTabSz="914400" rtl="0" eaLnBrk="1" latinLnBrk="0" hangingPunct="1">
@@ -2179,8 +2170,7 @@
             <a:schemeClr val="tx1"/>
           </a:solidFill>
           <a:latin typeface="+mn-lt"/>
-          <a:ea typeface="+mn-ea"/>
-          <a:cs typeface="+mn-cs"/>
+          <a:cs typeface="Amiri" pitchFamily="2" charset="-78"/>
         </a:defRPr>
       </a:lvl7pPr>
       <a:lvl8pPr marL="3429000" indent="-228600" algn="l" defTabSz="914400" rtl="0" eaLnBrk="1" latinLnBrk="0" hangingPunct="1">
@@ -2194,8 +2184,7 @@
             <a:schemeClr val="tx1"/>
           </a:solidFill>
           <a:latin typeface="+mn-lt"/>
-          <a:ea typeface="+mn-ea"/>
-          <a:cs typeface="+mn-cs"/>
+          <a:cs typeface="Amiri" pitchFamily="2" charset="-78"/>
         </a:defRPr>
       </a:lvl8pPr>
       <a:lvl9pPr marL="3886200" indent="-228600" algn="l" defTabSz="914400" rtl="0" eaLnBrk="1" latinLnBrk="0" hangingPunct="1">
@@ -2209,8 +2198,7 @@
             <a:schemeClr val="tx1"/>
           </a:solidFill>
           <a:latin typeface="+mn-lt"/>
-          <a:ea typeface="+mn-ea"/>
-          <a:cs typeface="+mn-cs"/>
+          <a:cs typeface="Amiri" pitchFamily="2" charset="-78"/>
         </a:defRPr>
       </a:lvl9pPr>
     </p:bodyStyle>
@@ -2224,8 +2212,7 @@
             <a:schemeClr val="tx1"/>
           </a:solidFill>
           <a:latin typeface="+mn-lt"/>
-          <a:ea typeface="+mn-ea"/>
-          <a:cs typeface="+mn-cs"/>
+          <a:cs typeface="Amiri" pitchFamily="2" charset="-78"/>
         </a:defRPr>
       </a:lvl1pPr>
       <a:lvl2pPr marL="457200" algn="l" defTabSz="914400" rtl="0" eaLnBrk="1" latinLnBrk="0" hangingPunct="1">
@@ -2234,8 +2221,7 @@
             <a:schemeClr val="tx1"/>
           </a:solidFill>
           <a:latin typeface="+mn-lt"/>
-          <a:ea typeface="+mn-ea"/>
-          <a:cs typeface="+mn-cs"/>
+          <a:cs typeface="Amiri" pitchFamily="2" charset="-78"/>
         </a:defRPr>
       </a:lvl2pPr>
       <a:lvl3pPr marL="914400" algn="l" defTabSz="914400" rtl="0" eaLnBrk="1" latinLnBrk="0" hangingPunct="1">
@@ -2244,8 +2230,7 @@
             <a:schemeClr val="tx1"/>
           </a:solidFill>
           <a:latin typeface="+mn-lt"/>
-          <a:ea typeface="+mn-ea"/>
-          <a:cs typeface="+mn-cs"/>
+          <a:cs typeface="Amiri" pitchFamily="2" charset="-78"/>
         </a:defRPr>
       </a:lvl3pPr>
       <a:lvl4pPr marL="1371600" algn="l" defTabSz="914400" rtl="0" eaLnBrk="1" latinLnBrk="0" hangingPunct="1">
@@ -2254,8 +2239,7 @@
             <a:schemeClr val="tx1"/>
           </a:solidFill>
           <a:latin typeface="+mn-lt"/>
-          <a:ea typeface="+mn-ea"/>
-          <a:cs typeface="+mn-cs"/>
+          <a:cs typeface="Amiri" pitchFamily="2" charset="-78"/>
         </a:defRPr>
       </a:lvl4pPr>
       <a:lvl5pPr marL="1828800" algn="l" defTabSz="914400" rtl="0" eaLnBrk="1" latinLnBrk="0" hangingPunct="1">
@@ -2264,8 +2248,7 @@
             <a:schemeClr val="tx1"/>
           </a:solidFill>
           <a:latin typeface="+mn-lt"/>
-          <a:ea typeface="+mn-ea"/>
-          <a:cs typeface="+mn-cs"/>
+          <a:cs typeface="Amiri" pitchFamily="2" charset="-78"/>
         </a:defRPr>
       </a:lvl5pPr>
       <a:lvl6pPr marL="2286000" algn="l" defTabSz="914400" rtl="0" eaLnBrk="1" latinLnBrk="0" hangingPunct="1">
@@ -2274,8 +2257,7 @@
             <a:schemeClr val="tx1"/>
           </a:solidFill>
           <a:latin typeface="+mn-lt"/>
-          <a:ea typeface="+mn-ea"/>
-          <a:cs typeface="+mn-cs"/>
+          <a:cs typeface="Amiri" pitchFamily="2" charset="-78"/>
         </a:defRPr>
       </a:lvl6pPr>
       <a:lvl7pPr marL="2743200" algn="l" defTabSz="914400" rtl="0" eaLnBrk="1" latinLnBrk="0" hangingPunct="1">
@@ -2284,8 +2266,7 @@
             <a:schemeClr val="tx1"/>
           </a:solidFill>
           <a:latin typeface="+mn-lt"/>
-          <a:ea typeface="+mn-ea"/>
-          <a:cs typeface="+mn-cs"/>
+          <a:cs typeface="Amiri" pitchFamily="2" charset="-78"/>
         </a:defRPr>
       </a:lvl7pPr>
       <a:lvl8pPr marL="3200400" algn="l" defTabSz="914400" rtl="0" eaLnBrk="1" latinLnBrk="0" hangingPunct="1">
@@ -2294,8 +2275,7 @@
             <a:schemeClr val="tx1"/>
           </a:solidFill>
           <a:latin typeface="+mn-lt"/>
-          <a:ea typeface="+mn-ea"/>
-          <a:cs typeface="+mn-cs"/>
+          <a:cs typeface="Amiri" pitchFamily="2" charset="-78"/>
         </a:defRPr>
       </a:lvl8pPr>
       <a:lvl9pPr marL="3657600" algn="l" defTabSz="914400" rtl="0" eaLnBrk="1" latinLnBrk="0" hangingPunct="1">
@@ -2304,8 +2284,7 @@
             <a:schemeClr val="tx1"/>
           </a:solidFill>
           <a:latin typeface="+mn-lt"/>
-          <a:ea typeface="+mn-ea"/>
-          <a:cs typeface="+mn-cs"/>
+          <a:cs typeface="Amiri" pitchFamily="2" charset="-78"/>
         </a:defRPr>
       </a:lvl9pPr>
     </p:otherStyle>
@@ -2465,9 +2444,8 @@
                 <a:solidFill>
                   <a:srgbClr val="D4AF37"/>
                 </a:solidFill>
-                <a:latin typeface="Amiri" pitchFamily="34" charset="0"/>
-                <a:ea typeface="Amiri" pitchFamily="34" charset="-122"/>
-                <a:cs typeface="Amiri" pitchFamily="34" charset="-120"/>
+                <a:latin typeface="Amiri" pitchFamily="2" charset="-78"/>
+                <a:cs typeface="Amiri" pitchFamily="2" charset="-78"/>
               </a:rPr>
               <a:t>م</a:t>
             </a:r>
@@ -2505,8 +2483,7 @@
                   <a:srgbClr val="FFFFFF"/>
                 </a:solidFill>
                 <a:latin typeface="Cambria" pitchFamily="34" charset="0"/>
-                <a:ea typeface="Cambria" pitchFamily="34" charset="-122"/>
-                <a:cs typeface="Cambria" pitchFamily="34" charset="-120"/>
+                <a:cs typeface="Amiri" pitchFamily="2" charset="-78"/>
               </a:rPr>
               <a:t>Al Madina Online School</a:t>
             </a:r>
@@ -2522,8 +2499,7 @@
                   <a:srgbClr val="D4AF37"/>
                 </a:solidFill>
                 <a:latin typeface="Calibri" pitchFamily="34" charset="0"/>
-                <a:ea typeface="Calibri" pitchFamily="34" charset="-122"/>
-                <a:cs typeface="Calibri" pitchFamily="34" charset="-120"/>
+                <a:cs typeface="Amiri" pitchFamily="2" charset="-78"/>
               </a:rPr>
               <a:t>ARABIC DEPARTMENT · MIFTAH ARABIC</a:t>
             </a:r>
@@ -2561,8 +2537,7 @@
                   <a:srgbClr val="D4AF37"/>
                 </a:solidFill>
                 <a:latin typeface="Calibri" pitchFamily="34" charset="0"/>
-                <a:ea typeface="Calibri" pitchFamily="34" charset="-122"/>
-                <a:cs typeface="Calibri" pitchFamily="34" charset="-120"/>
+                <a:cs typeface="Amiri" pitchFamily="2" charset="-78"/>
               </a:rPr>
               <a:t>CAMBRIDGE IGCSE ARABIC 0544  ·  YEAR 9  ·  PROGRESSION P6  ·  P6-L12</a:t>
             </a:r>
@@ -2600,8 +2575,7 @@
                   <a:srgbClr val="9FB3D1"/>
                 </a:solidFill>
                 <a:latin typeface="Cambria" pitchFamily="34" charset="0"/>
-                <a:ea typeface="Cambria" pitchFamily="34" charset="-122"/>
-                <a:cs typeface="Cambria" pitchFamily="34" charset="-120"/>
+                <a:cs typeface="Amiri" pitchFamily="2" charset="-78"/>
               </a:rPr>
               <a:t>P6-L12</a:t>
             </a:r>
@@ -2639,8 +2613,7 @@
                   <a:srgbClr val="FFFFFF"/>
                 </a:solidFill>
                 <a:latin typeface="Cambria" pitchFamily="34" charset="0"/>
-                <a:ea typeface="Cambria" pitchFamily="34" charset="-122"/>
-                <a:cs typeface="Cambria" pitchFamily="34" charset="-120"/>
+                <a:cs typeface="Amiri" pitchFamily="2" charset="-78"/>
               </a:rPr>
               <a:t>Celebration — Reflection and the Road Ahead</a:t>
             </a:r>
@@ -2677,9 +2650,8 @@
                 <a:solidFill>
                   <a:srgbClr val="D4AF37"/>
                 </a:solidFill>
-                <a:latin typeface="Amiri" pitchFamily="34" charset="0"/>
-                <a:ea typeface="Amiri" pitchFamily="34" charset="-122"/>
-                <a:cs typeface="Amiri" pitchFamily="34" charset="-120"/>
+                <a:latin typeface="Amiri" pitchFamily="2" charset="-78"/>
+                <a:cs typeface="Amiri" pitchFamily="2" charset="-78"/>
               </a:rPr>
               <a:t>الاحْتِفَالُ وَالتَّأَمُّلُ وَالطَّرِيقُ إِلَى الأَمَامِ</a:t>
             </a:r>
@@ -2717,8 +2689,7 @@
                   <a:srgbClr val="C6D2E6"/>
                 </a:solidFill>
                 <a:latin typeface="Calibri" pitchFamily="34" charset="0"/>
-                <a:ea typeface="Calibri" pitchFamily="34" charset="-122"/>
-                <a:cs typeface="Calibri" pitchFamily="34" charset="-120"/>
+                <a:cs typeface="Amiri" pitchFamily="2" charset="-78"/>
               </a:rPr>
               <a:t>Celebrate three years of Arabic: measure the distance from the first letter to the formal argument, produce free Arabic with no mark scheme, write your certificate sentence, and look at the doors Arabic opens next.</a:t>
             </a:r>
@@ -2783,8 +2754,7 @@
                   <a:srgbClr val="D4AF37"/>
                 </a:solidFill>
                 <a:latin typeface="Calibri" pitchFamily="34" charset="0"/>
-                <a:ea typeface="Calibri" pitchFamily="34" charset="-122"/>
-                <a:cs typeface="Calibri" pitchFamily="34" charset="-120"/>
+                <a:cs typeface="Amiri" pitchFamily="2" charset="-78"/>
               </a:rPr>
               <a:t>LESSON</a:t>
             </a:r>
@@ -2800,8 +2770,7 @@
                   <a:srgbClr val="FFFFFF"/>
                 </a:solidFill>
                 <a:latin typeface="Calibri" pitchFamily="34" charset="0"/>
-                <a:ea typeface="Calibri" pitchFamily="34" charset="-122"/>
-                <a:cs typeface="Calibri" pitchFamily="34" charset="-120"/>
+                <a:cs typeface="Amiri" pitchFamily="2" charset="-78"/>
               </a:rPr>
               <a:t>P6-L12 · Progression P6 · IGCSE Bridge</a:t>
             </a:r>
@@ -2866,8 +2835,7 @@
                   <a:srgbClr val="D4AF37"/>
                 </a:solidFill>
                 <a:latin typeface="Calibri" pitchFamily="34" charset="0"/>
-                <a:ea typeface="Calibri" pitchFamily="34" charset="-122"/>
-                <a:cs typeface="Calibri" pitchFamily="34" charset="-120"/>
+                <a:cs typeface="Amiri" pitchFamily="2" charset="-78"/>
               </a:rPr>
               <a:t>DURATION</a:t>
             </a:r>
@@ -2883,8 +2851,7 @@
                   <a:srgbClr val="FFFFFF"/>
                 </a:solidFill>
                 <a:latin typeface="Calibri" pitchFamily="34" charset="0"/>
-                <a:ea typeface="Calibri" pitchFamily="34" charset="-122"/>
-                <a:cs typeface="Calibri" pitchFamily="34" charset="-120"/>
+                <a:cs typeface="Amiri" pitchFamily="2" charset="-78"/>
               </a:rPr>
               <a:t>60 minutes · Teams</a:t>
             </a:r>
@@ -2949,8 +2916,7 @@
                   <a:srgbClr val="D4AF37"/>
                 </a:solidFill>
                 <a:latin typeface="Calibri" pitchFamily="34" charset="0"/>
-                <a:ea typeface="Calibri" pitchFamily="34" charset="-122"/>
-                <a:cs typeface="Calibri" pitchFamily="34" charset="-120"/>
+                <a:cs typeface="Amiri" pitchFamily="2" charset="-78"/>
               </a:rPr>
               <a:t>LEVEL</a:t>
             </a:r>
@@ -2966,8 +2932,7 @@
                   <a:srgbClr val="FFFFFF"/>
                 </a:solidFill>
                 <a:latin typeface="Calibri" pitchFamily="34" charset="0"/>
-                <a:ea typeface="Calibri" pitchFamily="34" charset="-122"/>
-                <a:cs typeface="Calibri" pitchFamily="34" charset="-120"/>
+                <a:cs typeface="Amiri" pitchFamily="2" charset="-78"/>
               </a:rPr>
               <a:t>Progression · B1 → B2</a:t>
             </a:r>
@@ -3032,8 +2997,7 @@
                   <a:srgbClr val="D4AF37"/>
                 </a:solidFill>
                 <a:latin typeface="Calibri" pitchFamily="34" charset="0"/>
-                <a:ea typeface="Calibri" pitchFamily="34" charset="-122"/>
-                <a:cs typeface="Calibri" pitchFamily="34" charset="-120"/>
+                <a:cs typeface="Amiri" pitchFamily="2" charset="-78"/>
               </a:rPr>
               <a:t>ON THE WEBSITE</a:t>
             </a:r>
@@ -3049,8 +3013,7 @@
                   <a:srgbClr val="FFFFFF"/>
                 </a:solidFill>
                 <a:latin typeface="Calibri" pitchFamily="34" charset="0"/>
-                <a:ea typeface="Calibri" pitchFamily="34" charset="-122"/>
-                <a:cs typeface="Calibri" pitchFamily="34" charset="-120"/>
+                <a:cs typeface="Amiri" pitchFamily="2" charset="-78"/>
               </a:rPr>
               <a:t>Pathways › Progression › P6 › P6-L12</a:t>
             </a:r>
@@ -3144,9 +3107,8 @@
                 <a:solidFill>
                   <a:srgbClr val="D4AF37"/>
                 </a:solidFill>
-                <a:latin typeface="Amiri" pitchFamily="34" charset="0"/>
-                <a:ea typeface="Amiri" pitchFamily="34" charset="-122"/>
-                <a:cs typeface="Amiri" pitchFamily="34" charset="-120"/>
+                <a:latin typeface="Amiri" pitchFamily="2" charset="-78"/>
+                <a:cs typeface="Amiri" pitchFamily="2" charset="-78"/>
               </a:rPr>
               <a:t>م</a:t>
             </a:r>
@@ -3184,8 +3146,7 @@
                   <a:srgbClr val="1B3B6F"/>
                 </a:solidFill>
                 <a:latin typeface="Cambria" pitchFamily="34" charset="0"/>
-                <a:ea typeface="Cambria" pitchFamily="34" charset="-122"/>
-                <a:cs typeface="Cambria" pitchFamily="34" charset="-120"/>
+                <a:cs typeface="Amiri" pitchFamily="2" charset="-78"/>
               </a:rPr>
               <a:t>Al Madina Online School</a:t>
             </a:r>
@@ -3223,8 +3184,7 @@
                   <a:srgbClr val="8A6D1E"/>
                 </a:solidFill>
                 <a:latin typeface="Calibri" pitchFamily="34" charset="0"/>
-                <a:ea typeface="Calibri" pitchFamily="34" charset="-122"/>
-                <a:cs typeface="Calibri" pitchFamily="34" charset="-120"/>
+                <a:cs typeface="Amiri" pitchFamily="2" charset="-78"/>
               </a:rPr>
               <a:t>ARABIC DEPARTMENT · MIFTAH ARABIC · IGCSE 0544</a:t>
             </a:r>
@@ -3289,8 +3249,7 @@
                   <a:srgbClr val="FFFFFF"/>
                 </a:solidFill>
                 <a:latin typeface="Calibri" pitchFamily="34" charset="0"/>
-                <a:ea typeface="Calibri" pitchFamily="34" charset="-122"/>
-                <a:cs typeface="Calibri" pitchFamily="34" charset="-120"/>
+                <a:cs typeface="Amiri" pitchFamily="2" charset="-78"/>
               </a:rPr>
               <a:t>P6-L12 · IGCSE Bridge</a:t>
             </a:r>
@@ -3355,8 +3314,7 @@
                   <a:srgbClr val="FFFFFF"/>
                 </a:solidFill>
                 <a:latin typeface="Calibri" pitchFamily="34" charset="0"/>
-                <a:ea typeface="Calibri" pitchFamily="34" charset="-122"/>
-                <a:cs typeface="Calibri" pitchFamily="34" charset="-120"/>
+                <a:cs typeface="Amiri" pitchFamily="2" charset="-78"/>
               </a:rPr>
               <a:t>YOU DO · 15 MIN</a:t>
             </a:r>
@@ -3394,8 +3352,7 @@
                   <a:srgbClr val="1E6B52"/>
                 </a:solidFill>
                 <a:latin typeface="Calibri" pitchFamily="34" charset="0"/>
-                <a:ea typeface="Calibri" pitchFamily="34" charset="-122"/>
-                <a:cs typeface="Calibri" pitchFamily="34" charset="-120"/>
+                <a:cs typeface="Amiri" pitchFamily="2" charset="-78"/>
               </a:rPr>
               <a:t>YOU DO · FREE ARABIC — YOUR CHOICE (WEBSITE)</a:t>
             </a:r>
@@ -3433,8 +3390,7 @@
                   <a:srgbClr val="1B3B6F"/>
                 </a:solidFill>
                 <a:latin typeface="Cambria" pitchFamily="34" charset="0"/>
-                <a:ea typeface="Cambria" pitchFamily="34" charset="-122"/>
-                <a:cs typeface="Cambria" pitchFamily="34" charset="-120"/>
+                <a:cs typeface="Amiri" pitchFamily="2" charset="-78"/>
               </a:rPr>
               <a:t>Free Arabic — write or speak for meaning</a:t>
             </a:r>
@@ -3471,9 +3427,8 @@
                 <a:solidFill>
                   <a:srgbClr val="8A6D1E"/>
                 </a:solidFill>
-                <a:latin typeface="Amiri" pitchFamily="34" charset="0"/>
-                <a:ea typeface="Amiri" pitchFamily="34" charset="-122"/>
-                <a:cs typeface="Amiri" pitchFamily="34" charset="-120"/>
+                <a:latin typeface="Amiri" pitchFamily="2" charset="-78"/>
+                <a:cs typeface="Amiri" pitchFamily="2" charset="-78"/>
               </a:rPr>
               <a:t>العَرَبِيَّةُ الحُرَّةُ</a:t>
             </a:r>
@@ -3511,8 +3466,7 @@
                   <a:srgbClr val="8A93A0"/>
                 </a:solidFill>
                 <a:latin typeface="Calibri" pitchFamily="34" charset="0"/>
-                <a:ea typeface="Calibri" pitchFamily="34" charset="-122"/>
-                <a:cs typeface="Calibri" pitchFamily="34" charset="-120"/>
+                <a:cs typeface="Amiri" pitchFamily="2" charset="-78"/>
               </a:rPr>
               <a:t>Miftah Arabic · Progression P6 · IGCSE Bridge · P6-L12</a:t>
             </a:r>
@@ -3611,8 +3565,7 @@
                   <a:srgbClr val="FFFFFF"/>
                 </a:solidFill>
                 <a:latin typeface="Calibri" pitchFamily="34" charset="0"/>
-                <a:ea typeface="Calibri" pitchFamily="34" charset="-122"/>
-                <a:cs typeface="Calibri" pitchFamily="34" charset="-120"/>
+                <a:cs typeface="Amiri" pitchFamily="2" charset="-78"/>
               </a:rPr>
               <a:t>FREE ARABIC · UNMARKED</a:t>
             </a:r>
@@ -3650,8 +3603,7 @@
                   <a:srgbClr val="1F2A37"/>
                 </a:solidFill>
                 <a:latin typeface="Calibri" pitchFamily="34" charset="0"/>
-                <a:ea typeface="Calibri" pitchFamily="34" charset="-122"/>
-                <a:cs typeface="Calibri" pitchFamily="34" charset="-120"/>
+                <a:cs typeface="Amiri" pitchFamily="2" charset="-78"/>
               </a:rPr>
               <a:t>Write freely in Arabic — a story, a poem, a diary entry, or a letter to a student beginning F1. This is not marked; it is yours.</a:t>
             </a:r>
@@ -3689,8 +3641,7 @@
                   <a:srgbClr val="1F2A37"/>
                 </a:solidFill>
                 <a:latin typeface="Calibri" pitchFamily="34" charset="0"/>
-                <a:ea typeface="Calibri" pitchFamily="34" charset="-122"/>
-                <a:cs typeface="Calibri" pitchFamily="34" charset="-120"/>
+                <a:cs typeface="Amiri" pitchFamily="2" charset="-78"/>
               </a:rPr>
               <a:t>☐  Write for meaning, not for the mark scheme.</a:t>
             </a:r>
@@ -3728,8 +3679,7 @@
                   <a:srgbClr val="1F2A37"/>
                 </a:solidFill>
                 <a:latin typeface="Calibri" pitchFamily="34" charset="0"/>
-                <a:ea typeface="Calibri" pitchFamily="34" charset="-122"/>
-                <a:cs typeface="Calibri" pitchFamily="34" charset="-120"/>
+                <a:cs typeface="Amiri" pitchFamily="2" charset="-78"/>
               </a:rPr>
               <a:t>☐  Use the Arabic that feels most yours.</a:t>
             </a:r>
@@ -3767,8 +3717,7 @@
                   <a:srgbClr val="1F2A37"/>
                 </a:solidFill>
                 <a:latin typeface="Calibri" pitchFamily="34" charset="0"/>
-                <a:ea typeface="Calibri" pitchFamily="34" charset="-122"/>
-                <a:cs typeface="Calibri" pitchFamily="34" charset="-120"/>
+                <a:cs typeface="Amiri" pitchFamily="2" charset="-78"/>
               </a:rPr>
               <a:t>☐  Enjoy how much you can now say.</a:t>
             </a:r>
@@ -3840,8 +3789,7 @@
                   <a:srgbClr val="8A6D1E"/>
                 </a:solidFill>
                 <a:latin typeface="Calibri" pitchFamily="34" charset="0"/>
-                <a:ea typeface="Calibri" pitchFamily="34" charset="-122"/>
-                <a:cs typeface="Calibri" pitchFamily="34" charset="-120"/>
+                <a:cs typeface="Amiri" pitchFamily="2" charset="-78"/>
               </a:rPr>
               <a:t>STARTERS (TEACHER)</a:t>
             </a:r>
@@ -3878,9 +3826,8 @@
                 <a:solidFill>
                   <a:srgbClr val="1B3B6F"/>
                 </a:solidFill>
-                <a:latin typeface="Amiri" pitchFamily="34" charset="0"/>
-                <a:ea typeface="Amiri" pitchFamily="34" charset="-122"/>
-                <a:cs typeface="Amiri" pitchFamily="34" charset="-120"/>
+                <a:latin typeface="Amiri" pitchFamily="2" charset="-78"/>
+                <a:cs typeface="Amiri" pitchFamily="2" charset="-78"/>
               </a:rPr>
               <a:t>إِلَى طَالِبٍ يَبْدَأُ رِحْلَتَهُ مَعَ العَرَبِيَّةِ،</a:t>
             </a:r>
@@ -3918,8 +3865,7 @@
                   <a:srgbClr val="5A6472"/>
                 </a:solidFill>
                 <a:latin typeface="Calibri" pitchFamily="34" charset="0"/>
-                <a:ea typeface="Calibri" pitchFamily="34" charset="-122"/>
-                <a:cs typeface="Calibri" pitchFamily="34" charset="-120"/>
+                <a:cs typeface="Amiri" pitchFamily="2" charset="-78"/>
               </a:rPr>
               <a:t>To a student beginning their journey with Arabic,</a:t>
             </a:r>
@@ -3956,9 +3902,8 @@
                 <a:solidFill>
                   <a:srgbClr val="1B3B6F"/>
                 </a:solidFill>
-                <a:latin typeface="Amiri" pitchFamily="34" charset="0"/>
-                <a:ea typeface="Amiri" pitchFamily="34" charset="-122"/>
-                <a:cs typeface="Amiri" pitchFamily="34" charset="-120"/>
+                <a:latin typeface="Amiri" pitchFamily="2" charset="-78"/>
+                <a:cs typeface="Amiri" pitchFamily="2" charset="-78"/>
               </a:rPr>
               <a:t>أَتَذَكَّرُ يَوْمَ …</a:t>
             </a:r>
@@ -3996,8 +3941,7 @@
                   <a:srgbClr val="5A6472"/>
                 </a:solidFill>
                 <a:latin typeface="Calibri" pitchFamily="34" charset="0"/>
-                <a:ea typeface="Calibri" pitchFamily="34" charset="-122"/>
-                <a:cs typeface="Calibri" pitchFamily="34" charset="-120"/>
+                <a:cs typeface="Amiri" pitchFamily="2" charset="-78"/>
               </a:rPr>
               <a:t>I remember the day …</a:t>
             </a:r>
@@ -4034,9 +3978,8 @@
                 <a:solidFill>
                   <a:srgbClr val="1B3B6F"/>
                 </a:solidFill>
-                <a:latin typeface="Amiri" pitchFamily="34" charset="0"/>
-                <a:ea typeface="Amiri" pitchFamily="34" charset="-122"/>
-                <a:cs typeface="Amiri" pitchFamily="34" charset="-120"/>
+                <a:latin typeface="Amiri" pitchFamily="2" charset="-78"/>
+                <a:cs typeface="Amiri" pitchFamily="2" charset="-78"/>
               </a:rPr>
               <a:t>أَنْصَحُكَ بِأَنْ …</a:t>
             </a:r>
@@ -4074,8 +4017,7 @@
                   <a:srgbClr val="5A6472"/>
                 </a:solidFill>
                 <a:latin typeface="Calibri" pitchFamily="34" charset="0"/>
-                <a:ea typeface="Calibri" pitchFamily="34" charset="-122"/>
-                <a:cs typeface="Calibri" pitchFamily="34" charset="-120"/>
+                <a:cs typeface="Amiri" pitchFamily="2" charset="-78"/>
               </a:rPr>
               <a:t>I advise you to …</a:t>
             </a:r>
@@ -4113,8 +4055,7 @@
                   <a:srgbClr val="8A93A0"/>
                 </a:solidFill>
                 <a:latin typeface="Calibri" pitchFamily="34" charset="0"/>
-                <a:ea typeface="Calibri" pitchFamily="34" charset="-122"/>
-                <a:cs typeface="Calibri" pitchFamily="34" charset="-120"/>
+                <a:cs typeface="Amiri" pitchFamily="2" charset="-78"/>
               </a:rPr>
               <a:t>10 / 17</a:t>
             </a:r>
@@ -4208,9 +4149,8 @@
                 <a:solidFill>
                   <a:srgbClr val="D4AF37"/>
                 </a:solidFill>
-                <a:latin typeface="Amiri" pitchFamily="34" charset="0"/>
-                <a:ea typeface="Amiri" pitchFamily="34" charset="-122"/>
-                <a:cs typeface="Amiri" pitchFamily="34" charset="-120"/>
+                <a:latin typeface="Amiri" pitchFamily="2" charset="-78"/>
+                <a:cs typeface="Amiri" pitchFamily="2" charset="-78"/>
               </a:rPr>
               <a:t>م</a:t>
             </a:r>
@@ -4248,8 +4188,7 @@
                   <a:srgbClr val="1B3B6F"/>
                 </a:solidFill>
                 <a:latin typeface="Cambria" pitchFamily="34" charset="0"/>
-                <a:ea typeface="Cambria" pitchFamily="34" charset="-122"/>
-                <a:cs typeface="Cambria" pitchFamily="34" charset="-120"/>
+                <a:cs typeface="Amiri" pitchFamily="2" charset="-78"/>
               </a:rPr>
               <a:t>Al Madina Online School</a:t>
             </a:r>
@@ -4287,8 +4226,7 @@
                   <a:srgbClr val="8A6D1E"/>
                 </a:solidFill>
                 <a:latin typeface="Calibri" pitchFamily="34" charset="0"/>
-                <a:ea typeface="Calibri" pitchFamily="34" charset="-122"/>
-                <a:cs typeface="Calibri" pitchFamily="34" charset="-120"/>
+                <a:cs typeface="Amiri" pitchFamily="2" charset="-78"/>
               </a:rPr>
               <a:t>ARABIC DEPARTMENT · MIFTAH ARABIC · IGCSE 0544</a:t>
             </a:r>
@@ -4353,8 +4291,7 @@
                   <a:srgbClr val="FFFFFF"/>
                 </a:solidFill>
                 <a:latin typeface="Calibri" pitchFamily="34" charset="0"/>
-                <a:ea typeface="Calibri" pitchFamily="34" charset="-122"/>
-                <a:cs typeface="Calibri" pitchFamily="34" charset="-120"/>
+                <a:cs typeface="Amiri" pitchFamily="2" charset="-78"/>
               </a:rPr>
               <a:t>P6-L12 · IGCSE Bridge</a:t>
             </a:r>
@@ -4419,8 +4356,7 @@
                   <a:srgbClr val="FFFFFF"/>
                 </a:solidFill>
                 <a:latin typeface="Calibri" pitchFamily="34" charset="0"/>
-                <a:ea typeface="Calibri" pitchFamily="34" charset="-122"/>
-                <a:cs typeface="Calibri" pitchFamily="34" charset="-120"/>
+                <a:cs typeface="Amiri" pitchFamily="2" charset="-78"/>
               </a:rPr>
               <a:t>FEEDBACK · 1 MIN</a:t>
             </a:r>
@@ -4458,8 +4394,7 @@
                   <a:srgbClr val="8A6D1E"/>
                 </a:solidFill>
                 <a:latin typeface="Calibri" pitchFamily="34" charset="0"/>
-                <a:ea typeface="Calibri" pitchFamily="34" charset="-122"/>
-                <a:cs typeface="Calibri" pitchFamily="34" charset="-120"/>
+                <a:cs typeface="Amiri" pitchFamily="2" charset="-78"/>
               </a:rPr>
               <a:t>FEEDBACK · THE WEBSITE MODEL · A LETTER TO A FUTURE STUDENT</a:t>
             </a:r>
@@ -4497,8 +4432,7 @@
                   <a:srgbClr val="1B3B6F"/>
                 </a:solidFill>
                 <a:latin typeface="Cambria" pitchFamily="34" charset="0"/>
-                <a:ea typeface="Cambria" pitchFamily="34" charset="-122"/>
-                <a:cs typeface="Cambria" pitchFamily="34" charset="-120"/>
+                <a:cs typeface="Amiri" pitchFamily="2" charset="-78"/>
               </a:rPr>
               <a:t>A letter to a student starting F1</a:t>
             </a:r>
@@ -4535,9 +4469,8 @@
                 <a:solidFill>
                   <a:srgbClr val="8A6D1E"/>
                 </a:solidFill>
-                <a:latin typeface="Amiri" pitchFamily="34" charset="0"/>
-                <a:ea typeface="Amiri" pitchFamily="34" charset="-122"/>
-                <a:cs typeface="Amiri" pitchFamily="34" charset="-120"/>
+                <a:latin typeface="Amiri" pitchFamily="2" charset="-78"/>
+                <a:cs typeface="Amiri" pitchFamily="2" charset="-78"/>
               </a:rPr>
               <a:t>نَمُوذَجُ الإِجَابَةِ</a:t>
             </a:r>
@@ -4575,8 +4508,7 @@
                   <a:srgbClr val="8A93A0"/>
                 </a:solidFill>
                 <a:latin typeface="Calibri" pitchFamily="34" charset="0"/>
-                <a:ea typeface="Calibri" pitchFamily="34" charset="-122"/>
-                <a:cs typeface="Calibri" pitchFamily="34" charset="-120"/>
+                <a:cs typeface="Amiri" pitchFamily="2" charset="-78"/>
               </a:rPr>
               <a:t>Miftah Arabic · Progression P6 · IGCSE Bridge · P6-L12</a:t>
             </a:r>
@@ -4650,9 +4582,8 @@
                 <a:solidFill>
                   <a:srgbClr val="1F2A37"/>
                 </a:solidFill>
-                <a:latin typeface="Amiri" pitchFamily="34" charset="0"/>
-                <a:ea typeface="Amiri" pitchFamily="34" charset="-122"/>
-                <a:cs typeface="Amiri" pitchFamily="34" charset="-120"/>
+                <a:latin typeface="Amiri" pitchFamily="2" charset="-78"/>
+                <a:cs typeface="Amiri" pitchFamily="2" charset="-78"/>
               </a:rPr>
               <a:t>أَكْتُبُ إِلَى طَالِبٍ يَبْدَأُ رِحْلَتَهُ مَعَ العَرَبِيَّةِ: لَا تَخَفْ مِنَ الحَرْفِ الأَوَّلِ، فَكُلُّ لُغَةٍ تَبْدَأُ بِخُطْوَةٍ. صَحِيحٌ أَنَّ الطَّرِيقَ طَوِيلٌ، غَيْرَ أَنَّهُ يَسْتَحِقُّ كُلَّ جُهْدٍ. وَبِنَاءً عَلَى تَجْرِبَتِي، أَنْصَحُكَ بِأَنْ تَقْرَأَ وَتَتَحَدَّثَ كُلَّ يَوْمٍ. وَلَوْ ثَابَرْتَ، لَوَجَدْتَ نَفْسَكَ يَوْمًا تَكْتُبُ بِالعَرَبِيَّةِ بِثِقَةٍ. العَرَبِيَّةُ الآنَ لَكَ.</a:t>
             </a:r>
@@ -4717,8 +4648,7 @@
                   <a:srgbClr val="5A6472"/>
                 </a:solidFill>
                 <a:latin typeface="Calibri" pitchFamily="34" charset="0"/>
-                <a:ea typeface="Calibri" pitchFamily="34" charset="-122"/>
-                <a:cs typeface="Calibri" pitchFamily="34" charset="-120"/>
+                <a:cs typeface="Amiri" pitchFamily="2" charset="-78"/>
               </a:rPr>
               <a:t>“I am writing to a student beginning their journey with Arabic: do not fear the first letter, for every language begins with a step. It is true that the road is long; however, it is worth every effort. Based on my experience, I advise you to read and speak every day. If you persevere, you will one day find yourself writing in Arabic with confidence. Arabic is now yours.”</a:t>
             </a:r>
@@ -4756,8 +4686,7 @@
                   <a:srgbClr val="8A6D1E"/>
                 </a:solidFill>
                 <a:latin typeface="Calibri" pitchFamily="34" charset="0"/>
-                <a:ea typeface="Calibri" pitchFamily="34" charset="-122"/>
-                <a:cs typeface="Calibri" pitchFamily="34" charset="-120"/>
+                <a:cs typeface="Amiri" pitchFamily="2" charset="-78"/>
               </a:rPr>
               <a:t>FIND IN THE MODEL:</a:t>
             </a:r>
@@ -4822,8 +4751,7 @@
                   <a:srgbClr val="FFFFFF"/>
                 </a:solidFill>
                 <a:latin typeface="Calibri" pitchFamily="34" charset="0"/>
-                <a:ea typeface="Calibri" pitchFamily="34" charset="-122"/>
-                <a:cs typeface="Calibri" pitchFamily="34" charset="-120"/>
+                <a:cs typeface="Amiri" pitchFamily="2" charset="-78"/>
               </a:rPr>
               <a:t>لَا تَخَفْ</a:t>
             </a:r>
@@ -4888,8 +4816,7 @@
                   <a:srgbClr val="FFFFFF"/>
                 </a:solidFill>
                 <a:latin typeface="Calibri" pitchFamily="34" charset="0"/>
-                <a:ea typeface="Calibri" pitchFamily="34" charset="-122"/>
-                <a:cs typeface="Calibri" pitchFamily="34" charset="-120"/>
+                <a:cs typeface="Amiri" pitchFamily="2" charset="-78"/>
               </a:rPr>
               <a:t>صَحِيحٌ أَنَّ … غَيْرَ أَنَّ</a:t>
             </a:r>
@@ -4954,8 +4881,7 @@
                   <a:srgbClr val="FFFFFF"/>
                 </a:solidFill>
                 <a:latin typeface="Calibri" pitchFamily="34" charset="0"/>
-                <a:ea typeface="Calibri" pitchFamily="34" charset="-122"/>
-                <a:cs typeface="Calibri" pitchFamily="34" charset="-120"/>
+                <a:cs typeface="Amiri" pitchFamily="2" charset="-78"/>
               </a:rPr>
               <a:t>أَنْصَحُكَ بِأَنْ</a:t>
             </a:r>
@@ -5020,8 +4946,7 @@
                   <a:srgbClr val="FFFFFF"/>
                 </a:solidFill>
                 <a:latin typeface="Calibri" pitchFamily="34" charset="0"/>
-                <a:ea typeface="Calibri" pitchFamily="34" charset="-122"/>
-                <a:cs typeface="Calibri" pitchFamily="34" charset="-120"/>
+                <a:cs typeface="Amiri" pitchFamily="2" charset="-78"/>
               </a:rPr>
               <a:t>وَلَوْ ثَابَرْتَ، لَوَجَدْتَ</a:t>
             </a:r>
@@ -5059,8 +4984,7 @@
                   <a:srgbClr val="8A93A0"/>
                 </a:solidFill>
                 <a:latin typeface="Calibri" pitchFamily="34" charset="0"/>
-                <a:ea typeface="Calibri" pitchFamily="34" charset="-122"/>
-                <a:cs typeface="Calibri" pitchFamily="34" charset="-120"/>
+                <a:cs typeface="Amiri" pitchFamily="2" charset="-78"/>
               </a:rPr>
               <a:t>11 / 17</a:t>
             </a:r>
@@ -5154,9 +5078,8 @@
                 <a:solidFill>
                   <a:srgbClr val="D4AF37"/>
                 </a:solidFill>
-                <a:latin typeface="Amiri" pitchFamily="34" charset="0"/>
-                <a:ea typeface="Amiri" pitchFamily="34" charset="-122"/>
-                <a:cs typeface="Amiri" pitchFamily="34" charset="-120"/>
+                <a:latin typeface="Amiri" pitchFamily="2" charset="-78"/>
+                <a:cs typeface="Amiri" pitchFamily="2" charset="-78"/>
               </a:rPr>
               <a:t>م</a:t>
             </a:r>
@@ -5194,8 +5117,7 @@
                   <a:srgbClr val="1B3B6F"/>
                 </a:solidFill>
                 <a:latin typeface="Cambria" pitchFamily="34" charset="0"/>
-                <a:ea typeface="Cambria" pitchFamily="34" charset="-122"/>
-                <a:cs typeface="Cambria" pitchFamily="34" charset="-120"/>
+                <a:cs typeface="Amiri" pitchFamily="2" charset="-78"/>
               </a:rPr>
               <a:t>Al Madina Online School</a:t>
             </a:r>
@@ -5233,8 +5155,7 @@
                   <a:srgbClr val="8A6D1E"/>
                 </a:solidFill>
                 <a:latin typeface="Calibri" pitchFamily="34" charset="0"/>
-                <a:ea typeface="Calibri" pitchFamily="34" charset="-122"/>
-                <a:cs typeface="Calibri" pitchFamily="34" charset="-120"/>
+                <a:cs typeface="Amiri" pitchFamily="2" charset="-78"/>
               </a:rPr>
               <a:t>ARABIC DEPARTMENT · MIFTAH ARABIC · IGCSE 0544</a:t>
             </a:r>
@@ -5299,8 +5220,7 @@
                   <a:srgbClr val="FFFFFF"/>
                 </a:solidFill>
                 <a:latin typeface="Calibri" pitchFamily="34" charset="0"/>
-                <a:ea typeface="Calibri" pitchFamily="34" charset="-122"/>
-                <a:cs typeface="Calibri" pitchFamily="34" charset="-120"/>
+                <a:cs typeface="Amiri" pitchFamily="2" charset="-78"/>
               </a:rPr>
               <a:t>P6-L12 · IGCSE Bridge</a:t>
             </a:r>
@@ -5365,8 +5285,7 @@
                   <a:srgbClr val="FFFFFF"/>
                 </a:solidFill>
                 <a:latin typeface="Calibri" pitchFamily="34" charset="0"/>
-                <a:ea typeface="Calibri" pitchFamily="34" charset="-122"/>
-                <a:cs typeface="Calibri" pitchFamily="34" charset="-120"/>
+                <a:cs typeface="Amiri" pitchFamily="2" charset="-78"/>
               </a:rPr>
               <a:t>YOU DO · 7 MIN</a:t>
             </a:r>
@@ -5404,8 +5323,7 @@
                   <a:srgbClr val="1E6B52"/>
                 </a:solidFill>
                 <a:latin typeface="Calibri" pitchFamily="34" charset="0"/>
-                <a:ea typeface="Calibri" pitchFamily="34" charset="-122"/>
-                <a:cs typeface="Calibri" pitchFamily="34" charset="-120"/>
+                <a:cs typeface="Amiri" pitchFamily="2" charset="-78"/>
               </a:rPr>
               <a:t>YOU DO · THE PROOF (WEBSITE)</a:t>
             </a:r>
@@ -5443,8 +5361,7 @@
                   <a:srgbClr val="1B3B6F"/>
                 </a:solidFill>
                 <a:latin typeface="Cambria" pitchFamily="34" charset="0"/>
-                <a:ea typeface="Cambria" pitchFamily="34" charset="-122"/>
-                <a:cs typeface="Cambria" pitchFamily="34" charset="-120"/>
+                <a:cs typeface="Amiri" pitchFamily="2" charset="-78"/>
               </a:rPr>
               <a:t>My achievement certificate — my best Arabic sentence</a:t>
             </a:r>
@@ -5481,9 +5398,8 @@
                 <a:solidFill>
                   <a:srgbClr val="8A6D1E"/>
                 </a:solidFill>
-                <a:latin typeface="Amiri" pitchFamily="34" charset="0"/>
-                <a:ea typeface="Amiri" pitchFamily="34" charset="-122"/>
-                <a:cs typeface="Amiri" pitchFamily="34" charset="-120"/>
+                <a:latin typeface="Amiri" pitchFamily="2" charset="-78"/>
+                <a:cs typeface="Amiri" pitchFamily="2" charset="-78"/>
               </a:rPr>
               <a:t>شَهَادَةُ الإِنْجَازِ</a:t>
             </a:r>
@@ -5521,8 +5437,7 @@
                   <a:srgbClr val="8A93A0"/>
                 </a:solidFill>
                 <a:latin typeface="Calibri" pitchFamily="34" charset="0"/>
-                <a:ea typeface="Calibri" pitchFamily="34" charset="-122"/>
-                <a:cs typeface="Calibri" pitchFamily="34" charset="-120"/>
+                <a:cs typeface="Amiri" pitchFamily="2" charset="-78"/>
               </a:rPr>
               <a:t>Miftah Arabic · Progression P6 · IGCSE Bridge · P6-L12</a:t>
             </a:r>
@@ -5585,8 +5500,7 @@
                   <a:srgbClr val="FFFFFF"/>
                 </a:solidFill>
                 <a:latin typeface="Calibri" pitchFamily="34" charset="0"/>
-                <a:ea typeface="Calibri" pitchFamily="34" charset="-122"/>
-                <a:cs typeface="Calibri" pitchFamily="34" charset="-120"/>
+                <a:cs typeface="Amiri" pitchFamily="2" charset="-78"/>
               </a:rPr>
               <a:t>Yours</a:t>
             </a:r>
@@ -5624,8 +5538,7 @@
                   <a:srgbClr val="FFFFFF"/>
                 </a:solidFill>
                 <a:latin typeface="Calibri" pitchFamily="34" charset="0"/>
-                <a:ea typeface="Calibri" pitchFamily="34" charset="-122"/>
-                <a:cs typeface="Calibri" pitchFamily="34" charset="-120"/>
+                <a:cs typeface="Amiri" pitchFamily="2" charset="-78"/>
               </a:rPr>
               <a:t>Example</a:t>
             </a:r>
@@ -5663,8 +5576,7 @@
                   <a:srgbClr val="FFFFFF"/>
                 </a:solidFill>
                 <a:latin typeface="Calibri" pitchFamily="34" charset="0"/>
-                <a:ea typeface="Calibri" pitchFamily="34" charset="-122"/>
-                <a:cs typeface="Calibri" pitchFamily="34" charset="-120"/>
+                <a:cs typeface="Amiri" pitchFamily="2" charset="-78"/>
               </a:rPr>
               <a:t>My certificate</a:t>
             </a:r>
@@ -5729,8 +5641,7 @@
                   <a:srgbClr val="5A6472"/>
                 </a:solidFill>
                 <a:latin typeface="Calibri" pitchFamily="34" charset="0"/>
-                <a:ea typeface="Calibri" pitchFamily="34" charset="-122"/>
-                <a:cs typeface="Calibri" pitchFamily="34" charset="-120"/>
+                <a:cs typeface="Amiri" pitchFamily="2" charset="-78"/>
               </a:rPr>
               <a:t>______________</a:t>
             </a:r>
@@ -5770,9 +5681,8 @@
                 <a:solidFill>
                   <a:srgbClr val="1B3B6F"/>
                 </a:solidFill>
-                <a:latin typeface="Amiri" pitchFamily="34" charset="0"/>
-                <a:ea typeface="Amiri" pitchFamily="34" charset="-122"/>
-                <a:cs typeface="Amiri" pitchFamily="34" charset="-120"/>
+                <a:latin typeface="Amiri" pitchFamily="2" charset="-78"/>
+                <a:cs typeface="Amiri" pitchFamily="2" charset="-78"/>
               </a:rPr>
               <a:t>لَوْ لَمْ أُثَابِرْ، لَمَا وَصَلْتُ إِلَى هُنَا؛ غَيْرَ أَنِّي ثَابَرْتُ، فَأَصْبَحَتِ العَرَبِيَّةُ لُغَتِي.</a:t>
             </a:r>
@@ -5810,8 +5720,7 @@
                   <a:srgbClr val="5A6472"/>
                 </a:solidFill>
                 <a:latin typeface="Calibri" pitchFamily="34" charset="0"/>
-                <a:ea typeface="Calibri" pitchFamily="34" charset="-122"/>
-                <a:cs typeface="Calibri" pitchFamily="34" charset="-120"/>
+                <a:cs typeface="Amiri" pitchFamily="2" charset="-78"/>
               </a:rPr>
               <a:t>My proudest Arabic sentence</a:t>
             </a:r>
@@ -5876,8 +5785,7 @@
                   <a:srgbClr val="FFFFFF"/>
                 </a:solidFill>
                 <a:latin typeface="Calibri" pitchFamily="34" charset="0"/>
-                <a:ea typeface="Calibri" pitchFamily="34" charset="-122"/>
-                <a:cs typeface="Calibri" pitchFamily="34" charset="-120"/>
+                <a:cs typeface="Amiri" pitchFamily="2" charset="-78"/>
               </a:rPr>
               <a:t>CORE</a:t>
             </a:r>
@@ -5942,8 +5850,7 @@
                   <a:srgbClr val="5A6472"/>
                 </a:solidFill>
                 <a:latin typeface="Calibri" pitchFamily="34" charset="0"/>
-                <a:ea typeface="Calibri" pitchFamily="34" charset="-122"/>
-                <a:cs typeface="Calibri" pitchFamily="34" charset="-120"/>
+                <a:cs typeface="Amiri" pitchFamily="2" charset="-78"/>
               </a:rPr>
               <a:t>______________</a:t>
             </a:r>
@@ -5981,8 +5888,7 @@
                   <a:srgbClr val="5A6472"/>
                 </a:solidFill>
                 <a:latin typeface="Calibri" pitchFamily="34" charset="0"/>
-                <a:ea typeface="Calibri" pitchFamily="34" charset="-122"/>
-                <a:cs typeface="Calibri" pitchFamily="34" charset="-120"/>
+                <a:cs typeface="Amiri" pitchFamily="2" charset="-78"/>
               </a:rPr>
               <a:t>Type 2 conditional (lau lam … la-mā) · concession (ghayra anna)</a:t>
             </a:r>
@@ -6020,8 +5926,7 @@
                   <a:srgbClr val="5A6472"/>
                 </a:solidFill>
                 <a:latin typeface="Calibri" pitchFamily="34" charset="0"/>
-                <a:ea typeface="Calibri" pitchFamily="34" charset="-122"/>
-                <a:cs typeface="Calibri" pitchFamily="34" charset="-120"/>
+                <a:cs typeface="Amiri" pitchFamily="2" charset="-78"/>
               </a:rPr>
               <a:t>The structures it uses (in English)</a:t>
             </a:r>
@@ -6059,8 +5964,7 @@
                   <a:srgbClr val="1B3B6F"/>
                 </a:solidFill>
                 <a:latin typeface="Calibri" pitchFamily="34" charset="0"/>
-                <a:ea typeface="Calibri" pitchFamily="34" charset="-122"/>
-                <a:cs typeface="Calibri" pitchFamily="34" charset="-120"/>
+                <a:cs typeface="Amiri" pitchFamily="2" charset="-78"/>
               </a:rPr>
               <a:t>This sentence goes on your certificate — the proof of three years.</a:t>
             </a:r>
@@ -6098,8 +6002,7 @@
                   <a:srgbClr val="8A93A0"/>
                 </a:solidFill>
                 <a:latin typeface="Calibri" pitchFamily="34" charset="0"/>
-                <a:ea typeface="Calibri" pitchFamily="34" charset="-122"/>
-                <a:cs typeface="Calibri" pitchFamily="34" charset="-120"/>
+                <a:cs typeface="Amiri" pitchFamily="2" charset="-78"/>
               </a:rPr>
               <a:t>12 / 17</a:t>
             </a:r>
@@ -6193,9 +6096,8 @@
                 <a:solidFill>
                   <a:srgbClr val="D4AF37"/>
                 </a:solidFill>
-                <a:latin typeface="Amiri" pitchFamily="34" charset="0"/>
-                <a:ea typeface="Amiri" pitchFamily="34" charset="-122"/>
-                <a:cs typeface="Amiri" pitchFamily="34" charset="-120"/>
+                <a:latin typeface="Amiri" pitchFamily="2" charset="-78"/>
+                <a:cs typeface="Amiri" pitchFamily="2" charset="-78"/>
               </a:rPr>
               <a:t>م</a:t>
             </a:r>
@@ -6233,8 +6135,7 @@
                   <a:srgbClr val="1B3B6F"/>
                 </a:solidFill>
                 <a:latin typeface="Cambria" pitchFamily="34" charset="0"/>
-                <a:ea typeface="Cambria" pitchFamily="34" charset="-122"/>
-                <a:cs typeface="Cambria" pitchFamily="34" charset="-120"/>
+                <a:cs typeface="Amiri" pitchFamily="2" charset="-78"/>
               </a:rPr>
               <a:t>Al Madina Online School</a:t>
             </a:r>
@@ -6272,8 +6173,7 @@
                   <a:srgbClr val="8A6D1E"/>
                 </a:solidFill>
                 <a:latin typeface="Calibri" pitchFamily="34" charset="0"/>
-                <a:ea typeface="Calibri" pitchFamily="34" charset="-122"/>
-                <a:cs typeface="Calibri" pitchFamily="34" charset="-120"/>
+                <a:cs typeface="Amiri" pitchFamily="2" charset="-78"/>
               </a:rPr>
               <a:t>ARABIC DEPARTMENT · MIFTAH ARABIC · IGCSE 0544</a:t>
             </a:r>
@@ -6338,8 +6238,7 @@
                   <a:srgbClr val="FFFFFF"/>
                 </a:solidFill>
                 <a:latin typeface="Calibri" pitchFamily="34" charset="0"/>
-                <a:ea typeface="Calibri" pitchFamily="34" charset="-122"/>
-                <a:cs typeface="Calibri" pitchFamily="34" charset="-120"/>
+                <a:cs typeface="Amiri" pitchFamily="2" charset="-78"/>
               </a:rPr>
               <a:t>P6-L12 · IGCSE Bridge</a:t>
             </a:r>
@@ -6404,8 +6303,7 @@
                   <a:srgbClr val="FFFFFF"/>
                 </a:solidFill>
                 <a:latin typeface="Calibri" pitchFamily="34" charset="0"/>
-                <a:ea typeface="Calibri" pitchFamily="34" charset="-122"/>
-                <a:cs typeface="Calibri" pitchFamily="34" charset="-120"/>
+                <a:cs typeface="Amiri" pitchFamily="2" charset="-78"/>
               </a:rPr>
               <a:t>FEEDBACK · 4 MIN</a:t>
             </a:r>
@@ -6443,8 +6341,7 @@
                   <a:srgbClr val="8A6D1E"/>
                 </a:solidFill>
                 <a:latin typeface="Calibri" pitchFamily="34" charset="0"/>
-                <a:ea typeface="Calibri" pitchFamily="34" charset="-122"/>
-                <a:cs typeface="Calibri" pitchFamily="34" charset="-120"/>
+                <a:cs typeface="Amiri" pitchFamily="2" charset="-78"/>
               </a:rPr>
               <a:t>FEEDBACK · A KEY TO A WORLD (WEBSITE)</a:t>
             </a:r>
@@ -6482,8 +6379,7 @@
                   <a:srgbClr val="1B3B6F"/>
                 </a:solidFill>
                 <a:latin typeface="Cambria" pitchFamily="34" charset="0"/>
-                <a:ea typeface="Cambria" pitchFamily="34" charset="-122"/>
-                <a:cs typeface="Cambria" pitchFamily="34" charset="-120"/>
+                <a:cs typeface="Amiri" pitchFamily="2" charset="-78"/>
               </a:rPr>
               <a:t>The road ahead — Arabic after P6</a:t>
             </a:r>
@@ -6520,9 +6416,8 @@
                 <a:solidFill>
                   <a:srgbClr val="8A6D1E"/>
                 </a:solidFill>
-                <a:latin typeface="Amiri" pitchFamily="34" charset="0"/>
-                <a:ea typeface="Amiri" pitchFamily="34" charset="-122"/>
-                <a:cs typeface="Amiri" pitchFamily="34" charset="-120"/>
+                <a:latin typeface="Amiri" pitchFamily="2" charset="-78"/>
+                <a:cs typeface="Amiri" pitchFamily="2" charset="-78"/>
               </a:rPr>
               <a:t>الطَّرِيقُ إِلَى الأَمَامِ</a:t>
             </a:r>
@@ -6560,8 +6455,7 @@
                   <a:srgbClr val="8A93A0"/>
                 </a:solidFill>
                 <a:latin typeface="Calibri" pitchFamily="34" charset="0"/>
-                <a:ea typeface="Calibri" pitchFamily="34" charset="-122"/>
-                <a:cs typeface="Calibri" pitchFamily="34" charset="-120"/>
+                <a:cs typeface="Amiri" pitchFamily="2" charset="-78"/>
               </a:rPr>
               <a:t>Miftah Arabic · Progression P6 · IGCSE Bridge · P6-L12</a:t>
             </a:r>
@@ -6633,8 +6527,7 @@
                   <a:srgbClr val="1B3B6F"/>
                 </a:solidFill>
                 <a:latin typeface="Calibri" pitchFamily="34" charset="0"/>
-                <a:ea typeface="Calibri" pitchFamily="34" charset="-122"/>
-                <a:cs typeface="Calibri" pitchFamily="34" charset="-120"/>
+                <a:cs typeface="Amiri" pitchFamily="2" charset="-78"/>
               </a:rPr>
               <a:t>THE ROAD AHEAD — ARABIC AFTER P6</a:t>
             </a:r>
@@ -6697,8 +6590,7 @@
                   <a:srgbClr val="D4AF37"/>
                 </a:solidFill>
                 <a:latin typeface="Calibri" pitchFamily="34" charset="0"/>
-                <a:ea typeface="Calibri" pitchFamily="34" charset="-122"/>
-                <a:cs typeface="Calibri" pitchFamily="34" charset="-120"/>
+                <a:cs typeface="Amiri" pitchFamily="2" charset="-78"/>
               </a:rPr>
               <a:t>1</a:t>
             </a:r>
@@ -6736,8 +6628,7 @@
                   <a:srgbClr val="1F2A37"/>
                 </a:solidFill>
                 <a:latin typeface="Calibri" pitchFamily="34" charset="0"/>
-                <a:ea typeface="Calibri" pitchFamily="34" charset="-122"/>
-                <a:cs typeface="Calibri" pitchFamily="34" charset="-120"/>
+                <a:cs typeface="Amiri" pitchFamily="2" charset="-78"/>
               </a:rPr>
               <a:t>The IGCSE exam — The immediate bridge — sit it with confidence, knowing what three years built.</a:t>
             </a:r>
@@ -6800,8 +6691,7 @@
                   <a:srgbClr val="D4AF37"/>
                 </a:solidFill>
                 <a:latin typeface="Calibri" pitchFamily="34" charset="0"/>
-                <a:ea typeface="Calibri" pitchFamily="34" charset="-122"/>
-                <a:cs typeface="Calibri" pitchFamily="34" charset="-120"/>
+                <a:cs typeface="Amiri" pitchFamily="2" charset="-78"/>
               </a:rPr>
               <a:t>2</a:t>
             </a:r>
@@ -6839,8 +6729,7 @@
                   <a:srgbClr val="1F2A37"/>
                 </a:solidFill>
                 <a:latin typeface="Calibri" pitchFamily="34" charset="0"/>
-                <a:ea typeface="Calibri" pitchFamily="34" charset="-122"/>
-                <a:cs typeface="Calibri" pitchFamily="34" charset="-120"/>
+                <a:cs typeface="Amiri" pitchFamily="2" charset="-78"/>
               </a:rPr>
               <a:t>Further study — A-Level Arabic and university Arabic programmes deepen everything you have begun.</a:t>
             </a:r>
@@ -6903,8 +6792,7 @@
                   <a:srgbClr val="D4AF37"/>
                 </a:solidFill>
                 <a:latin typeface="Calibri" pitchFamily="34" charset="0"/>
-                <a:ea typeface="Calibri" pitchFamily="34" charset="-122"/>
-                <a:cs typeface="Calibri" pitchFamily="34" charset="-120"/>
+                <a:cs typeface="Amiri" pitchFamily="2" charset="-78"/>
               </a:rPr>
               <a:t>3</a:t>
             </a:r>
@@ -6942,8 +6830,7 @@
                   <a:srgbClr val="1F2A37"/>
                 </a:solidFill>
                 <a:latin typeface="Calibri" pitchFamily="34" charset="0"/>
-                <a:ea typeface="Calibri" pitchFamily="34" charset="-122"/>
-                <a:cs typeface="Calibri" pitchFamily="34" charset="-120"/>
+                <a:cs typeface="Amiri" pitchFamily="2" charset="-78"/>
               </a:rPr>
               <a:t>Professional Arabic — Diplomacy, journalism, medicine, business, engineering and translation all open with Arabic.</a:t>
             </a:r>
@@ -7006,8 +6893,7 @@
                   <a:srgbClr val="D4AF37"/>
                 </a:solidFill>
                 <a:latin typeface="Calibri" pitchFamily="34" charset="0"/>
-                <a:ea typeface="Calibri" pitchFamily="34" charset="-122"/>
-                <a:cs typeface="Calibri" pitchFamily="34" charset="-120"/>
+                <a:cs typeface="Amiri" pitchFamily="2" charset="-78"/>
               </a:rPr>
               <a:t>4</a:t>
             </a:r>
@@ -7045,8 +6931,7 @@
                   <a:srgbClr val="1F2A37"/>
                 </a:solidFill>
                 <a:latin typeface="Calibri" pitchFamily="34" charset="0"/>
-                <a:ea typeface="Calibri" pitchFamily="34" charset="-122"/>
-                <a:cs typeface="Calibri" pitchFamily="34" charset="-120"/>
+                <a:cs typeface="Amiri" pitchFamily="2" charset="-78"/>
               </a:rPr>
               <a:t>Personal Arabic — Travel, heritage, cultural engagement and dialogue — Arabic is a key to a world, not a school subject.</a:t>
             </a:r>
@@ -7118,8 +7003,7 @@
                   <a:srgbClr val="8A6D1E"/>
                 </a:solidFill>
                 <a:latin typeface="Calibri" pitchFamily="34" charset="0"/>
-                <a:ea typeface="Calibri" pitchFamily="34" charset="-122"/>
-                <a:cs typeface="Calibri" pitchFamily="34" charset="-120"/>
+                <a:cs typeface="Amiri" pitchFamily="2" charset="-78"/>
               </a:rPr>
               <a:t>IN ARABIC</a:t>
             </a:r>
@@ -7156,9 +7040,8 @@
                 <a:solidFill>
                   <a:srgbClr val="1B3B6F"/>
                 </a:solidFill>
-                <a:latin typeface="Amiri" pitchFamily="34" charset="0"/>
-                <a:ea typeface="Amiri" pitchFamily="34" charset="-122"/>
-                <a:cs typeface="Amiri" pitchFamily="34" charset="-120"/>
+                <a:latin typeface="Amiri" pitchFamily="2" charset="-78"/>
+                <a:cs typeface="Amiri" pitchFamily="2" charset="-78"/>
               </a:rPr>
               <a:t>العَرَبِيَّةُ مِفْتَاحٌ إِلَى عَالَمٍ.</a:t>
             </a:r>
@@ -7196,8 +7079,7 @@
                   <a:srgbClr val="5A6472"/>
                 </a:solidFill>
                 <a:latin typeface="Calibri" pitchFamily="34" charset="0"/>
-                <a:ea typeface="Calibri" pitchFamily="34" charset="-122"/>
-                <a:cs typeface="Calibri" pitchFamily="34" charset="-120"/>
+                <a:cs typeface="Amiri" pitchFamily="2" charset="-78"/>
               </a:rPr>
               <a:t>Arabic is a key to a world.</a:t>
             </a:r>
@@ -7257,9 +7139,8 @@
                 <a:solidFill>
                   <a:srgbClr val="1B3B6F"/>
                 </a:solidFill>
-                <a:latin typeface="Amiri" pitchFamily="34" charset="0"/>
-                <a:ea typeface="Amiri" pitchFamily="34" charset="-122"/>
-                <a:cs typeface="Amiri" pitchFamily="34" charset="-120"/>
+                <a:latin typeface="Amiri" pitchFamily="2" charset="-78"/>
+                <a:cs typeface="Amiri" pitchFamily="2" charset="-78"/>
               </a:rPr>
               <a:t>لُغَةُ القُرْآنِ الكَرِيمِ</a:t>
             </a:r>
@@ -7297,8 +7178,7 @@
                   <a:srgbClr val="5A6472"/>
                 </a:solidFill>
                 <a:latin typeface="Calibri" pitchFamily="34" charset="0"/>
-                <a:ea typeface="Calibri" pitchFamily="34" charset="-122"/>
-                <a:cs typeface="Calibri" pitchFamily="34" charset="-120"/>
+                <a:cs typeface="Amiri" pitchFamily="2" charset="-78"/>
               </a:rPr>
               <a:t>the language of the Qur’an — understood, not only recited</a:t>
             </a:r>
@@ -7358,9 +7238,8 @@
                 <a:solidFill>
                   <a:srgbClr val="1B3B6F"/>
                 </a:solidFill>
-                <a:latin typeface="Amiri" pitchFamily="34" charset="0"/>
-                <a:ea typeface="Amiri" pitchFamily="34" charset="-122"/>
-                <a:cs typeface="Amiri" pitchFamily="34" charset="-120"/>
+                <a:latin typeface="Amiri" pitchFamily="2" charset="-78"/>
+                <a:cs typeface="Amiri" pitchFamily="2" charset="-78"/>
               </a:rPr>
               <a:t>أَرْبَعُمِائَةِ مِلْيُونِ مُتَحَدِّثٍ</a:t>
             </a:r>
@@ -7398,8 +7277,7 @@
                   <a:srgbClr val="5A6472"/>
                 </a:solidFill>
                 <a:latin typeface="Calibri" pitchFamily="34" charset="0"/>
-                <a:ea typeface="Calibri" pitchFamily="34" charset="-122"/>
-                <a:cs typeface="Calibri" pitchFamily="34" charset="-120"/>
+                <a:cs typeface="Amiri" pitchFamily="2" charset="-78"/>
               </a:rPr>
               <a:t>400 million speakers</a:t>
             </a:r>
@@ -7437,8 +7315,7 @@
                   <a:srgbClr val="8A93A0"/>
                 </a:solidFill>
                 <a:latin typeface="Calibri" pitchFamily="34" charset="0"/>
-                <a:ea typeface="Calibri" pitchFamily="34" charset="-122"/>
-                <a:cs typeface="Calibri" pitchFamily="34" charset="-120"/>
+                <a:cs typeface="Amiri" pitchFamily="2" charset="-78"/>
               </a:rPr>
               <a:t>13 / 17</a:t>
             </a:r>
@@ -7532,9 +7409,8 @@
                 <a:solidFill>
                   <a:srgbClr val="D4AF37"/>
                 </a:solidFill>
-                <a:latin typeface="Amiri" pitchFamily="34" charset="0"/>
-                <a:ea typeface="Amiri" pitchFamily="34" charset="-122"/>
-                <a:cs typeface="Amiri" pitchFamily="34" charset="-120"/>
+                <a:latin typeface="Amiri" pitchFamily="2" charset="-78"/>
+                <a:cs typeface="Amiri" pitchFamily="2" charset="-78"/>
               </a:rPr>
               <a:t>م</a:t>
             </a:r>
@@ -7572,8 +7448,7 @@
                   <a:srgbClr val="1B3B6F"/>
                 </a:solidFill>
                 <a:latin typeface="Cambria" pitchFamily="34" charset="0"/>
-                <a:ea typeface="Cambria" pitchFamily="34" charset="-122"/>
-                <a:cs typeface="Cambria" pitchFamily="34" charset="-120"/>
+                <a:cs typeface="Amiri" pitchFamily="2" charset="-78"/>
               </a:rPr>
               <a:t>Al Madina Online School</a:t>
             </a:r>
@@ -7611,8 +7486,7 @@
                   <a:srgbClr val="8A6D1E"/>
                 </a:solidFill>
                 <a:latin typeface="Calibri" pitchFamily="34" charset="0"/>
-                <a:ea typeface="Calibri" pitchFamily="34" charset="-122"/>
-                <a:cs typeface="Calibri" pitchFamily="34" charset="-120"/>
+                <a:cs typeface="Amiri" pitchFamily="2" charset="-78"/>
               </a:rPr>
               <a:t>ARABIC DEPARTMENT · MIFTAH ARABIC · IGCSE 0544</a:t>
             </a:r>
@@ -7677,8 +7551,7 @@
                   <a:srgbClr val="FFFFFF"/>
                 </a:solidFill>
                 <a:latin typeface="Calibri" pitchFamily="34" charset="0"/>
-                <a:ea typeface="Calibri" pitchFamily="34" charset="-122"/>
-                <a:cs typeface="Calibri" pitchFamily="34" charset="-120"/>
+                <a:cs typeface="Amiri" pitchFamily="2" charset="-78"/>
               </a:rPr>
               <a:t>P6-L12 · IGCSE Bridge</a:t>
             </a:r>
@@ -7743,8 +7616,7 @@
                   <a:srgbClr val="FFFFFF"/>
                 </a:solidFill>
                 <a:latin typeface="Calibri" pitchFamily="34" charset="0"/>
-                <a:ea typeface="Calibri" pitchFamily="34" charset="-122"/>
-                <a:cs typeface="Calibri" pitchFamily="34" charset="-120"/>
+                <a:cs typeface="Amiri" pitchFamily="2" charset="-78"/>
               </a:rPr>
               <a:t>FEEDBACK · 3 MIN</a:t>
             </a:r>
@@ -7782,8 +7654,7 @@
                   <a:srgbClr val="8A6D1E"/>
                 </a:solidFill>
                 <a:latin typeface="Calibri" pitchFamily="34" charset="0"/>
-                <a:ea typeface="Calibri" pitchFamily="34" charset="-122"/>
-                <a:cs typeface="Calibri" pitchFamily="34" charset="-120"/>
+                <a:cs typeface="Amiri" pitchFamily="2" charset="-78"/>
               </a:rPr>
               <a:t>FEEDBACK · THE PROGRAMME IS COMPLETE (WEBSITE)</a:t>
             </a:r>
@@ -7821,8 +7692,7 @@
                   <a:srgbClr val="1B3B6F"/>
                 </a:solidFill>
                 <a:latin typeface="Cambria" pitchFamily="34" charset="0"/>
-                <a:ea typeface="Cambria" pitchFamily="34" charset="-122"/>
-                <a:cs typeface="Cambria" pitchFamily="34" charset="-120"/>
+                <a:cs typeface="Amiri" pitchFamily="2" charset="-78"/>
               </a:rPr>
               <a:t>The programme is complete</a:t>
             </a:r>
@@ -7859,9 +7729,8 @@
                 <a:solidFill>
                   <a:srgbClr val="8A6D1E"/>
                 </a:solidFill>
-                <a:latin typeface="Amiri" pitchFamily="34" charset="0"/>
-                <a:ea typeface="Amiri" pitchFamily="34" charset="-122"/>
-                <a:cs typeface="Amiri" pitchFamily="34" charset="-120"/>
+                <a:latin typeface="Amiri" pitchFamily="2" charset="-78"/>
+                <a:cs typeface="Amiri" pitchFamily="2" charset="-78"/>
               </a:rPr>
               <a:t>اكْتَمَلَ البَرْنَامَجُ</a:t>
             </a:r>
@@ -7899,8 +7768,7 @@
                   <a:srgbClr val="8A93A0"/>
                 </a:solidFill>
                 <a:latin typeface="Calibri" pitchFamily="34" charset="0"/>
-                <a:ea typeface="Calibri" pitchFamily="34" charset="-122"/>
-                <a:cs typeface="Calibri" pitchFamily="34" charset="-120"/>
+                <a:cs typeface="Amiri" pitchFamily="2" charset="-78"/>
               </a:rPr>
               <a:t>Miftah Arabic · Progression P6 · IGCSE Bridge · P6-L12</a:t>
             </a:r>
@@ -7972,8 +7840,7 @@
                   <a:srgbClr val="1B3B6F"/>
                 </a:solidFill>
                 <a:latin typeface="Calibri" pitchFamily="34" charset="0"/>
-                <a:ea typeface="Calibri" pitchFamily="34" charset="-122"/>
-                <a:cs typeface="Calibri" pitchFamily="34" charset="-120"/>
+                <a:cs typeface="Amiri" pitchFamily="2" charset="-78"/>
               </a:rPr>
               <a:t>WHAT YOU NEED TO KNOW</a:t>
             </a:r>
@@ -8036,8 +7903,7 @@
                   <a:srgbClr val="D4AF37"/>
                 </a:solidFill>
                 <a:latin typeface="Calibri" pitchFamily="34" charset="0"/>
-                <a:ea typeface="Calibri" pitchFamily="34" charset="-122"/>
-                <a:cs typeface="Calibri" pitchFamily="34" charset="-120"/>
+                <a:cs typeface="Amiri" pitchFamily="2" charset="-78"/>
               </a:rPr>
               <a:t>1</a:t>
             </a:r>
@@ -8075,8 +7941,7 @@
                   <a:srgbClr val="1F2A37"/>
                 </a:solidFill>
                 <a:latin typeface="Calibri" pitchFamily="34" charset="0"/>
-                <a:ea typeface="Calibri" pitchFamily="34" charset="-122"/>
-                <a:cs typeface="Calibri" pitchFamily="34" charset="-120"/>
+                <a:cs typeface="Amiri" pitchFamily="2" charset="-78"/>
               </a:rPr>
               <a:t>The Cambridge IGCSE Arabic 0544 preparation programme — F1 to P6, 216 lessons — is complete. You can now speak, read, write and listen in Arabic: the language of 400 million people and of a civilisation spanning fourteen centuries.</a:t>
             </a:r>
@@ -8139,8 +8004,7 @@
                   <a:srgbClr val="D4AF37"/>
                 </a:solidFill>
                 <a:latin typeface="Calibri" pitchFamily="34" charset="0"/>
-                <a:ea typeface="Calibri" pitchFamily="34" charset="-122"/>
-                <a:cs typeface="Calibri" pitchFamily="34" charset="-120"/>
+                <a:cs typeface="Amiri" pitchFamily="2" charset="-78"/>
               </a:rPr>
               <a:t>2</a:t>
             </a:r>
@@ -8178,8 +8042,7 @@
                   <a:srgbClr val="1F2A37"/>
                 </a:solidFill>
                 <a:latin typeface="Calibri" pitchFamily="34" charset="0"/>
-                <a:ea typeface="Calibri" pitchFamily="34" charset="-122"/>
-                <a:cs typeface="Calibri" pitchFamily="34" charset="-120"/>
+                <a:cs typeface="Amiri" pitchFamily="2" charset="-78"/>
               </a:rPr>
               <a:t>Use it: read, speak and write Arabic every week — even after the exam.</a:t>
             </a:r>
@@ -8251,8 +8114,7 @@
                   <a:srgbClr val="8A6D1E"/>
                 </a:solidFill>
                 <a:latin typeface="Calibri" pitchFamily="34" charset="0"/>
-                <a:ea typeface="Calibri" pitchFamily="34" charset="-122"/>
-                <a:cs typeface="Calibri" pitchFamily="34" charset="-120"/>
+                <a:cs typeface="Amiri" pitchFamily="2" charset="-78"/>
               </a:rPr>
               <a:t>TWO SENTENCES TO KEEP (WEBSITE)</a:t>
             </a:r>
@@ -8289,9 +8151,8 @@
                 <a:solidFill>
                   <a:srgbClr val="1B3B6F"/>
                 </a:solidFill>
-                <a:latin typeface="Amiri" pitchFamily="34" charset="0"/>
-                <a:ea typeface="Amiri" pitchFamily="34" charset="-122"/>
-                <a:cs typeface="Amiri" pitchFamily="34" charset="-120"/>
+                <a:latin typeface="Amiri" pitchFamily="2" charset="-78"/>
+                <a:cs typeface="Amiri" pitchFamily="2" charset="-78"/>
               </a:rPr>
               <a:t>العَرَبِيَّةُ الآنَ لَكَ.</a:t>
             </a:r>
@@ -8329,8 +8190,7 @@
                   <a:srgbClr val="5A6472"/>
                 </a:solidFill>
                 <a:latin typeface="Calibri" pitchFamily="34" charset="0"/>
-                <a:ea typeface="Calibri" pitchFamily="34" charset="-122"/>
-                <a:cs typeface="Calibri" pitchFamily="34" charset="-120"/>
+                <a:cs typeface="Amiri" pitchFamily="2" charset="-78"/>
               </a:rPr>
               <a:t>Arabic is now yours.</a:t>
             </a:r>
@@ -8393,9 +8253,8 @@
                 <a:solidFill>
                   <a:srgbClr val="1B3B6F"/>
                 </a:solidFill>
-                <a:latin typeface="Amiri" pitchFamily="34" charset="0"/>
-                <a:ea typeface="Amiri" pitchFamily="34" charset="-122"/>
-                <a:cs typeface="Amiri" pitchFamily="34" charset="-120"/>
+                <a:latin typeface="Amiri" pitchFamily="2" charset="-78"/>
+                <a:cs typeface="Amiri" pitchFamily="2" charset="-78"/>
               </a:rPr>
               <a:t>الامْتِحَانُ جِسْرٌ — وَالجِسْرُ يُوصِلُكَ إِلَى الضَّفَّةِ الأُخْرَى.</a:t>
             </a:r>
@@ -8433,8 +8292,7 @@
                   <a:srgbClr val="5A6472"/>
                 </a:solidFill>
                 <a:latin typeface="Calibri" pitchFamily="34" charset="0"/>
-                <a:ea typeface="Calibri" pitchFamily="34" charset="-122"/>
-                <a:cs typeface="Calibri" pitchFamily="34" charset="-120"/>
+                <a:cs typeface="Amiri" pitchFamily="2" charset="-78"/>
               </a:rPr>
               <a:t>The exam is a bridge — and a bridge takes you to the other bank.</a:t>
             </a:r>
@@ -8472,8 +8330,7 @@
                   <a:srgbClr val="8A93A0"/>
                 </a:solidFill>
                 <a:latin typeface="Calibri" pitchFamily="34" charset="0"/>
-                <a:ea typeface="Calibri" pitchFamily="34" charset="-122"/>
-                <a:cs typeface="Calibri" pitchFamily="34" charset="-120"/>
+                <a:cs typeface="Amiri" pitchFamily="2" charset="-78"/>
               </a:rPr>
               <a:t>14 / 17</a:t>
             </a:r>
@@ -8567,9 +8424,8 @@
                 <a:solidFill>
                   <a:srgbClr val="D4AF37"/>
                 </a:solidFill>
-                <a:latin typeface="Amiri" pitchFamily="34" charset="0"/>
-                <a:ea typeface="Amiri" pitchFamily="34" charset="-122"/>
-                <a:cs typeface="Amiri" pitchFamily="34" charset="-120"/>
+                <a:latin typeface="Amiri" pitchFamily="2" charset="-78"/>
+                <a:cs typeface="Amiri" pitchFamily="2" charset="-78"/>
               </a:rPr>
               <a:t>م</a:t>
             </a:r>
@@ -8607,8 +8463,7 @@
                   <a:srgbClr val="1B3B6F"/>
                 </a:solidFill>
                 <a:latin typeface="Cambria" pitchFamily="34" charset="0"/>
-                <a:ea typeface="Cambria" pitchFamily="34" charset="-122"/>
-                <a:cs typeface="Cambria" pitchFamily="34" charset="-120"/>
+                <a:cs typeface="Amiri" pitchFamily="2" charset="-78"/>
               </a:rPr>
               <a:t>Al Madina Online School</a:t>
             </a:r>
@@ -8646,8 +8501,7 @@
                   <a:srgbClr val="8A6D1E"/>
                 </a:solidFill>
                 <a:latin typeface="Calibri" pitchFamily="34" charset="0"/>
-                <a:ea typeface="Calibri" pitchFamily="34" charset="-122"/>
-                <a:cs typeface="Calibri" pitchFamily="34" charset="-120"/>
+                <a:cs typeface="Amiri" pitchFamily="2" charset="-78"/>
               </a:rPr>
               <a:t>ARABIC DEPARTMENT · MIFTAH ARABIC · IGCSE 0544</a:t>
             </a:r>
@@ -8712,8 +8566,7 @@
                   <a:srgbClr val="FFFFFF"/>
                 </a:solidFill>
                 <a:latin typeface="Calibri" pitchFamily="34" charset="0"/>
-                <a:ea typeface="Calibri" pitchFamily="34" charset="-122"/>
-                <a:cs typeface="Calibri" pitchFamily="34" charset="-120"/>
+                <a:cs typeface="Amiri" pitchFamily="2" charset="-78"/>
               </a:rPr>
               <a:t>P6-L12 · IGCSE Bridge</a:t>
             </a:r>
@@ -8778,8 +8631,7 @@
                   <a:srgbClr val="FFFFFF"/>
                 </a:solidFill>
                 <a:latin typeface="Calibri" pitchFamily="34" charset="0"/>
-                <a:ea typeface="Calibri" pitchFamily="34" charset="-122"/>
-                <a:cs typeface="Calibri" pitchFamily="34" charset="-120"/>
+                <a:cs typeface="Amiri" pitchFamily="2" charset="-78"/>
               </a:rPr>
               <a:t>FEEDBACK · 2 MIN</a:t>
             </a:r>
@@ -8817,8 +8669,7 @@
                   <a:srgbClr val="8A6D1E"/>
                 </a:solidFill>
                 <a:latin typeface="Calibri" pitchFamily="34" charset="0"/>
-                <a:ea typeface="Calibri" pitchFamily="34" charset="-122"/>
-                <a:cs typeface="Calibri" pitchFamily="34" charset="-120"/>
+                <a:cs typeface="Amiri" pitchFamily="2" charset="-78"/>
               </a:rPr>
               <a:t>FEEDBACK · THE ROAD AHEAD (WEBSITE)</a:t>
             </a:r>
@@ -8856,8 +8707,7 @@
                   <a:srgbClr val="1B3B6F"/>
                 </a:solidFill>
                 <a:latin typeface="Cambria" pitchFamily="34" charset="0"/>
-                <a:ea typeface="Cambria" pitchFamily="34" charset="-122"/>
-                <a:cs typeface="Cambria" pitchFamily="34" charset="-120"/>
+                <a:cs typeface="Amiri" pitchFamily="2" charset="-78"/>
               </a:rPr>
               <a:t>Final reflection</a:t>
             </a:r>
@@ -8894,9 +8744,8 @@
                 <a:solidFill>
                   <a:srgbClr val="8A6D1E"/>
                 </a:solidFill>
-                <a:latin typeface="Amiri" pitchFamily="34" charset="0"/>
-                <a:ea typeface="Amiri" pitchFamily="34" charset="-122"/>
-                <a:cs typeface="Amiri" pitchFamily="34" charset="-120"/>
+                <a:latin typeface="Amiri" pitchFamily="2" charset="-78"/>
+                <a:cs typeface="Amiri" pitchFamily="2" charset="-78"/>
               </a:rPr>
               <a:t>التَّأَمُّلُ الأَخِيرُ</a:t>
             </a:r>
@@ -8934,8 +8783,7 @@
                   <a:srgbClr val="8A93A0"/>
                 </a:solidFill>
                 <a:latin typeface="Calibri" pitchFamily="34" charset="0"/>
-                <a:ea typeface="Calibri" pitchFamily="34" charset="-122"/>
-                <a:cs typeface="Calibri" pitchFamily="34" charset="-120"/>
+                <a:cs typeface="Amiri" pitchFamily="2" charset="-78"/>
               </a:rPr>
               <a:t>Miftah Arabic · Progression P6 · IGCSE Bridge · P6-L12</a:t>
             </a:r>
@@ -8998,8 +8846,7 @@
                   <a:srgbClr val="FFFFFF"/>
                 </a:solidFill>
                 <a:latin typeface="Calibri" pitchFamily="34" charset="0"/>
-                <a:ea typeface="Calibri" pitchFamily="34" charset="-122"/>
-                <a:cs typeface="Calibri" pitchFamily="34" charset="-120"/>
+                <a:cs typeface="Amiri" pitchFamily="2" charset="-78"/>
               </a:rPr>
               <a:t>Model ending</a:t>
             </a:r>
@@ -9037,8 +8884,7 @@
                   <a:srgbClr val="FFFFFF"/>
                 </a:solidFill>
                 <a:latin typeface="Calibri" pitchFamily="34" charset="0"/>
-                <a:ea typeface="Calibri" pitchFamily="34" charset="-122"/>
-                <a:cs typeface="Calibri" pitchFamily="34" charset="-120"/>
+                <a:cs typeface="Amiri" pitchFamily="2" charset="-78"/>
               </a:rPr>
               <a:t>Meaning</a:t>
             </a:r>
@@ -9076,8 +8922,7 @@
                   <a:srgbClr val="FFFFFF"/>
                 </a:solidFill>
                 <a:latin typeface="Calibri" pitchFamily="34" charset="0"/>
-                <a:ea typeface="Calibri" pitchFamily="34" charset="-122"/>
-                <a:cs typeface="Calibri" pitchFamily="34" charset="-120"/>
+                <a:cs typeface="Amiri" pitchFamily="2" charset="-78"/>
               </a:rPr>
               <a:t>Reflection frame (website)</a:t>
             </a:r>
@@ -9142,8 +8987,7 @@
                   <a:srgbClr val="5A6472"/>
                 </a:solidFill>
                 <a:latin typeface="Calibri" pitchFamily="34" charset="0"/>
-                <a:ea typeface="Calibri" pitchFamily="34" charset="-122"/>
-                <a:cs typeface="Calibri" pitchFamily="34" charset="-120"/>
+                <a:cs typeface="Amiri" pitchFamily="2" charset="-78"/>
               </a:rPr>
               <a:t>writing a full essay in Arabic</a:t>
             </a:r>
@@ -9181,8 +9025,7 @@
                   <a:srgbClr val="5A6472"/>
                 </a:solidFill>
                 <a:latin typeface="Calibri" pitchFamily="34" charset="0"/>
-                <a:ea typeface="Calibri" pitchFamily="34" charset="-122"/>
-                <a:cs typeface="Calibri" pitchFamily="34" charset="-120"/>
+                <a:cs typeface="Amiri" pitchFamily="2" charset="-78"/>
               </a:rPr>
               <a:t>what I am proudest of this year</a:t>
             </a:r>
@@ -9220,8 +9063,7 @@
                   <a:srgbClr val="5A6472"/>
                 </a:solidFill>
                 <a:latin typeface="Calibri" pitchFamily="34" charset="0"/>
-                <a:ea typeface="Calibri" pitchFamily="34" charset="-122"/>
-                <a:cs typeface="Calibri" pitchFamily="34" charset="-120"/>
+                <a:cs typeface="Amiri" pitchFamily="2" charset="-78"/>
               </a:rPr>
               <a:t>In Year 9 I am proudest of…</a:t>
             </a:r>
@@ -9286,8 +9128,7 @@
                   <a:srgbClr val="5A6472"/>
                 </a:solidFill>
                 <a:latin typeface="Calibri" pitchFamily="34" charset="0"/>
-                <a:ea typeface="Calibri" pitchFamily="34" charset="-122"/>
-                <a:cs typeface="Calibri" pitchFamily="34" charset="-120"/>
+                <a:cs typeface="Amiri" pitchFamily="2" charset="-78"/>
               </a:rPr>
               <a:t>reading the Qur’an and travelling</a:t>
             </a:r>
@@ -9325,8 +9166,7 @@
                   <a:srgbClr val="5A6472"/>
                 </a:solidFill>
                 <a:latin typeface="Calibri" pitchFamily="34" charset="0"/>
-                <a:ea typeface="Calibri" pitchFamily="34" charset="-122"/>
-                <a:cs typeface="Calibri" pitchFamily="34" charset="-120"/>
+                <a:cs typeface="Amiri" pitchFamily="2" charset="-78"/>
               </a:rPr>
               <a:t>what I will use my Arabic for</a:t>
             </a:r>
@@ -9364,8 +9204,7 @@
                   <a:srgbClr val="5A6472"/>
                 </a:solidFill>
                 <a:latin typeface="Calibri" pitchFamily="34" charset="0"/>
-                <a:ea typeface="Calibri" pitchFamily="34" charset="-122"/>
-                <a:cs typeface="Calibri" pitchFamily="34" charset="-120"/>
+                <a:cs typeface="Amiri" pitchFamily="2" charset="-78"/>
               </a:rPr>
               <a:t>I will use my Arabic to…</a:t>
             </a:r>
@@ -9429,9 +9268,8 @@
                 <a:solidFill>
                   <a:srgbClr val="1B3B6F"/>
                 </a:solidFill>
-                <a:latin typeface="Amiri" pitchFamily="34" charset="0"/>
-                <a:ea typeface="Amiri" pitchFamily="34" charset="-122"/>
-                <a:cs typeface="Amiri" pitchFamily="34" charset="-120"/>
+                <a:latin typeface="Amiri" pitchFamily="2" charset="-78"/>
+                <a:cs typeface="Amiri" pitchFamily="2" charset="-78"/>
               </a:rPr>
               <a:t>تَعَلَّمْتُ العَرَبِيَّةَ</a:t>
             </a:r>
@@ -9469,8 +9307,7 @@
                   <a:srgbClr val="5A6472"/>
                 </a:solidFill>
                 <a:latin typeface="Calibri" pitchFamily="34" charset="0"/>
-                <a:ea typeface="Calibri" pitchFamily="34" charset="-122"/>
-                <a:cs typeface="Calibri" pitchFamily="34" charset="-120"/>
+                <a:cs typeface="Amiri" pitchFamily="2" charset="-78"/>
               </a:rPr>
               <a:t>I am proud that I … (girls: anā fakhūratun)</a:t>
             </a:r>
@@ -9507,9 +9344,8 @@
                 <a:solidFill>
                   <a:srgbClr val="1B3B6F"/>
                 </a:solidFill>
-                <a:latin typeface="Amiri" pitchFamily="34" charset="0"/>
-                <a:ea typeface="Amiri" pitchFamily="34" charset="-122"/>
-                <a:cs typeface="Amiri" pitchFamily="34" charset="-120"/>
+                <a:latin typeface="Amiri" pitchFamily="2" charset="-78"/>
+                <a:cs typeface="Amiri" pitchFamily="2" charset="-78"/>
               </a:rPr>
               <a:t>أَنَا فَخُورٌ بِأَنِّي ______ .</a:t>
             </a:r>
@@ -9547,8 +9383,7 @@
                   <a:srgbClr val="1B3B6F"/>
                 </a:solidFill>
                 <a:latin typeface="Calibri" pitchFamily="34" charset="0"/>
-                <a:ea typeface="Calibri" pitchFamily="34" charset="-122"/>
-                <a:cs typeface="Calibri" pitchFamily="34" charset="-120"/>
+                <a:cs typeface="Amiri" pitchFamily="2" charset="-78"/>
               </a:rPr>
               <a:t>Whatever grade the exam returns, you are an Arabic speaker — and that does not expire.</a:t>
             </a:r>
@@ -9586,8 +9421,7 @@
                   <a:srgbClr val="8A93A0"/>
                 </a:solidFill>
                 <a:latin typeface="Calibri" pitchFamily="34" charset="0"/>
-                <a:ea typeface="Calibri" pitchFamily="34" charset="-122"/>
-                <a:cs typeface="Calibri" pitchFamily="34" charset="-120"/>
+                <a:cs typeface="Amiri" pitchFamily="2" charset="-78"/>
               </a:rPr>
               <a:t>15 / 17</a:t>
             </a:r>
@@ -9681,9 +9515,8 @@
                 <a:solidFill>
                   <a:srgbClr val="D4AF37"/>
                 </a:solidFill>
-                <a:latin typeface="Amiri" pitchFamily="34" charset="0"/>
-                <a:ea typeface="Amiri" pitchFamily="34" charset="-122"/>
-                <a:cs typeface="Amiri" pitchFamily="34" charset="-120"/>
+                <a:latin typeface="Amiri" pitchFamily="2" charset="-78"/>
+                <a:cs typeface="Amiri" pitchFamily="2" charset="-78"/>
               </a:rPr>
               <a:t>م</a:t>
             </a:r>
@@ -9721,8 +9554,7 @@
                   <a:srgbClr val="1B3B6F"/>
                 </a:solidFill>
                 <a:latin typeface="Cambria" pitchFamily="34" charset="0"/>
-                <a:ea typeface="Cambria" pitchFamily="34" charset="-122"/>
-                <a:cs typeface="Cambria" pitchFamily="34" charset="-120"/>
+                <a:cs typeface="Amiri" pitchFamily="2" charset="-78"/>
               </a:rPr>
               <a:t>Al Madina Online School</a:t>
             </a:r>
@@ -9760,8 +9592,7 @@
                   <a:srgbClr val="8A6D1E"/>
                 </a:solidFill>
                 <a:latin typeface="Calibri" pitchFamily="34" charset="0"/>
-                <a:ea typeface="Calibri" pitchFamily="34" charset="-122"/>
-                <a:cs typeface="Calibri" pitchFamily="34" charset="-120"/>
+                <a:cs typeface="Amiri" pitchFamily="2" charset="-78"/>
               </a:rPr>
               <a:t>ARABIC DEPARTMENT · MIFTAH ARABIC · IGCSE 0544</a:t>
             </a:r>
@@ -9826,8 +9657,7 @@
                   <a:srgbClr val="FFFFFF"/>
                 </a:solidFill>
                 <a:latin typeface="Calibri" pitchFamily="34" charset="0"/>
-                <a:ea typeface="Calibri" pitchFamily="34" charset="-122"/>
-                <a:cs typeface="Calibri" pitchFamily="34" charset="-120"/>
+                <a:cs typeface="Amiri" pitchFamily="2" charset="-78"/>
               </a:rPr>
               <a:t>P6-L12 · IGCSE Bridge</a:t>
             </a:r>
@@ -9892,8 +9722,7 @@
                   <a:srgbClr val="FFFFFF"/>
                 </a:solidFill>
                 <a:latin typeface="Calibri" pitchFamily="34" charset="0"/>
-                <a:ea typeface="Calibri" pitchFamily="34" charset="-122"/>
-                <a:cs typeface="Calibri" pitchFamily="34" charset="-120"/>
+                <a:cs typeface="Amiri" pitchFamily="2" charset="-78"/>
               </a:rPr>
               <a:t>FEEDBACK · 1 MIN</a:t>
             </a:r>
@@ -9931,8 +9760,7 @@
                   <a:srgbClr val="8A6D1E"/>
                 </a:solidFill>
                 <a:latin typeface="Calibri" pitchFamily="34" charset="0"/>
-                <a:ea typeface="Calibri" pitchFamily="34" charset="-122"/>
-                <a:cs typeface="Calibri" pitchFamily="34" charset="-120"/>
+                <a:cs typeface="Amiri" pitchFamily="2" charset="-78"/>
               </a:rPr>
               <a:t>FEEDBACK · SUCCESS CRITERIA</a:t>
             </a:r>
@@ -9970,8 +9798,7 @@
                   <a:srgbClr val="1B3B6F"/>
                 </a:solidFill>
                 <a:latin typeface="Cambria" pitchFamily="34" charset="0"/>
-                <a:ea typeface="Cambria" pitchFamily="34" charset="-122"/>
-                <a:cs typeface="Cambria" pitchFamily="34" charset="-120"/>
+                <a:cs typeface="Amiri" pitchFamily="2" charset="-78"/>
               </a:rPr>
               <a:t>Check your work</a:t>
             </a:r>
@@ -10008,9 +9835,8 @@
                 <a:solidFill>
                   <a:srgbClr val="8A6D1E"/>
                 </a:solidFill>
-                <a:latin typeface="Amiri" pitchFamily="34" charset="0"/>
-                <a:ea typeface="Amiri" pitchFamily="34" charset="-122"/>
-                <a:cs typeface="Amiri" pitchFamily="34" charset="-120"/>
+                <a:latin typeface="Amiri" pitchFamily="2" charset="-78"/>
+                <a:cs typeface="Amiri" pitchFamily="2" charset="-78"/>
               </a:rPr>
               <a:t>قَيِّمْ عَمَلَكَ</a:t>
             </a:r>
@@ -10048,8 +9874,7 @@
                   <a:srgbClr val="8A93A0"/>
                 </a:solidFill>
                 <a:latin typeface="Calibri" pitchFamily="34" charset="0"/>
-                <a:ea typeface="Calibri" pitchFamily="34" charset="-122"/>
-                <a:cs typeface="Calibri" pitchFamily="34" charset="-120"/>
+                <a:cs typeface="Amiri" pitchFamily="2" charset="-78"/>
               </a:rPr>
               <a:t>Miftah Arabic · Progression P6 · IGCSE Bridge · P6-L12</a:t>
             </a:r>
@@ -10146,8 +9971,7 @@
                   <a:srgbClr val="1F2A37"/>
                 </a:solidFill>
                 <a:latin typeface="Calibri" pitchFamily="34" charset="0"/>
-                <a:ea typeface="Calibri" pitchFamily="34" charset="-122"/>
-                <a:cs typeface="Calibri" pitchFamily="34" charset="-120"/>
+                <a:cs typeface="Amiri" pitchFamily="2" charset="-78"/>
               </a:rPr>
               <a:t>I can name how far I have come as an Arabic learner.</a:t>
             </a:r>
@@ -10212,8 +10036,7 @@
                   <a:srgbClr val="FFFFFF"/>
                 </a:solidFill>
                 <a:latin typeface="Calibri" pitchFamily="34" charset="0"/>
-                <a:ea typeface="Calibri" pitchFamily="34" charset="-122"/>
-                <a:cs typeface="Calibri" pitchFamily="34" charset="-120"/>
+                <a:cs typeface="Amiri" pitchFamily="2" charset="-78"/>
               </a:rPr>
               <a:t>CORE</a:t>
             </a:r>
@@ -10310,8 +10133,7 @@
                   <a:srgbClr val="1F2A37"/>
                 </a:solidFill>
                 <a:latin typeface="Calibri" pitchFamily="34" charset="0"/>
-                <a:ea typeface="Calibri" pitchFamily="34" charset="-122"/>
-                <a:cs typeface="Calibri" pitchFamily="34" charset="-120"/>
+                <a:cs typeface="Amiri" pitchFamily="2" charset="-78"/>
               </a:rPr>
               <a:t>I can communicate freely in Arabic without a script.</a:t>
             </a:r>
@@ -10376,8 +10198,7 @@
                   <a:srgbClr val="FFFFFF"/>
                 </a:solidFill>
                 <a:latin typeface="Calibri" pitchFamily="34" charset="0"/>
-                <a:ea typeface="Calibri" pitchFamily="34" charset="-122"/>
-                <a:cs typeface="Calibri" pitchFamily="34" charset="-120"/>
+                <a:cs typeface="Amiri" pitchFamily="2" charset="-78"/>
               </a:rPr>
               <a:t>STRETCH</a:t>
             </a:r>
@@ -10474,8 +10295,7 @@
                   <a:srgbClr val="1F2A37"/>
                 </a:solidFill>
                 <a:latin typeface="Calibri" pitchFamily="34" charset="0"/>
-                <a:ea typeface="Calibri" pitchFamily="34" charset="-122"/>
-                <a:cs typeface="Calibri" pitchFamily="34" charset="-120"/>
+                <a:cs typeface="Amiri" pitchFamily="2" charset="-78"/>
               </a:rPr>
               <a:t>I have recorded my proudest Arabic sentence.</a:t>
             </a:r>
@@ -10540,8 +10360,7 @@
                   <a:srgbClr val="FFFFFF"/>
                 </a:solidFill>
                 <a:latin typeface="Calibri" pitchFamily="34" charset="0"/>
-                <a:ea typeface="Calibri" pitchFamily="34" charset="-122"/>
-                <a:cs typeface="Calibri" pitchFamily="34" charset="-120"/>
+                <a:cs typeface="Amiri" pitchFamily="2" charset="-78"/>
               </a:rPr>
               <a:t>CORE</a:t>
             </a:r>
@@ -10638,8 +10457,7 @@
                   <a:srgbClr val="1F2A37"/>
                 </a:solidFill>
                 <a:latin typeface="Calibri" pitchFamily="34" charset="0"/>
-                <a:ea typeface="Calibri" pitchFamily="34" charset="-122"/>
-                <a:cs typeface="Calibri" pitchFamily="34" charset="-120"/>
+                <a:cs typeface="Amiri" pitchFamily="2" charset="-78"/>
               </a:rPr>
               <a:t>I know the doors Arabic can open next.</a:t>
             </a:r>
@@ -10704,8 +10522,7 @@
                   <a:srgbClr val="FFFFFF"/>
                 </a:solidFill>
                 <a:latin typeface="Calibri" pitchFamily="34" charset="0"/>
-                <a:ea typeface="Calibri" pitchFamily="34" charset="-122"/>
-                <a:cs typeface="Calibri" pitchFamily="34" charset="-120"/>
+                <a:cs typeface="Amiri" pitchFamily="2" charset="-78"/>
               </a:rPr>
               <a:t>DEVELOP</a:t>
             </a:r>
@@ -10777,8 +10594,7 @@
                   <a:srgbClr val="2E8B57"/>
                 </a:solidFill>
                 <a:latin typeface="Calibri" pitchFamily="34" charset="0"/>
-                <a:ea typeface="Calibri" pitchFamily="34" charset="-122"/>
-                <a:cs typeface="Calibri" pitchFamily="34" charset="-120"/>
+                <a:cs typeface="Amiri" pitchFamily="2" charset="-78"/>
               </a:rPr>
               <a:t>WWW</a:t>
             </a:r>
@@ -10794,8 +10610,7 @@
                   <a:srgbClr val="1F2A37"/>
                 </a:solidFill>
                 <a:latin typeface="Calibri" pitchFamily="34" charset="0"/>
-                <a:ea typeface="Calibri" pitchFamily="34" charset="-122"/>
-                <a:cs typeface="Calibri" pitchFamily="34" charset="-120"/>
+                <a:cs typeface="Amiri" pitchFamily="2" charset="-78"/>
               </a:rPr>
               <a:t>What went well? One thing you did accurately.</a:t>
             </a:r>
@@ -10867,8 +10682,7 @@
                   <a:srgbClr val="C9780A"/>
                 </a:solidFill>
                 <a:latin typeface="Calibri" pitchFamily="34" charset="0"/>
-                <a:ea typeface="Calibri" pitchFamily="34" charset="-122"/>
-                <a:cs typeface="Calibri" pitchFamily="34" charset="-120"/>
+                <a:cs typeface="Amiri" pitchFamily="2" charset="-78"/>
               </a:rPr>
               <a:t>EBI</a:t>
             </a:r>
@@ -10884,8 +10698,7 @@
                   <a:srgbClr val="1F2A37"/>
                 </a:solidFill>
                 <a:latin typeface="Calibri" pitchFamily="34" charset="0"/>
-                <a:ea typeface="Calibri" pitchFamily="34" charset="-122"/>
-                <a:cs typeface="Calibri" pitchFamily="34" charset="-120"/>
+                <a:cs typeface="Amiri" pitchFamily="2" charset="-78"/>
               </a:rPr>
               <a:t>Even better if… One thing you will fix or add.</a:t>
             </a:r>
@@ -10923,8 +10736,7 @@
                   <a:srgbClr val="8A93A0"/>
                 </a:solidFill>
                 <a:latin typeface="Calibri" pitchFamily="34" charset="0"/>
-                <a:ea typeface="Calibri" pitchFamily="34" charset="-122"/>
-                <a:cs typeface="Calibri" pitchFamily="34" charset="-120"/>
+                <a:cs typeface="Amiri" pitchFamily="2" charset="-78"/>
               </a:rPr>
               <a:t>16 / 17</a:t>
             </a:r>
@@ -11068,8 +10880,7 @@
                   <a:srgbClr val="D4AF37"/>
                 </a:solidFill>
                 <a:latin typeface="Calibri" pitchFamily="34" charset="0"/>
-                <a:ea typeface="Calibri" pitchFamily="34" charset="-122"/>
-                <a:cs typeface="Calibri" pitchFamily="34" charset="-120"/>
+                <a:cs typeface="Amiri" pitchFamily="2" charset="-78"/>
               </a:rPr>
               <a:t>P6-L12 COMPLETE</a:t>
             </a:r>
@@ -11106,9 +10917,8 @@
                 <a:solidFill>
                   <a:srgbClr val="FFFFFF"/>
                 </a:solidFill>
-                <a:latin typeface="Amiri" pitchFamily="34" charset="0"/>
-                <a:ea typeface="Amiri" pitchFamily="34" charset="-122"/>
-                <a:cs typeface="Amiri" pitchFamily="34" charset="-120"/>
+                <a:latin typeface="Amiri" pitchFamily="2" charset="-78"/>
+                <a:cs typeface="Amiri" pitchFamily="2" charset="-78"/>
               </a:rPr>
               <a:t>أَحْسَنْتُمْ! إِلَى اللِّقَاءِ</a:t>
             </a:r>
@@ -11146,8 +10956,7 @@
                   <a:srgbClr val="C6D2E6"/>
                 </a:solidFill>
                 <a:latin typeface="Calibri" pitchFamily="34" charset="0"/>
-                <a:ea typeface="Calibri" pitchFamily="34" charset="-122"/>
-                <a:cs typeface="Calibri" pitchFamily="34" charset="-120"/>
+                <a:cs typeface="Amiri" pitchFamily="2" charset="-78"/>
               </a:rPr>
               <a:t>Well done — the programme is complete. Thank you!</a:t>
             </a:r>
@@ -11185,8 +10994,7 @@
                   <a:srgbClr val="D4AF37"/>
                 </a:solidFill>
                 <a:latin typeface="Calibri" pitchFamily="34" charset="0"/>
-                <a:ea typeface="Calibri" pitchFamily="34" charset="-122"/>
-                <a:cs typeface="Calibri" pitchFamily="34" charset="-120"/>
+                <a:cs typeface="Amiri" pitchFamily="2" charset="-78"/>
               </a:rPr>
               <a:t>WHAT COMES NEXT</a:t>
             </a:r>
@@ -11224,8 +11032,7 @@
                   <a:srgbClr val="FFFFFF"/>
                 </a:solidFill>
                 <a:latin typeface="Cambria" pitchFamily="34" charset="0"/>
-                <a:ea typeface="Cambria" pitchFamily="34" charset="-122"/>
-                <a:cs typeface="Cambria" pitchFamily="34" charset="-120"/>
+                <a:cs typeface="Amiri" pitchFamily="2" charset="-78"/>
               </a:rPr>
               <a:t>IGCSE 0544 · The real exam — go in with confidence</a:t>
             </a:r>
@@ -11262,9 +11069,8 @@
                 <a:solidFill>
                   <a:srgbClr val="D4AF37"/>
                 </a:solidFill>
-                <a:latin typeface="Amiri" pitchFamily="34" charset="0"/>
-                <a:ea typeface="Amiri" pitchFamily="34" charset="-122"/>
-                <a:cs typeface="Amiri" pitchFamily="34" charset="-120"/>
+                <a:latin typeface="Amiri" pitchFamily="2" charset="-78"/>
+                <a:cs typeface="Amiri" pitchFamily="2" charset="-78"/>
               </a:rPr>
               <a:t>الامْتِحَانُ جِسْرٌ — وَالجِسْرُ يُوصِلُكَ إِلَى الضَّفَّةِ الأُخْرَى</a:t>
             </a:r>
@@ -11302,8 +11108,7 @@
                   <a:srgbClr val="FFFFFF"/>
                 </a:solidFill>
                 <a:latin typeface="Calibri" pitchFamily="34" charset="0"/>
-                <a:ea typeface="Calibri" pitchFamily="34" charset="-122"/>
-                <a:cs typeface="Calibri" pitchFamily="34" charset="-120"/>
+                <a:cs typeface="Amiri" pitchFamily="2" charset="-78"/>
               </a:rPr>
               <a:t>Arabic is now yours. Go into the exam with confidence: you have done the work. Well done, and thank you for three wonderful years.</a:t>
             </a:r>
@@ -11397,9 +11202,8 @@
                 <a:solidFill>
                   <a:srgbClr val="D4AF37"/>
                 </a:solidFill>
-                <a:latin typeface="Amiri" pitchFamily="34" charset="0"/>
-                <a:ea typeface="Amiri" pitchFamily="34" charset="-122"/>
-                <a:cs typeface="Amiri" pitchFamily="34" charset="-120"/>
+                <a:latin typeface="Amiri" pitchFamily="2" charset="-78"/>
+                <a:cs typeface="Amiri" pitchFamily="2" charset="-78"/>
               </a:rPr>
               <a:t>م</a:t>
             </a:r>
@@ -11437,8 +11241,7 @@
                   <a:srgbClr val="1B3B6F"/>
                 </a:solidFill>
                 <a:latin typeface="Cambria" pitchFamily="34" charset="0"/>
-                <a:ea typeface="Cambria" pitchFamily="34" charset="-122"/>
-                <a:cs typeface="Cambria" pitchFamily="34" charset="-120"/>
+                <a:cs typeface="Amiri" pitchFamily="2" charset="-78"/>
               </a:rPr>
               <a:t>Al Madina Online School</a:t>
             </a:r>
@@ -11476,8 +11279,7 @@
                   <a:srgbClr val="8A6D1E"/>
                 </a:solidFill>
                 <a:latin typeface="Calibri" pitchFamily="34" charset="0"/>
-                <a:ea typeface="Calibri" pitchFamily="34" charset="-122"/>
-                <a:cs typeface="Calibri" pitchFamily="34" charset="-120"/>
+                <a:cs typeface="Amiri" pitchFamily="2" charset="-78"/>
               </a:rPr>
               <a:t>ARABIC DEPARTMENT · MIFTAH ARABIC · IGCSE 0544</a:t>
             </a:r>
@@ -11542,8 +11344,7 @@
                   <a:srgbClr val="FFFFFF"/>
                 </a:solidFill>
                 <a:latin typeface="Calibri" pitchFamily="34" charset="0"/>
-                <a:ea typeface="Calibri" pitchFamily="34" charset="-122"/>
-                <a:cs typeface="Calibri" pitchFamily="34" charset="-120"/>
+                <a:cs typeface="Amiri" pitchFamily="2" charset="-78"/>
               </a:rPr>
               <a:t>P6-L12 · IGCSE Bridge</a:t>
             </a:r>
@@ -11608,8 +11409,7 @@
                   <a:srgbClr val="FFFFFF"/>
                 </a:solidFill>
                 <a:latin typeface="Calibri" pitchFamily="34" charset="0"/>
-                <a:ea typeface="Calibri" pitchFamily="34" charset="-122"/>
-                <a:cs typeface="Calibri" pitchFamily="34" charset="-120"/>
+                <a:cs typeface="Amiri" pitchFamily="2" charset="-78"/>
               </a:rPr>
               <a:t>WELCOME · 1 MIN</a:t>
             </a:r>
@@ -11647,8 +11447,7 @@
                   <a:srgbClr val="5A6472"/>
                 </a:solidFill>
                 <a:latin typeface="Calibri" pitchFamily="34" charset="0"/>
-                <a:ea typeface="Calibri" pitchFamily="34" charset="-122"/>
-                <a:cs typeface="Calibri" pitchFamily="34" charset="-120"/>
+                <a:cs typeface="Amiri" pitchFamily="2" charset="-78"/>
               </a:rPr>
               <a:t>BEFORE WE BEGIN</a:t>
             </a:r>
@@ -11686,8 +11485,7 @@
                   <a:srgbClr val="1B3B6F"/>
                 </a:solidFill>
                 <a:latin typeface="Cambria" pitchFamily="34" charset="0"/>
-                <a:ea typeface="Cambria" pitchFamily="34" charset="-122"/>
-                <a:cs typeface="Cambria" pitchFamily="34" charset="-120"/>
+                <a:cs typeface="Amiri" pitchFamily="2" charset="-78"/>
               </a:rPr>
               <a:t>Our online classroom</a:t>
             </a:r>
@@ -11724,9 +11522,8 @@
                 <a:solidFill>
                   <a:srgbClr val="8A6D1E"/>
                 </a:solidFill>
-                <a:latin typeface="Amiri" pitchFamily="34" charset="0"/>
-                <a:ea typeface="Amiri" pitchFamily="34" charset="-122"/>
-                <a:cs typeface="Amiri" pitchFamily="34" charset="-120"/>
+                <a:latin typeface="Amiri" pitchFamily="2" charset="-78"/>
+                <a:cs typeface="Amiri" pitchFamily="2" charset="-78"/>
               </a:rPr>
               <a:t>آدَابُ الصَّفِّ</a:t>
             </a:r>
@@ -11764,8 +11561,7 @@
                   <a:srgbClr val="8A93A0"/>
                 </a:solidFill>
                 <a:latin typeface="Calibri" pitchFamily="34" charset="0"/>
-                <a:ea typeface="Calibri" pitchFamily="34" charset="-122"/>
-                <a:cs typeface="Calibri" pitchFamily="34" charset="-120"/>
+                <a:cs typeface="Amiri" pitchFamily="2" charset="-78"/>
               </a:rPr>
               <a:t>Miftah Arabic · Progression P6 · IGCSE Bridge · P6-L12</a:t>
             </a:r>
@@ -11886,8 +11682,7 @@
                   <a:srgbClr val="1B3B6F"/>
                 </a:solidFill>
                 <a:latin typeface="Calibri" pitchFamily="34" charset="0"/>
-                <a:ea typeface="Calibri" pitchFamily="34" charset="-122"/>
-                <a:cs typeface="Calibri" pitchFamily="34" charset="-120"/>
+                <a:cs typeface="Amiri" pitchFamily="2" charset="-78"/>
               </a:rPr>
               <a:t>Camera on</a:t>
             </a:r>
@@ -11903,8 +11698,7 @@
                   <a:srgbClr val="5A6472"/>
                 </a:solidFill>
                 <a:latin typeface="Calibri" pitchFamily="34" charset="0"/>
-                <a:ea typeface="Calibri" pitchFamily="34" charset="-122"/>
-                <a:cs typeface="Calibri" pitchFamily="34" charset="-120"/>
+                <a:cs typeface="Amiri" pitchFamily="2" charset="-78"/>
               </a:rPr>
               <a:t>So I can see you learning and help you quickly.</a:t>
             </a:r>
@@ -12025,8 +11819,7 @@
                   <a:srgbClr val="1B3B6F"/>
                 </a:solidFill>
                 <a:latin typeface="Calibri" pitchFamily="34" charset="0"/>
-                <a:ea typeface="Calibri" pitchFamily="34" charset="-122"/>
-                <a:cs typeface="Calibri" pitchFamily="34" charset="-120"/>
+                <a:cs typeface="Amiri" pitchFamily="2" charset="-78"/>
               </a:rPr>
               <a:t>Mic muted</a:t>
             </a:r>
@@ -12042,8 +11835,7 @@
                   <a:srgbClr val="5A6472"/>
                 </a:solidFill>
                 <a:latin typeface="Calibri" pitchFamily="34" charset="0"/>
-                <a:ea typeface="Calibri" pitchFamily="34" charset="-122"/>
-                <a:cs typeface="Calibri" pitchFamily="34" charset="-120"/>
+                <a:cs typeface="Amiri" pitchFamily="2" charset="-78"/>
               </a:rPr>
               <a:t>Unmute only when invited to speak.</a:t>
             </a:r>
@@ -12164,8 +11956,7 @@
                   <a:srgbClr val="1B3B6F"/>
                 </a:solidFill>
                 <a:latin typeface="Calibri" pitchFamily="34" charset="0"/>
-                <a:ea typeface="Calibri" pitchFamily="34" charset="-122"/>
-                <a:cs typeface="Calibri" pitchFamily="34" charset="-120"/>
+                <a:cs typeface="Amiri" pitchFamily="2" charset="-78"/>
               </a:rPr>
               <a:t>Chat for learning</a:t>
             </a:r>
@@ -12181,8 +11972,7 @@
                   <a:srgbClr val="5A6472"/>
                 </a:solidFill>
                 <a:latin typeface="Calibri" pitchFamily="34" charset="0"/>
-                <a:ea typeface="Calibri" pitchFamily="34" charset="-122"/>
-                <a:cs typeface="Calibri" pitchFamily="34" charset="-120"/>
+                <a:cs typeface="Amiri" pitchFamily="2" charset="-78"/>
               </a:rPr>
               <a:t>Answers, questions and Arabic only.</a:t>
             </a:r>
@@ -12303,8 +12093,7 @@
                   <a:srgbClr val="1B3B6F"/>
                 </a:solidFill>
                 <a:latin typeface="Calibri" pitchFamily="34" charset="0"/>
-                <a:ea typeface="Calibri" pitchFamily="34" charset="-122"/>
-                <a:cs typeface="Calibri" pitchFamily="34" charset="-120"/>
+                <a:cs typeface="Amiri" pitchFamily="2" charset="-78"/>
               </a:rPr>
               <a:t>Raise your hand</a:t>
             </a:r>
@@ -12320,8 +12109,7 @@
                   <a:srgbClr val="5A6472"/>
                 </a:solidFill>
                 <a:latin typeface="Calibri" pitchFamily="34" charset="0"/>
-                <a:ea typeface="Calibri" pitchFamily="34" charset="-122"/>
-                <a:cs typeface="Calibri" pitchFamily="34" charset="-120"/>
+                <a:cs typeface="Amiri" pitchFamily="2" charset="-78"/>
               </a:rPr>
               <a:t>Use the hand button to ask for help.</a:t>
             </a:r>
@@ -12393,8 +12181,7 @@
                   <a:srgbClr val="1B3B6F"/>
                 </a:solidFill>
                 <a:latin typeface="Calibri" pitchFamily="34" charset="0"/>
-                <a:ea typeface="Calibri" pitchFamily="34" charset="-122"/>
-                <a:cs typeface="Calibri" pitchFamily="34" charset="-120"/>
+                <a:cs typeface="Amiri" pitchFamily="2" charset="-78"/>
               </a:rPr>
               <a:t>HOW WE TALK — THE ORACY CODE</a:t>
             </a:r>
@@ -12457,8 +12244,7 @@
                   <a:srgbClr val="D4AF37"/>
                 </a:solidFill>
                 <a:latin typeface="Arial" pitchFamily="34" charset="0"/>
-                <a:ea typeface="Arial" pitchFamily="34" charset="-122"/>
-                <a:cs typeface="Arial" pitchFamily="34" charset="-120"/>
+                <a:cs typeface="Amiri" pitchFamily="2" charset="-78"/>
               </a:rPr>
               <a:t>●</a:t>
             </a:r>
@@ -12496,8 +12282,7 @@
                   <a:srgbClr val="1B3B6F"/>
                 </a:solidFill>
                 <a:latin typeface="Calibri" pitchFamily="34" charset="0"/>
-                <a:ea typeface="Calibri" pitchFamily="34" charset="-122"/>
-                <a:cs typeface="Calibri" pitchFamily="34" charset="-120"/>
+                <a:cs typeface="Amiri" pitchFamily="2" charset="-78"/>
               </a:rPr>
               <a:t>Think</a:t>
             </a:r>
@@ -12513,8 +12298,7 @@
                   <a:srgbClr val="5A6472"/>
                 </a:solidFill>
                 <a:latin typeface="Calibri" pitchFamily="34" charset="0"/>
-                <a:ea typeface="Calibri" pitchFamily="34" charset="-122"/>
-                <a:cs typeface="Calibri" pitchFamily="34" charset="-120"/>
+                <a:cs typeface="Amiri" pitchFamily="2" charset="-78"/>
               </a:rPr>
               <a:t>silent preparation</a:t>
             </a:r>
@@ -12577,8 +12361,7 @@
                   <a:srgbClr val="D4AF37"/>
                 </a:solidFill>
                 <a:latin typeface="Arial" pitchFamily="34" charset="0"/>
-                <a:ea typeface="Arial" pitchFamily="34" charset="-122"/>
-                <a:cs typeface="Arial" pitchFamily="34" charset="-120"/>
+                <a:cs typeface="Amiri" pitchFamily="2" charset="-78"/>
               </a:rPr>
               <a:t>↔</a:t>
             </a:r>
@@ -12616,8 +12399,7 @@
                   <a:srgbClr val="1B3B6F"/>
                 </a:solidFill>
                 <a:latin typeface="Calibri" pitchFamily="34" charset="0"/>
-                <a:ea typeface="Calibri" pitchFamily="34" charset="-122"/>
-                <a:cs typeface="Calibri" pitchFamily="34" charset="-120"/>
+                <a:cs typeface="Amiri" pitchFamily="2" charset="-78"/>
               </a:rPr>
               <a:t>Rehearse</a:t>
             </a:r>
@@ -12633,8 +12415,7 @@
                   <a:srgbClr val="5A6472"/>
                 </a:solidFill>
                 <a:latin typeface="Calibri" pitchFamily="34" charset="0"/>
-                <a:ea typeface="Calibri" pitchFamily="34" charset="-122"/>
-                <a:cs typeface="Calibri" pitchFamily="34" charset="-120"/>
+                <a:cs typeface="Amiri" pitchFamily="2" charset="-78"/>
               </a:rPr>
               <a:t>both partners speak</a:t>
             </a:r>
@@ -12697,8 +12478,7 @@
                   <a:srgbClr val="D4AF37"/>
                 </a:solidFill>
                 <a:latin typeface="Arial" pitchFamily="34" charset="0"/>
-                <a:ea typeface="Arial" pitchFamily="34" charset="-122"/>
-                <a:cs typeface="Arial" pitchFamily="34" charset="-120"/>
+                <a:cs typeface="Amiri" pitchFamily="2" charset="-78"/>
               </a:rPr>
               <a:t>+</a:t>
             </a:r>
@@ -12736,8 +12516,7 @@
                   <a:srgbClr val="1B3B6F"/>
                 </a:solidFill>
                 <a:latin typeface="Calibri" pitchFamily="34" charset="0"/>
-                <a:ea typeface="Calibri" pitchFamily="34" charset="-122"/>
-                <a:cs typeface="Calibri" pitchFamily="34" charset="-120"/>
+                <a:cs typeface="Amiri" pitchFamily="2" charset="-78"/>
               </a:rPr>
               <a:t>Build</a:t>
             </a:r>
@@ -12753,8 +12532,7 @@
                   <a:srgbClr val="5A6472"/>
                 </a:solidFill>
                 <a:latin typeface="Calibri" pitchFamily="34" charset="0"/>
-                <a:ea typeface="Calibri" pitchFamily="34" charset="-122"/>
-                <a:cs typeface="Calibri" pitchFamily="34" charset="-120"/>
+                <a:cs typeface="Amiri" pitchFamily="2" charset="-78"/>
               </a:rPr>
               <a:t>add a reason or detail</a:t>
             </a:r>
@@ -12817,8 +12595,7 @@
                   <a:srgbClr val="D4AF37"/>
                 </a:solidFill>
                 <a:latin typeface="Arial" pitchFamily="34" charset="0"/>
-                <a:ea typeface="Arial" pitchFamily="34" charset="-122"/>
-                <a:cs typeface="Arial" pitchFamily="34" charset="-120"/>
+                <a:cs typeface="Amiri" pitchFamily="2" charset="-78"/>
               </a:rPr>
               <a:t>?</a:t>
             </a:r>
@@ -12856,8 +12633,7 @@
                   <a:srgbClr val="1B3B6F"/>
                 </a:solidFill>
                 <a:latin typeface="Calibri" pitchFamily="34" charset="0"/>
-                <a:ea typeface="Calibri" pitchFamily="34" charset="-122"/>
-                <a:cs typeface="Calibri" pitchFamily="34" charset="-120"/>
+                <a:cs typeface="Amiri" pitchFamily="2" charset="-78"/>
               </a:rPr>
               <a:t>Challenge</a:t>
             </a:r>
@@ -12873,8 +12649,7 @@
                   <a:srgbClr val="5A6472"/>
                 </a:solidFill>
                 <a:latin typeface="Calibri" pitchFamily="34" charset="0"/>
-                <a:ea typeface="Calibri" pitchFamily="34" charset="-122"/>
-                <a:cs typeface="Calibri" pitchFamily="34" charset="-120"/>
+                <a:cs typeface="Amiri" pitchFamily="2" charset="-78"/>
               </a:rPr>
               <a:t>question respectfully</a:t>
             </a:r>
@@ -12937,8 +12712,7 @@
                   <a:srgbClr val="D4AF37"/>
                 </a:solidFill>
                 <a:latin typeface="Arial" pitchFamily="34" charset="0"/>
-                <a:ea typeface="Arial" pitchFamily="34" charset="-122"/>
-                <a:cs typeface="Arial" pitchFamily="34" charset="-120"/>
+                <a:cs typeface="Amiri" pitchFamily="2" charset="-78"/>
               </a:rPr>
               <a:t>◎</a:t>
             </a:r>
@@ -12976,8 +12750,7 @@
                   <a:srgbClr val="1B3B6F"/>
                 </a:solidFill>
                 <a:latin typeface="Calibri" pitchFamily="34" charset="0"/>
-                <a:ea typeface="Calibri" pitchFamily="34" charset="-122"/>
-                <a:cs typeface="Calibri" pitchFamily="34" charset="-120"/>
+                <a:cs typeface="Amiri" pitchFamily="2" charset="-78"/>
               </a:rPr>
               <a:t>Share</a:t>
             </a:r>
@@ -12993,8 +12766,7 @@
                   <a:srgbClr val="5A6472"/>
                 </a:solidFill>
                 <a:latin typeface="Calibri" pitchFamily="34" charset="0"/>
-                <a:ea typeface="Calibri" pitchFamily="34" charset="-122"/>
-                <a:cs typeface="Calibri" pitchFamily="34" charset="-120"/>
+                <a:cs typeface="Amiri" pitchFamily="2" charset="-78"/>
               </a:rPr>
               <a:t>anyone may be invited</a:t>
             </a:r>
@@ -13057,8 +12829,7 @@
                   <a:srgbClr val="D4AF37"/>
                 </a:solidFill>
                 <a:latin typeface="Arial" pitchFamily="34" charset="0"/>
-                <a:ea typeface="Arial" pitchFamily="34" charset="-122"/>
-                <a:cs typeface="Arial" pitchFamily="34" charset="-120"/>
+                <a:cs typeface="Amiri" pitchFamily="2" charset="-78"/>
               </a:rPr>
               <a:t>↺</a:t>
             </a:r>
@@ -13096,8 +12867,7 @@
                   <a:srgbClr val="1B3B6F"/>
                 </a:solidFill>
                 <a:latin typeface="Calibri" pitchFamily="34" charset="0"/>
-                <a:ea typeface="Calibri" pitchFamily="34" charset="-122"/>
-                <a:cs typeface="Calibri" pitchFamily="34" charset="-120"/>
+                <a:cs typeface="Amiri" pitchFamily="2" charset="-78"/>
               </a:rPr>
               <a:t>Summarise</a:t>
             </a:r>
@@ -13113,8 +12883,7 @@
                   <a:srgbClr val="5A6472"/>
                 </a:solidFill>
                 <a:latin typeface="Calibri" pitchFamily="34" charset="0"/>
-                <a:ea typeface="Calibri" pitchFamily="34" charset="-122"/>
-                <a:cs typeface="Calibri" pitchFamily="34" charset="-120"/>
+                <a:cs typeface="Amiri" pitchFamily="2" charset="-78"/>
               </a:rPr>
               <a:t>say it more precisely</a:t>
             </a:r>
@@ -13152,8 +12921,7 @@
                   <a:srgbClr val="8A6D1E"/>
                 </a:solidFill>
                 <a:latin typeface="Calibri" pitchFamily="34" charset="0"/>
-                <a:ea typeface="Calibri" pitchFamily="34" charset="-122"/>
-                <a:cs typeface="Calibri" pitchFamily="34" charset="-120"/>
+                <a:cs typeface="Amiri" pitchFamily="2" charset="-78"/>
               </a:rPr>
               <a:t>I will always give you thinking and practice time before I ask anyone. Reading aloud is by invitation — you can always say “pass, please come back to me”.</a:t>
             </a:r>
@@ -13191,8 +12959,7 @@
                   <a:srgbClr val="8A93A0"/>
                 </a:solidFill>
                 <a:latin typeface="Calibri" pitchFamily="34" charset="0"/>
-                <a:ea typeface="Calibri" pitchFamily="34" charset="-122"/>
-                <a:cs typeface="Calibri" pitchFamily="34" charset="-120"/>
+                <a:cs typeface="Amiri" pitchFamily="2" charset="-78"/>
               </a:rPr>
               <a:t>2 / 17</a:t>
             </a:r>
@@ -13286,9 +13053,8 @@
                 <a:solidFill>
                   <a:srgbClr val="D4AF37"/>
                 </a:solidFill>
-                <a:latin typeface="Amiri" pitchFamily="34" charset="0"/>
-                <a:ea typeface="Amiri" pitchFamily="34" charset="-122"/>
-                <a:cs typeface="Amiri" pitchFamily="34" charset="-120"/>
+                <a:latin typeface="Amiri" pitchFamily="2" charset="-78"/>
+                <a:cs typeface="Amiri" pitchFamily="2" charset="-78"/>
               </a:rPr>
               <a:t>م</a:t>
             </a:r>
@@ -13326,8 +13092,7 @@
                   <a:srgbClr val="1B3B6F"/>
                 </a:solidFill>
                 <a:latin typeface="Cambria" pitchFamily="34" charset="0"/>
-                <a:ea typeface="Cambria" pitchFamily="34" charset="-122"/>
-                <a:cs typeface="Cambria" pitchFamily="34" charset="-120"/>
+                <a:cs typeface="Amiri" pitchFamily="2" charset="-78"/>
               </a:rPr>
               <a:t>Al Madina Online School</a:t>
             </a:r>
@@ -13365,8 +13130,7 @@
                   <a:srgbClr val="8A6D1E"/>
                 </a:solidFill>
                 <a:latin typeface="Calibri" pitchFamily="34" charset="0"/>
-                <a:ea typeface="Calibri" pitchFamily="34" charset="-122"/>
-                <a:cs typeface="Calibri" pitchFamily="34" charset="-120"/>
+                <a:cs typeface="Amiri" pitchFamily="2" charset="-78"/>
               </a:rPr>
               <a:t>ARABIC DEPARTMENT · MIFTAH ARABIC · IGCSE 0544</a:t>
             </a:r>
@@ -13431,8 +13195,7 @@
                   <a:srgbClr val="FFFFFF"/>
                 </a:solidFill>
                 <a:latin typeface="Calibri" pitchFamily="34" charset="0"/>
-                <a:ea typeface="Calibri" pitchFamily="34" charset="-122"/>
-                <a:cs typeface="Calibri" pitchFamily="34" charset="-120"/>
+                <a:cs typeface="Amiri" pitchFamily="2" charset="-78"/>
               </a:rPr>
               <a:t>P6-L12 · IGCSE Bridge</a:t>
             </a:r>
@@ -13497,8 +13260,7 @@
                   <a:srgbClr val="FFFFFF"/>
                 </a:solidFill>
                 <a:latin typeface="Calibri" pitchFamily="34" charset="0"/>
-                <a:ea typeface="Calibri" pitchFamily="34" charset="-122"/>
-                <a:cs typeface="Calibri" pitchFamily="34" charset="-120"/>
+                <a:cs typeface="Amiri" pitchFamily="2" charset="-78"/>
               </a:rPr>
               <a:t>WELCOME</a:t>
             </a:r>
@@ -13536,8 +13298,7 @@
                   <a:srgbClr val="5A6472"/>
                 </a:solidFill>
                 <a:latin typeface="Calibri" pitchFamily="34" charset="0"/>
-                <a:ea typeface="Calibri" pitchFamily="34" charset="-122"/>
-                <a:cs typeface="Calibri" pitchFamily="34" charset="-120"/>
+                <a:cs typeface="Amiri" pitchFamily="2" charset="-78"/>
               </a:rPr>
               <a:t>TODAY’S LESSON MAP</a:t>
             </a:r>
@@ -13575,8 +13336,7 @@
                   <a:srgbClr val="1B3B6F"/>
                 </a:solidFill>
                 <a:latin typeface="Cambria" pitchFamily="34" charset="0"/>
-                <a:ea typeface="Cambria" pitchFamily="34" charset="-122"/>
-                <a:cs typeface="Cambria" pitchFamily="34" charset="-120"/>
+                <a:cs typeface="Amiri" pitchFamily="2" charset="-78"/>
               </a:rPr>
               <a:t>Our lesson today, step by step</a:t>
             </a:r>
@@ -13613,9 +13373,8 @@
                 <a:solidFill>
                   <a:srgbClr val="8A6D1E"/>
                 </a:solidFill>
-                <a:latin typeface="Amiri" pitchFamily="34" charset="0"/>
-                <a:ea typeface="Amiri" pitchFamily="34" charset="-122"/>
-                <a:cs typeface="Amiri" pitchFamily="34" charset="-120"/>
+                <a:latin typeface="Amiri" pitchFamily="2" charset="-78"/>
+                <a:cs typeface="Amiri" pitchFamily="2" charset="-78"/>
               </a:rPr>
               <a:t>خَرِيطَةُ الدَّرْسِ</a:t>
             </a:r>
@@ -13653,8 +13412,7 @@
                   <a:srgbClr val="8A93A0"/>
                 </a:solidFill>
                 <a:latin typeface="Calibri" pitchFamily="34" charset="0"/>
-                <a:ea typeface="Calibri" pitchFamily="34" charset="-122"/>
-                <a:cs typeface="Calibri" pitchFamily="34" charset="-120"/>
+                <a:cs typeface="Amiri" pitchFamily="2" charset="-78"/>
               </a:rPr>
               <a:t>Miftah Arabic · Progression P6 · IGCSE Bridge · P6-L12</a:t>
             </a:r>
@@ -13753,8 +13511,7 @@
                   <a:srgbClr val="FFFFFF"/>
                 </a:solidFill>
                 <a:latin typeface="Calibri" pitchFamily="34" charset="0"/>
-                <a:ea typeface="Calibri" pitchFamily="34" charset="-122"/>
-                <a:cs typeface="Calibri" pitchFamily="34" charset="-120"/>
+                <a:cs typeface="Amiri" pitchFamily="2" charset="-78"/>
               </a:rPr>
               <a:t>DO NOW</a:t>
             </a:r>
@@ -13792,8 +13549,7 @@
                   <a:srgbClr val="E8EDF5"/>
                 </a:solidFill>
                 <a:latin typeface="Calibri" pitchFamily="34" charset="0"/>
-                <a:ea typeface="Calibri" pitchFamily="34" charset="-122"/>
-                <a:cs typeface="Calibri" pitchFamily="34" charset="-120"/>
+                <a:cs typeface="Amiri" pitchFamily="2" charset="-78"/>
               </a:rPr>
               <a:t>5 min</a:t>
             </a:r>
@@ -13856,8 +13612,7 @@
                   <a:srgbClr val="1B3B6F"/>
                 </a:solidFill>
                 <a:latin typeface="Calibri" pitchFamily="34" charset="0"/>
-                <a:ea typeface="Calibri" pitchFamily="34" charset="-122"/>
-                <a:cs typeface="Calibri" pitchFamily="34" charset="-120"/>
+                <a:cs typeface="Amiri" pitchFamily="2" charset="-78"/>
               </a:rPr>
               <a:t>1</a:t>
             </a:r>
@@ -13895,8 +13650,7 @@
                   <a:srgbClr val="1F2A37"/>
                 </a:solidFill>
                 <a:latin typeface="Calibri" pitchFamily="34" charset="0"/>
-                <a:ea typeface="Calibri" pitchFamily="34" charset="-122"/>
-                <a:cs typeface="Calibri" pitchFamily="34" charset="-120"/>
+                <a:cs typeface="Amiri" pitchFamily="2" charset="-78"/>
               </a:rPr>
               <a:t>Retrieval: celebration words.</a:t>
             </a:r>
@@ -13933,9 +13687,8 @@
                 <a:solidFill>
                   <a:srgbClr val="0E7C86"/>
                 </a:solidFill>
-                <a:latin typeface="Amiri" pitchFamily="34" charset="0"/>
-                <a:ea typeface="Amiri" pitchFamily="34" charset="-122"/>
-                <a:cs typeface="Amiri" pitchFamily="34" charset="-120"/>
+                <a:latin typeface="Amiri" pitchFamily="2" charset="-78"/>
+                <a:cs typeface="Amiri" pitchFamily="2" charset="-78"/>
               </a:rPr>
               <a:t>اِبْدَأِ الآنَ</a:t>
             </a:r>
@@ -14034,8 +13787,7 @@
                   <a:srgbClr val="FFFFFF"/>
                 </a:solidFill>
                 <a:latin typeface="Calibri" pitchFamily="34" charset="0"/>
-                <a:ea typeface="Calibri" pitchFamily="34" charset="-122"/>
-                <a:cs typeface="Calibri" pitchFamily="34" charset="-120"/>
+                <a:cs typeface="Amiri" pitchFamily="2" charset="-78"/>
               </a:rPr>
               <a:t>TEACHER INSTRUCTION</a:t>
             </a:r>
@@ -14073,8 +13825,7 @@
                   <a:srgbClr val="E8EDF5"/>
                 </a:solidFill>
                 <a:latin typeface="Calibri" pitchFamily="34" charset="0"/>
-                <a:ea typeface="Calibri" pitchFamily="34" charset="-122"/>
-                <a:cs typeface="Calibri" pitchFamily="34" charset="-120"/>
+                <a:cs typeface="Amiri" pitchFamily="2" charset="-78"/>
               </a:rPr>
               <a:t>8 min</a:t>
             </a:r>
@@ -14137,8 +13888,7 @@
                   <a:srgbClr val="1B3B6F"/>
                 </a:solidFill>
                 <a:latin typeface="Calibri" pitchFamily="34" charset="0"/>
-                <a:ea typeface="Calibri" pitchFamily="34" charset="-122"/>
-                <a:cs typeface="Calibri" pitchFamily="34" charset="-120"/>
+                <a:cs typeface="Amiri" pitchFamily="2" charset="-78"/>
               </a:rPr>
               <a:t>2</a:t>
             </a:r>
@@ -14176,8 +13926,7 @@
                   <a:srgbClr val="1F2A37"/>
                 </a:solidFill>
                 <a:latin typeface="Calibri" pitchFamily="34" charset="0"/>
-                <a:ea typeface="Calibri" pitchFamily="34" charset="-122"/>
-                <a:cs typeface="Calibri" pitchFamily="34" charset="-120"/>
+                <a:cs typeface="Amiri" pitchFamily="2" charset="-78"/>
               </a:rPr>
               <a:t>From F1 to P6 — name the journey.</a:t>
             </a:r>
@@ -14214,9 +13963,8 @@
                 <a:solidFill>
                   <a:srgbClr val="1B3B6F"/>
                 </a:solidFill>
-                <a:latin typeface="Amiri" pitchFamily="34" charset="0"/>
-                <a:ea typeface="Amiri" pitchFamily="34" charset="-122"/>
-                <a:cs typeface="Amiri" pitchFamily="34" charset="-120"/>
+                <a:latin typeface="Amiri" pitchFamily="2" charset="-78"/>
+                <a:cs typeface="Amiri" pitchFamily="2" charset="-78"/>
               </a:rPr>
               <a:t>الرِّحْلَةُ</a:t>
             </a:r>
@@ -14315,8 +14063,7 @@
                   <a:srgbClr val="FFFFFF"/>
                 </a:solidFill>
                 <a:latin typeface="Calibri" pitchFamily="34" charset="0"/>
-                <a:ea typeface="Calibri" pitchFamily="34" charset="-122"/>
-                <a:cs typeface="Calibri" pitchFamily="34" charset="-120"/>
+                <a:cs typeface="Amiri" pitchFamily="2" charset="-78"/>
               </a:rPr>
               <a:t>YOU DO</a:t>
             </a:r>
@@ -14354,8 +14101,7 @@
                   <a:srgbClr val="E8EDF5"/>
                 </a:solidFill>
                 <a:latin typeface="Calibri" pitchFamily="34" charset="0"/>
-                <a:ea typeface="Calibri" pitchFamily="34" charset="-122"/>
-                <a:cs typeface="Calibri" pitchFamily="34" charset="-120"/>
+                <a:cs typeface="Amiri" pitchFamily="2" charset="-78"/>
               </a:rPr>
               <a:t>22 min</a:t>
             </a:r>
@@ -14418,8 +14164,7 @@
                   <a:srgbClr val="1B3B6F"/>
                 </a:solidFill>
                 <a:latin typeface="Calibri" pitchFamily="34" charset="0"/>
-                <a:ea typeface="Calibri" pitchFamily="34" charset="-122"/>
-                <a:cs typeface="Calibri" pitchFamily="34" charset="-120"/>
+                <a:cs typeface="Amiri" pitchFamily="2" charset="-78"/>
               </a:rPr>
               <a:t>3</a:t>
             </a:r>
@@ -14457,8 +14202,7 @@
                   <a:srgbClr val="1F2A37"/>
                 </a:solidFill>
                 <a:latin typeface="Calibri" pitchFamily="34" charset="0"/>
-                <a:ea typeface="Calibri" pitchFamily="34" charset="-122"/>
-                <a:cs typeface="Calibri" pitchFamily="34" charset="-120"/>
+                <a:cs typeface="Amiri" pitchFamily="2" charset="-78"/>
               </a:rPr>
               <a:t>Arabic in the wild: free Arabic, your choice.</a:t>
             </a:r>
@@ -14495,9 +14239,8 @@
                 <a:solidFill>
                   <a:srgbClr val="1E6B52"/>
                 </a:solidFill>
-                <a:latin typeface="Amiri" pitchFamily="34" charset="0"/>
-                <a:ea typeface="Amiri" pitchFamily="34" charset="-122"/>
-                <a:cs typeface="Amiri" pitchFamily="34" charset="-120"/>
+                <a:latin typeface="Amiri" pitchFamily="2" charset="-78"/>
+                <a:cs typeface="Amiri" pitchFamily="2" charset="-78"/>
               </a:rPr>
               <a:t>تَحَدَّثْ وَاكْتُبْ</a:t>
             </a:r>
@@ -14596,8 +14339,7 @@
                   <a:srgbClr val="FFFFFF"/>
                 </a:solidFill>
                 <a:latin typeface="Calibri" pitchFamily="34" charset="0"/>
-                <a:ea typeface="Calibri" pitchFamily="34" charset="-122"/>
-                <a:cs typeface="Calibri" pitchFamily="34" charset="-120"/>
+                <a:cs typeface="Amiri" pitchFamily="2" charset="-78"/>
               </a:rPr>
               <a:t>YOU DO</a:t>
             </a:r>
@@ -14635,8 +14377,7 @@
                   <a:srgbClr val="E8EDF5"/>
                 </a:solidFill>
                 <a:latin typeface="Calibri" pitchFamily="34" charset="0"/>
-                <a:ea typeface="Calibri" pitchFamily="34" charset="-122"/>
-                <a:cs typeface="Calibri" pitchFamily="34" charset="-120"/>
+                <a:cs typeface="Amiri" pitchFamily="2" charset="-78"/>
               </a:rPr>
               <a:t>7 min</a:t>
             </a:r>
@@ -14699,8 +14440,7 @@
                   <a:srgbClr val="1B3B6F"/>
                 </a:solidFill>
                 <a:latin typeface="Calibri" pitchFamily="34" charset="0"/>
-                <a:ea typeface="Calibri" pitchFamily="34" charset="-122"/>
-                <a:cs typeface="Calibri" pitchFamily="34" charset="-120"/>
+                <a:cs typeface="Amiri" pitchFamily="2" charset="-78"/>
               </a:rPr>
               <a:t>4</a:t>
             </a:r>
@@ -14738,8 +14478,7 @@
                   <a:srgbClr val="1F2A37"/>
                 </a:solidFill>
                 <a:latin typeface="Calibri" pitchFamily="34" charset="0"/>
-                <a:ea typeface="Calibri" pitchFamily="34" charset="-122"/>
-                <a:cs typeface="Calibri" pitchFamily="34" charset="-120"/>
+                <a:cs typeface="Amiri" pitchFamily="2" charset="-78"/>
               </a:rPr>
               <a:t>My certificate sentence.</a:t>
             </a:r>
@@ -14776,9 +14515,8 @@
                 <a:solidFill>
                   <a:srgbClr val="1E6B52"/>
                 </a:solidFill>
-                <a:latin typeface="Amiri" pitchFamily="34" charset="0"/>
-                <a:ea typeface="Amiri" pitchFamily="34" charset="-122"/>
-                <a:cs typeface="Amiri" pitchFamily="34" charset="-120"/>
+                <a:latin typeface="Amiri" pitchFamily="2" charset="-78"/>
+                <a:cs typeface="Amiri" pitchFamily="2" charset="-78"/>
               </a:rPr>
               <a:t>جُمْلَتِي</a:t>
             </a:r>
@@ -14877,8 +14615,7 @@
                   <a:srgbClr val="FFFFFF"/>
                 </a:solidFill>
                 <a:latin typeface="Calibri" pitchFamily="34" charset="0"/>
-                <a:ea typeface="Calibri" pitchFamily="34" charset="-122"/>
-                <a:cs typeface="Calibri" pitchFamily="34" charset="-120"/>
+                <a:cs typeface="Amiri" pitchFamily="2" charset="-78"/>
               </a:rPr>
               <a:t>FEEDBACK</a:t>
             </a:r>
@@ -14916,8 +14653,7 @@
                   <a:srgbClr val="E8EDF5"/>
                 </a:solidFill>
                 <a:latin typeface="Calibri" pitchFamily="34" charset="0"/>
-                <a:ea typeface="Calibri" pitchFamily="34" charset="-122"/>
-                <a:cs typeface="Calibri" pitchFamily="34" charset="-120"/>
+                <a:cs typeface="Amiri" pitchFamily="2" charset="-78"/>
               </a:rPr>
               <a:t>12 min</a:t>
             </a:r>
@@ -14980,8 +14716,7 @@
                   <a:srgbClr val="1B3B6F"/>
                 </a:solidFill>
                 <a:latin typeface="Calibri" pitchFamily="34" charset="0"/>
-                <a:ea typeface="Calibri" pitchFamily="34" charset="-122"/>
-                <a:cs typeface="Calibri" pitchFamily="34" charset="-120"/>
+                <a:cs typeface="Amiri" pitchFamily="2" charset="-78"/>
               </a:rPr>
               <a:t>5</a:t>
             </a:r>
@@ -15019,8 +14754,7 @@
                   <a:srgbClr val="1F2A37"/>
                 </a:solidFill>
                 <a:latin typeface="Calibri" pitchFamily="34" charset="0"/>
-                <a:ea typeface="Calibri" pitchFamily="34" charset="-122"/>
-                <a:cs typeface="Calibri" pitchFamily="34" charset="-120"/>
+                <a:cs typeface="Amiri" pitchFamily="2" charset="-78"/>
               </a:rPr>
               <a:t>The road ahead, sharing, final reflection.</a:t>
             </a:r>
@@ -15057,9 +14791,8 @@
                 <a:solidFill>
                   <a:srgbClr val="8A6D1E"/>
                 </a:solidFill>
-                <a:latin typeface="Amiri" pitchFamily="34" charset="0"/>
-                <a:ea typeface="Amiri" pitchFamily="34" charset="-122"/>
-                <a:cs typeface="Amiri" pitchFamily="34" charset="-120"/>
+                <a:latin typeface="Amiri" pitchFamily="2" charset="-78"/>
+                <a:cs typeface="Amiri" pitchFamily="2" charset="-78"/>
               </a:rPr>
               <a:t>التَّأَمُّلُ</a:t>
             </a:r>
@@ -15158,8 +14891,7 @@
                   <a:srgbClr val="FFFFFF"/>
                 </a:solidFill>
                 <a:latin typeface="Calibri" pitchFamily="34" charset="0"/>
-                <a:ea typeface="Calibri" pitchFamily="34" charset="-122"/>
-                <a:cs typeface="Calibri" pitchFamily="34" charset="-120"/>
+                <a:cs typeface="Amiri" pitchFamily="2" charset="-78"/>
               </a:rPr>
               <a:t>FEEDBACK</a:t>
             </a:r>
@@ -15197,8 +14929,7 @@
                   <a:srgbClr val="E8EDF5"/>
                 </a:solidFill>
                 <a:latin typeface="Calibri" pitchFamily="34" charset="0"/>
-                <a:ea typeface="Calibri" pitchFamily="34" charset="-122"/>
-                <a:cs typeface="Calibri" pitchFamily="34" charset="-120"/>
+                <a:cs typeface="Amiri" pitchFamily="2" charset="-78"/>
               </a:rPr>
               <a:t>2 min</a:t>
             </a:r>
@@ -15261,8 +14992,7 @@
                   <a:srgbClr val="1B3B6F"/>
                 </a:solidFill>
                 <a:latin typeface="Calibri" pitchFamily="34" charset="0"/>
-                <a:ea typeface="Calibri" pitchFamily="34" charset="-122"/>
-                <a:cs typeface="Calibri" pitchFamily="34" charset="-120"/>
+                <a:cs typeface="Amiri" pitchFamily="2" charset="-78"/>
               </a:rPr>
               <a:t>6</a:t>
             </a:r>
@@ -15300,8 +15030,7 @@
                   <a:srgbClr val="1F2A37"/>
                 </a:solidFill>
                 <a:latin typeface="Calibri" pitchFamily="34" charset="0"/>
-                <a:ea typeface="Calibri" pitchFamily="34" charset="-122"/>
-                <a:cs typeface="Calibri" pitchFamily="34" charset="-120"/>
+                <a:cs typeface="Amiri" pitchFamily="2" charset="-78"/>
               </a:rPr>
               <a:t>Celebrate!</a:t>
             </a:r>
@@ -15338,9 +15067,8 @@
                 <a:solidFill>
                   <a:srgbClr val="8A6D1E"/>
                 </a:solidFill>
-                <a:latin typeface="Amiri" pitchFamily="34" charset="0"/>
-                <a:ea typeface="Amiri" pitchFamily="34" charset="-122"/>
-                <a:cs typeface="Amiri" pitchFamily="34" charset="-120"/>
+                <a:latin typeface="Amiri" pitchFamily="2" charset="-78"/>
+                <a:cs typeface="Amiri" pitchFamily="2" charset="-78"/>
               </a:rPr>
               <a:t>أَحْسَنْتُمْ</a:t>
             </a:r>
@@ -15412,8 +15140,7 @@
                   <a:srgbClr val="1E6B52"/>
                 </a:solidFill>
                 <a:latin typeface="Calibri" pitchFamily="34" charset="0"/>
-                <a:ea typeface="Calibri" pitchFamily="34" charset="-122"/>
-                <a:cs typeface="Calibri" pitchFamily="34" charset="-120"/>
+                <a:cs typeface="Amiri" pitchFamily="2" charset="-78"/>
               </a:rPr>
               <a:t>IF ARABIC FEELS HARD TODAY</a:t>
             </a:r>
@@ -15451,8 +15178,7 @@
                   <a:srgbClr val="1F2A37"/>
                 </a:solidFill>
                 <a:latin typeface="Calibri" pitchFamily="34" charset="0"/>
-                <a:ea typeface="Calibri" pitchFamily="34" charset="-122"/>
-                <a:cs typeface="Calibri" pitchFamily="34" charset="-120"/>
+                <a:cs typeface="Amiri" pitchFamily="2" charset="-78"/>
               </a:rPr>
               <a:t>This is an exam-preparation lesson. Every task uses the real IGCSE format — Core students use the green boxes, frames and English support; nobody is expected to get everything right first time.</a:t>
             </a:r>
@@ -15490,8 +15216,7 @@
                   <a:srgbClr val="8A93A0"/>
                 </a:solidFill>
                 <a:latin typeface="Calibri" pitchFamily="34" charset="0"/>
-                <a:ea typeface="Calibri" pitchFamily="34" charset="-122"/>
-                <a:cs typeface="Calibri" pitchFamily="34" charset="-120"/>
+                <a:cs typeface="Amiri" pitchFamily="2" charset="-78"/>
               </a:rPr>
               <a:t>3 / 17</a:t>
             </a:r>
@@ -15585,9 +15310,8 @@
                 <a:solidFill>
                   <a:srgbClr val="D4AF37"/>
                 </a:solidFill>
-                <a:latin typeface="Amiri" pitchFamily="34" charset="0"/>
-                <a:ea typeface="Amiri" pitchFamily="34" charset="-122"/>
-                <a:cs typeface="Amiri" pitchFamily="34" charset="-120"/>
+                <a:latin typeface="Amiri" pitchFamily="2" charset="-78"/>
+                <a:cs typeface="Amiri" pitchFamily="2" charset="-78"/>
               </a:rPr>
               <a:t>م</a:t>
             </a:r>
@@ -15625,8 +15349,7 @@
                   <a:srgbClr val="1B3B6F"/>
                 </a:solidFill>
                 <a:latin typeface="Cambria" pitchFamily="34" charset="0"/>
-                <a:ea typeface="Cambria" pitchFamily="34" charset="-122"/>
-                <a:cs typeface="Cambria" pitchFamily="34" charset="-120"/>
+                <a:cs typeface="Amiri" pitchFamily="2" charset="-78"/>
               </a:rPr>
               <a:t>Al Madina Online School</a:t>
             </a:r>
@@ -15664,8 +15387,7 @@
                   <a:srgbClr val="8A6D1E"/>
                 </a:solidFill>
                 <a:latin typeface="Calibri" pitchFamily="34" charset="0"/>
-                <a:ea typeface="Calibri" pitchFamily="34" charset="-122"/>
-                <a:cs typeface="Calibri" pitchFamily="34" charset="-120"/>
+                <a:cs typeface="Amiri" pitchFamily="2" charset="-78"/>
               </a:rPr>
               <a:t>ARABIC DEPARTMENT · MIFTAH ARABIC · IGCSE 0544</a:t>
             </a:r>
@@ -15730,8 +15452,7 @@
                   <a:srgbClr val="FFFFFF"/>
                 </a:solidFill>
                 <a:latin typeface="Calibri" pitchFamily="34" charset="0"/>
-                <a:ea typeface="Calibri" pitchFamily="34" charset="-122"/>
-                <a:cs typeface="Calibri" pitchFamily="34" charset="-120"/>
+                <a:cs typeface="Amiri" pitchFamily="2" charset="-78"/>
               </a:rPr>
               <a:t>P6-L12 · IGCSE Bridge</a:t>
             </a:r>
@@ -15796,8 +15517,7 @@
                   <a:srgbClr val="FFFFFF"/>
                 </a:solidFill>
                 <a:latin typeface="Calibri" pitchFamily="34" charset="0"/>
-                <a:ea typeface="Calibri" pitchFamily="34" charset="-122"/>
-                <a:cs typeface="Calibri" pitchFamily="34" charset="-120"/>
+                <a:cs typeface="Amiri" pitchFamily="2" charset="-78"/>
               </a:rPr>
               <a:t>DO NOW · 5 MIN</a:t>
             </a:r>
@@ -15835,8 +15555,7 @@
                   <a:srgbClr val="0E7C86"/>
                 </a:solidFill>
                 <a:latin typeface="Calibri" pitchFamily="34" charset="0"/>
-                <a:ea typeface="Calibri" pitchFamily="34" charset="-122"/>
-                <a:cs typeface="Calibri" pitchFamily="34" charset="-120"/>
+                <a:cs typeface="Amiri" pitchFamily="2" charset="-78"/>
               </a:rPr>
               <a:t>DO NOW · ON YOUR OWN · 5 MINUTES</a:t>
             </a:r>
@@ -15874,8 +15593,7 @@
                   <a:srgbClr val="1B3B6F"/>
                 </a:solidFill>
                 <a:latin typeface="Cambria" pitchFamily="34" charset="0"/>
-                <a:ea typeface="Cambria" pitchFamily="34" charset="-122"/>
-                <a:cs typeface="Cambria" pitchFamily="34" charset="-120"/>
+                <a:cs typeface="Amiri" pitchFamily="2" charset="-78"/>
               </a:rPr>
               <a:t>Retrieval: what do you remember?</a:t>
             </a:r>
@@ -15912,9 +15630,8 @@
                 <a:solidFill>
                   <a:srgbClr val="8A6D1E"/>
                 </a:solidFill>
-                <a:latin typeface="Amiri" pitchFamily="34" charset="0"/>
-                <a:ea typeface="Amiri" pitchFamily="34" charset="-122"/>
-                <a:cs typeface="Amiri" pitchFamily="34" charset="-120"/>
+                <a:latin typeface="Amiri" pitchFamily="2" charset="-78"/>
+                <a:cs typeface="Amiri" pitchFamily="2" charset="-78"/>
               </a:rPr>
               <a:t>اِبْدَأِ الآنَ</a:t>
             </a:r>
@@ -15952,8 +15669,7 @@
                   <a:srgbClr val="8A93A0"/>
                 </a:solidFill>
                 <a:latin typeface="Calibri" pitchFamily="34" charset="0"/>
-                <a:ea typeface="Calibri" pitchFamily="34" charset="-122"/>
-                <a:cs typeface="Calibri" pitchFamily="34" charset="-120"/>
+                <a:cs typeface="Amiri" pitchFamily="2" charset="-78"/>
               </a:rPr>
               <a:t>Miftah Arabic · Progression P6 · IGCSE Bridge · P6-L12</a:t>
             </a:r>
@@ -16050,8 +15766,7 @@
                   <a:srgbClr val="FFFFFF"/>
                 </a:solidFill>
                 <a:latin typeface="Calibri" pitchFamily="34" charset="0"/>
-                <a:ea typeface="Calibri" pitchFamily="34" charset="-122"/>
-                <a:cs typeface="Calibri" pitchFamily="34" charset="-120"/>
+                <a:cs typeface="Amiri" pitchFamily="2" charset="-78"/>
               </a:rPr>
               <a:t>1</a:t>
             </a:r>
@@ -16089,8 +15804,7 @@
                   <a:srgbClr val="1B3B6F"/>
                 </a:solidFill>
                 <a:latin typeface="Calibri" pitchFamily="34" charset="0"/>
-                <a:ea typeface="Calibri" pitchFamily="34" charset="-122"/>
-                <a:cs typeface="Calibri" pitchFamily="34" charset="-120"/>
+                <a:cs typeface="Amiri" pitchFamily="2" charset="-78"/>
               </a:rPr>
               <a:t>What does </a:t>
             </a:r>
@@ -16102,9 +15816,8 @@
                 <a:solidFill>
                   <a:srgbClr val="1B3B6F"/>
                 </a:solidFill>
-                <a:latin typeface="Amiri" pitchFamily="34" charset="0"/>
-                <a:ea typeface="Amiri" pitchFamily="34" charset="-122"/>
-                <a:cs typeface="Amiri" pitchFamily="34" charset="-120"/>
+                <a:latin typeface="Amiri" pitchFamily="2" charset="-78"/>
+                <a:cs typeface="Amiri" pitchFamily="2" charset="-78"/>
               </a:rPr>
               <a:t>الإِنْجَازُ</a:t>
             </a:r>
@@ -16117,8 +15830,7 @@
                   <a:srgbClr val="1B3B6F"/>
                 </a:solidFill>
                 <a:latin typeface="Calibri" pitchFamily="34" charset="0"/>
-                <a:ea typeface="Calibri" pitchFamily="34" charset="-122"/>
-                <a:cs typeface="Calibri" pitchFamily="34" charset="-120"/>
+                <a:cs typeface="Amiri" pitchFamily="2" charset="-78"/>
               </a:rPr>
               <a:t> mean?</a:t>
             </a:r>
@@ -16181,8 +15893,7 @@
                   <a:srgbClr val="1B3B6F"/>
                 </a:solidFill>
                 <a:latin typeface="Calibri" pitchFamily="34" charset="0"/>
-                <a:ea typeface="Calibri" pitchFamily="34" charset="-122"/>
-                <a:cs typeface="Calibri" pitchFamily="34" charset="-120"/>
+                <a:cs typeface="Amiri" pitchFamily="2" charset="-78"/>
               </a:rPr>
               <a:t>A</a:t>
             </a:r>
@@ -16220,8 +15931,7 @@
                   <a:srgbClr val="1F2A37"/>
                 </a:solidFill>
                 <a:latin typeface="Calibri" pitchFamily="34" charset="0"/>
-                <a:ea typeface="Calibri" pitchFamily="34" charset="-122"/>
-                <a:cs typeface="Calibri" pitchFamily="34" charset="-120"/>
+                <a:cs typeface="Amiri" pitchFamily="2" charset="-78"/>
               </a:rPr>
               <a:t>celebration</a:t>
             </a:r>
@@ -16284,8 +15994,7 @@
                   <a:srgbClr val="1B3B6F"/>
                 </a:solidFill>
                 <a:latin typeface="Calibri" pitchFamily="34" charset="0"/>
-                <a:ea typeface="Calibri" pitchFamily="34" charset="-122"/>
-                <a:cs typeface="Calibri" pitchFamily="34" charset="-120"/>
+                <a:cs typeface="Amiri" pitchFamily="2" charset="-78"/>
               </a:rPr>
               <a:t>B</a:t>
             </a:r>
@@ -16323,8 +16032,7 @@
                   <a:srgbClr val="1F2A37"/>
                 </a:solidFill>
                 <a:latin typeface="Calibri" pitchFamily="34" charset="0"/>
-                <a:ea typeface="Calibri" pitchFamily="34" charset="-122"/>
-                <a:cs typeface="Calibri" pitchFamily="34" charset="-120"/>
+                <a:cs typeface="Amiri" pitchFamily="2" charset="-78"/>
               </a:rPr>
               <a:t>achievement</a:t>
             </a:r>
@@ -16387,8 +16095,7 @@
                   <a:srgbClr val="1B3B6F"/>
                 </a:solidFill>
                 <a:latin typeface="Calibri" pitchFamily="34" charset="0"/>
-                <a:ea typeface="Calibri" pitchFamily="34" charset="-122"/>
-                <a:cs typeface="Calibri" pitchFamily="34" charset="-120"/>
+                <a:cs typeface="Amiri" pitchFamily="2" charset="-78"/>
               </a:rPr>
               <a:t>C</a:t>
             </a:r>
@@ -16426,8 +16133,7 @@
                   <a:srgbClr val="1F2A37"/>
                 </a:solidFill>
                 <a:latin typeface="Calibri" pitchFamily="34" charset="0"/>
-                <a:ea typeface="Calibri" pitchFamily="34" charset="-122"/>
-                <a:cs typeface="Calibri" pitchFamily="34" charset="-120"/>
+                <a:cs typeface="Amiri" pitchFamily="2" charset="-78"/>
               </a:rPr>
               <a:t>ambition</a:t>
             </a:r>
@@ -16524,8 +16230,7 @@
                   <a:srgbClr val="FFFFFF"/>
                 </a:solidFill>
                 <a:latin typeface="Calibri" pitchFamily="34" charset="0"/>
-                <a:ea typeface="Calibri" pitchFamily="34" charset="-122"/>
-                <a:cs typeface="Calibri" pitchFamily="34" charset="-120"/>
+                <a:cs typeface="Amiri" pitchFamily="2" charset="-78"/>
               </a:rPr>
               <a:t>2</a:t>
             </a:r>
@@ -16563,8 +16268,7 @@
                   <a:srgbClr val="1B3B6F"/>
                 </a:solidFill>
                 <a:latin typeface="Calibri" pitchFamily="34" charset="0"/>
-                <a:ea typeface="Calibri" pitchFamily="34" charset="-122"/>
-                <a:cs typeface="Calibri" pitchFamily="34" charset="-120"/>
+                <a:cs typeface="Amiri" pitchFamily="2" charset="-78"/>
               </a:rPr>
               <a:t>What does </a:t>
             </a:r>
@@ -16576,9 +16280,8 @@
                 <a:solidFill>
                   <a:srgbClr val="1B3B6F"/>
                 </a:solidFill>
-                <a:latin typeface="Amiri" pitchFamily="34" charset="0"/>
-                <a:ea typeface="Amiri" pitchFamily="34" charset="-122"/>
-                <a:cs typeface="Amiri" pitchFamily="34" charset="-120"/>
+                <a:latin typeface="Amiri" pitchFamily="2" charset="-78"/>
+                <a:cs typeface="Amiri" pitchFamily="2" charset="-78"/>
               </a:rPr>
               <a:t>الطُّمُوحُ</a:t>
             </a:r>
@@ -16591,8 +16294,7 @@
                   <a:srgbClr val="1B3B6F"/>
                 </a:solidFill>
                 <a:latin typeface="Calibri" pitchFamily="34" charset="0"/>
-                <a:ea typeface="Calibri" pitchFamily="34" charset="-122"/>
-                <a:cs typeface="Calibri" pitchFamily="34" charset="-120"/>
+                <a:cs typeface="Amiri" pitchFamily="2" charset="-78"/>
               </a:rPr>
               <a:t> mean?</a:t>
             </a:r>
@@ -16655,8 +16357,7 @@
                   <a:srgbClr val="1B3B6F"/>
                 </a:solidFill>
                 <a:latin typeface="Calibri" pitchFamily="34" charset="0"/>
-                <a:ea typeface="Calibri" pitchFamily="34" charset="-122"/>
-                <a:cs typeface="Calibri" pitchFamily="34" charset="-120"/>
+                <a:cs typeface="Amiri" pitchFamily="2" charset="-78"/>
               </a:rPr>
               <a:t>A</a:t>
             </a:r>
@@ -16694,8 +16395,7 @@
                   <a:srgbClr val="1F2A37"/>
                 </a:solidFill>
                 <a:latin typeface="Calibri" pitchFamily="34" charset="0"/>
-                <a:ea typeface="Calibri" pitchFamily="34" charset="-122"/>
-                <a:cs typeface="Calibri" pitchFamily="34" charset="-120"/>
+                <a:cs typeface="Amiri" pitchFamily="2" charset="-78"/>
               </a:rPr>
               <a:t>ambition</a:t>
             </a:r>
@@ -16758,8 +16458,7 @@
                   <a:srgbClr val="1B3B6F"/>
                 </a:solidFill>
                 <a:latin typeface="Calibri" pitchFamily="34" charset="0"/>
-                <a:ea typeface="Calibri" pitchFamily="34" charset="-122"/>
-                <a:cs typeface="Calibri" pitchFamily="34" charset="-120"/>
+                <a:cs typeface="Amiri" pitchFamily="2" charset="-78"/>
               </a:rPr>
               <a:t>B</a:t>
             </a:r>
@@ -16797,8 +16496,7 @@
                   <a:srgbClr val="1F2A37"/>
                 </a:solidFill>
                 <a:latin typeface="Calibri" pitchFamily="34" charset="0"/>
-                <a:ea typeface="Calibri" pitchFamily="34" charset="-122"/>
-                <a:cs typeface="Calibri" pitchFamily="34" charset="-120"/>
+                <a:cs typeface="Amiri" pitchFamily="2" charset="-78"/>
               </a:rPr>
               <a:t>the journey</a:t>
             </a:r>
@@ -16861,8 +16559,7 @@
                   <a:srgbClr val="1B3B6F"/>
                 </a:solidFill>
                 <a:latin typeface="Calibri" pitchFamily="34" charset="0"/>
-                <a:ea typeface="Calibri" pitchFamily="34" charset="-122"/>
-                <a:cs typeface="Calibri" pitchFamily="34" charset="-120"/>
+                <a:cs typeface="Amiri" pitchFamily="2" charset="-78"/>
               </a:rPr>
               <a:t>C</a:t>
             </a:r>
@@ -16900,8 +16597,7 @@
                   <a:srgbClr val="1F2A37"/>
                 </a:solidFill>
                 <a:latin typeface="Calibri" pitchFamily="34" charset="0"/>
-                <a:ea typeface="Calibri" pitchFamily="34" charset="-122"/>
-                <a:cs typeface="Calibri" pitchFamily="34" charset="-120"/>
+                <a:cs typeface="Amiri" pitchFamily="2" charset="-78"/>
               </a:rPr>
               <a:t>the road ahead</a:t>
             </a:r>
@@ -16998,8 +16694,7 @@
                   <a:srgbClr val="FFFFFF"/>
                 </a:solidFill>
                 <a:latin typeface="Calibri" pitchFamily="34" charset="0"/>
-                <a:ea typeface="Calibri" pitchFamily="34" charset="-122"/>
-                <a:cs typeface="Calibri" pitchFamily="34" charset="-120"/>
+                <a:cs typeface="Amiri" pitchFamily="2" charset="-78"/>
               </a:rPr>
               <a:t>3</a:t>
             </a:r>
@@ -17037,8 +16732,7 @@
                   <a:srgbClr val="1B3B6F"/>
                 </a:solidFill>
                 <a:latin typeface="Calibri" pitchFamily="34" charset="0"/>
-                <a:ea typeface="Calibri" pitchFamily="34" charset="-122"/>
-                <a:cs typeface="Calibri" pitchFamily="34" charset="-120"/>
+                <a:cs typeface="Amiri" pitchFamily="2" charset="-78"/>
               </a:rPr>
               <a:t>What does </a:t>
             </a:r>
@@ -17050,9 +16744,8 @@
                 <a:solidFill>
                   <a:srgbClr val="1B3B6F"/>
                 </a:solidFill>
-                <a:latin typeface="Amiri" pitchFamily="34" charset="0"/>
-                <a:ea typeface="Amiri" pitchFamily="34" charset="-122"/>
-                <a:cs typeface="Amiri" pitchFamily="34" charset="-120"/>
+                <a:latin typeface="Amiri" pitchFamily="2" charset="-78"/>
+                <a:cs typeface="Amiri" pitchFamily="2" charset="-78"/>
               </a:rPr>
               <a:t>الطَّرِيقُ إِلَى الأَمَامِ</a:t>
             </a:r>
@@ -17065,8 +16758,7 @@
                   <a:srgbClr val="1B3B6F"/>
                 </a:solidFill>
                 <a:latin typeface="Calibri" pitchFamily="34" charset="0"/>
-                <a:ea typeface="Calibri" pitchFamily="34" charset="-122"/>
-                <a:cs typeface="Calibri" pitchFamily="34" charset="-120"/>
+                <a:cs typeface="Amiri" pitchFamily="2" charset="-78"/>
               </a:rPr>
               <a:t> mean?</a:t>
             </a:r>
@@ -17129,8 +16821,7 @@
                   <a:srgbClr val="1B3B6F"/>
                 </a:solidFill>
                 <a:latin typeface="Calibri" pitchFamily="34" charset="0"/>
-                <a:ea typeface="Calibri" pitchFamily="34" charset="-122"/>
-                <a:cs typeface="Calibri" pitchFamily="34" charset="-120"/>
+                <a:cs typeface="Amiri" pitchFamily="2" charset="-78"/>
               </a:rPr>
               <a:t>A</a:t>
             </a:r>
@@ -17168,8 +16859,7 @@
                   <a:srgbClr val="1F2A37"/>
                 </a:solidFill>
                 <a:latin typeface="Calibri" pitchFamily="34" charset="0"/>
-                <a:ea typeface="Calibri" pitchFamily="34" charset="-122"/>
-                <a:cs typeface="Calibri" pitchFamily="34" charset="-120"/>
+                <a:cs typeface="Amiri" pitchFamily="2" charset="-78"/>
               </a:rPr>
               <a:t>the road behind</a:t>
             </a:r>
@@ -17232,8 +16922,7 @@
                   <a:srgbClr val="1B3B6F"/>
                 </a:solidFill>
                 <a:latin typeface="Calibri" pitchFamily="34" charset="0"/>
-                <a:ea typeface="Calibri" pitchFamily="34" charset="-122"/>
-                <a:cs typeface="Calibri" pitchFamily="34" charset="-120"/>
+                <a:cs typeface="Amiri" pitchFamily="2" charset="-78"/>
               </a:rPr>
               <a:t>B</a:t>
             </a:r>
@@ -17271,8 +16960,7 @@
                   <a:srgbClr val="1F2A37"/>
                 </a:solidFill>
                 <a:latin typeface="Calibri" pitchFamily="34" charset="0"/>
-                <a:ea typeface="Calibri" pitchFamily="34" charset="-122"/>
-                <a:cs typeface="Calibri" pitchFamily="34" charset="-120"/>
+                <a:cs typeface="Amiri" pitchFamily="2" charset="-78"/>
               </a:rPr>
               <a:t>a long road</a:t>
             </a:r>
@@ -17335,8 +17023,7 @@
                   <a:srgbClr val="1B3B6F"/>
                 </a:solidFill>
                 <a:latin typeface="Calibri" pitchFamily="34" charset="0"/>
-                <a:ea typeface="Calibri" pitchFamily="34" charset="-122"/>
-                <a:cs typeface="Calibri" pitchFamily="34" charset="-120"/>
+                <a:cs typeface="Amiri" pitchFamily="2" charset="-78"/>
               </a:rPr>
               <a:t>C</a:t>
             </a:r>
@@ -17374,8 +17061,7 @@
                   <a:srgbClr val="1F2A37"/>
                 </a:solidFill>
                 <a:latin typeface="Calibri" pitchFamily="34" charset="0"/>
-                <a:ea typeface="Calibri" pitchFamily="34" charset="-122"/>
-                <a:cs typeface="Calibri" pitchFamily="34" charset="-120"/>
+                <a:cs typeface="Amiri" pitchFamily="2" charset="-78"/>
               </a:rPr>
               <a:t>the road ahead</a:t>
             </a:r>
@@ -17472,8 +17158,7 @@
                   <a:srgbClr val="FFFFFF"/>
                 </a:solidFill>
                 <a:latin typeface="Calibri" pitchFamily="34" charset="0"/>
-                <a:ea typeface="Calibri" pitchFamily="34" charset="-122"/>
-                <a:cs typeface="Calibri" pitchFamily="34" charset="-120"/>
+                <a:cs typeface="Amiri" pitchFamily="2" charset="-78"/>
               </a:rPr>
               <a:t>4</a:t>
             </a:r>
@@ -17511,8 +17196,7 @@
                   <a:srgbClr val="1B3B6F"/>
                 </a:solidFill>
                 <a:latin typeface="Calibri" pitchFamily="34" charset="0"/>
-                <a:ea typeface="Calibri" pitchFamily="34" charset="-122"/>
-                <a:cs typeface="Calibri" pitchFamily="34" charset="-120"/>
+                <a:cs typeface="Amiri" pitchFamily="2" charset="-78"/>
               </a:rPr>
               <a:t>How many IGCSE papers did you sit as mocks?</a:t>
             </a:r>
@@ -17575,8 +17259,7 @@
                   <a:srgbClr val="1B3B6F"/>
                 </a:solidFill>
                 <a:latin typeface="Calibri" pitchFamily="34" charset="0"/>
-                <a:ea typeface="Calibri" pitchFamily="34" charset="-122"/>
-                <a:cs typeface="Calibri" pitchFamily="34" charset="-120"/>
+                <a:cs typeface="Amiri" pitchFamily="2" charset="-78"/>
               </a:rPr>
               <a:t>A</a:t>
             </a:r>
@@ -17614,8 +17297,7 @@
                   <a:srgbClr val="1F2A37"/>
                 </a:solidFill>
                 <a:latin typeface="Calibri" pitchFamily="34" charset="0"/>
-                <a:ea typeface="Calibri" pitchFamily="34" charset="-122"/>
-                <a:cs typeface="Calibri" pitchFamily="34" charset="-120"/>
+                <a:cs typeface="Amiri" pitchFamily="2" charset="-78"/>
               </a:rPr>
               <a:t>three</a:t>
             </a:r>
@@ -17678,8 +17360,7 @@
                   <a:srgbClr val="1B3B6F"/>
                 </a:solidFill>
                 <a:latin typeface="Calibri" pitchFamily="34" charset="0"/>
-                <a:ea typeface="Calibri" pitchFamily="34" charset="-122"/>
-                <a:cs typeface="Calibri" pitchFamily="34" charset="-120"/>
+                <a:cs typeface="Amiri" pitchFamily="2" charset="-78"/>
               </a:rPr>
               <a:t>B</a:t>
             </a:r>
@@ -17717,8 +17398,7 @@
                   <a:srgbClr val="1F2A37"/>
                 </a:solidFill>
                 <a:latin typeface="Calibri" pitchFamily="34" charset="0"/>
-                <a:ea typeface="Calibri" pitchFamily="34" charset="-122"/>
-                <a:cs typeface="Calibri" pitchFamily="34" charset="-120"/>
+                <a:cs typeface="Amiri" pitchFamily="2" charset="-78"/>
               </a:rPr>
               <a:t>two</a:t>
             </a:r>
@@ -17781,8 +17461,7 @@
                   <a:srgbClr val="1B3B6F"/>
                 </a:solidFill>
                 <a:latin typeface="Calibri" pitchFamily="34" charset="0"/>
-                <a:ea typeface="Calibri" pitchFamily="34" charset="-122"/>
-                <a:cs typeface="Calibri" pitchFamily="34" charset="-120"/>
+                <a:cs typeface="Amiri" pitchFamily="2" charset="-78"/>
               </a:rPr>
               <a:t>C</a:t>
             </a:r>
@@ -17820,8 +17499,7 @@
                   <a:srgbClr val="1F2A37"/>
                 </a:solidFill>
                 <a:latin typeface="Calibri" pitchFamily="34" charset="0"/>
-                <a:ea typeface="Calibri" pitchFamily="34" charset="-122"/>
-                <a:cs typeface="Calibri" pitchFamily="34" charset="-120"/>
+                <a:cs typeface="Amiri" pitchFamily="2" charset="-78"/>
               </a:rPr>
               <a:t>four</a:t>
             </a:r>
@@ -17918,8 +17596,7 @@
                   <a:srgbClr val="FFFFFF"/>
                 </a:solidFill>
                 <a:latin typeface="Calibri" pitchFamily="34" charset="0"/>
-                <a:ea typeface="Calibri" pitchFamily="34" charset="-122"/>
-                <a:cs typeface="Calibri" pitchFamily="34" charset="-120"/>
+                <a:cs typeface="Amiri" pitchFamily="2" charset="-78"/>
               </a:rPr>
               <a:t>5</a:t>
             </a:r>
@@ -17957,8 +17634,7 @@
                   <a:srgbClr val="1B3B6F"/>
                 </a:solidFill>
                 <a:latin typeface="Calibri" pitchFamily="34" charset="0"/>
-                <a:ea typeface="Calibri" pitchFamily="34" charset="-122"/>
-                <a:cs typeface="Calibri" pitchFamily="34" charset="-120"/>
+                <a:cs typeface="Amiri" pitchFamily="2" charset="-78"/>
               </a:rPr>
               <a:t>What does </a:t>
             </a:r>
@@ -17970,9 +17646,8 @@
                 <a:solidFill>
                   <a:srgbClr val="1B3B6F"/>
                 </a:solidFill>
-                <a:latin typeface="Amiri" pitchFamily="34" charset="0"/>
-                <a:ea typeface="Amiri" pitchFamily="34" charset="-122"/>
-                <a:cs typeface="Amiri" pitchFamily="34" charset="-120"/>
+                <a:latin typeface="Amiri" pitchFamily="2" charset="-78"/>
+                <a:cs typeface="Amiri" pitchFamily="2" charset="-78"/>
               </a:rPr>
               <a:t>العَرَبِيَّةُ الآنَ لَكَ</a:t>
             </a:r>
@@ -17985,8 +17660,7 @@
                   <a:srgbClr val="1B3B6F"/>
                 </a:solidFill>
                 <a:latin typeface="Calibri" pitchFamily="34" charset="0"/>
-                <a:ea typeface="Calibri" pitchFamily="34" charset="-122"/>
-                <a:cs typeface="Calibri" pitchFamily="34" charset="-120"/>
+                <a:cs typeface="Amiri" pitchFamily="2" charset="-78"/>
               </a:rPr>
               <a:t> mean?</a:t>
             </a:r>
@@ -18049,8 +17723,7 @@
                   <a:srgbClr val="1B3B6F"/>
                 </a:solidFill>
                 <a:latin typeface="Calibri" pitchFamily="34" charset="0"/>
-                <a:ea typeface="Calibri" pitchFamily="34" charset="-122"/>
-                <a:cs typeface="Calibri" pitchFamily="34" charset="-120"/>
+                <a:cs typeface="Amiri" pitchFamily="2" charset="-78"/>
               </a:rPr>
               <a:t>A</a:t>
             </a:r>
@@ -18088,8 +17761,7 @@
                   <a:srgbClr val="1F2A37"/>
                 </a:solidFill>
                 <a:latin typeface="Calibri" pitchFamily="34" charset="0"/>
-                <a:ea typeface="Calibri" pitchFamily="34" charset="-122"/>
-                <a:cs typeface="Calibri" pitchFamily="34" charset="-120"/>
+                <a:cs typeface="Amiri" pitchFamily="2" charset="-78"/>
               </a:rPr>
               <a:t>Arabic is now yours.</a:t>
             </a:r>
@@ -18152,8 +17824,7 @@
                   <a:srgbClr val="1B3B6F"/>
                 </a:solidFill>
                 <a:latin typeface="Calibri" pitchFamily="34" charset="0"/>
-                <a:ea typeface="Calibri" pitchFamily="34" charset="-122"/>
-                <a:cs typeface="Calibri" pitchFamily="34" charset="-120"/>
+                <a:cs typeface="Amiri" pitchFamily="2" charset="-78"/>
               </a:rPr>
               <a:t>B</a:t>
             </a:r>
@@ -18191,8 +17862,7 @@
                   <a:srgbClr val="1F2A37"/>
                 </a:solidFill>
                 <a:latin typeface="Calibri" pitchFamily="34" charset="0"/>
-                <a:ea typeface="Calibri" pitchFamily="34" charset="-122"/>
-                <a:cs typeface="Calibri" pitchFamily="34" charset="-120"/>
+                <a:cs typeface="Amiri" pitchFamily="2" charset="-78"/>
               </a:rPr>
               <a:t>Arabic is now difficult.</a:t>
             </a:r>
@@ -18255,8 +17925,7 @@
                   <a:srgbClr val="1B3B6F"/>
                 </a:solidFill>
                 <a:latin typeface="Calibri" pitchFamily="34" charset="0"/>
-                <a:ea typeface="Calibri" pitchFamily="34" charset="-122"/>
-                <a:cs typeface="Calibri" pitchFamily="34" charset="-120"/>
+                <a:cs typeface="Amiri" pitchFamily="2" charset="-78"/>
               </a:rPr>
               <a:t>C</a:t>
             </a:r>
@@ -18294,8 +17963,7 @@
                   <a:srgbClr val="1F2A37"/>
                 </a:solidFill>
                 <a:latin typeface="Calibri" pitchFamily="34" charset="0"/>
-                <a:ea typeface="Calibri" pitchFamily="34" charset="-122"/>
-                <a:cs typeface="Calibri" pitchFamily="34" charset="-120"/>
+                <a:cs typeface="Amiri" pitchFamily="2" charset="-78"/>
               </a:rPr>
               <a:t>Arabic is for later.</a:t>
             </a:r>
@@ -18367,8 +18035,7 @@
                   <a:srgbClr val="0E7C86"/>
                 </a:solidFill>
                 <a:latin typeface="Calibri" pitchFamily="34" charset="0"/>
-                <a:ea typeface="Calibri" pitchFamily="34" charset="-122"/>
-                <a:cs typeface="Calibri" pitchFamily="34" charset="-120"/>
+                <a:cs typeface="Amiri" pitchFamily="2" charset="-78"/>
               </a:rPr>
               <a:t>HOW TO ANSWER</a:t>
             </a:r>
@@ -18406,8 +18073,7 @@
                   <a:srgbClr val="1F2A37"/>
                 </a:solidFill>
                 <a:latin typeface="Calibri" pitchFamily="34" charset="0"/>
-                <a:ea typeface="Calibri" pitchFamily="34" charset="-122"/>
-                <a:cs typeface="Calibri" pitchFamily="34" charset="-120"/>
+                <a:cs typeface="Amiri" pitchFamily="2" charset="-78"/>
               </a:rPr>
               <a:t>Work on your own in silence.</a:t>
             </a:r>
@@ -18423,8 +18089,7 @@
                   <a:srgbClr val="1F2A37"/>
                 </a:solidFill>
                 <a:latin typeface="Calibri" pitchFamily="34" charset="0"/>
-                <a:ea typeface="Calibri" pitchFamily="34" charset="-122"/>
-                <a:cs typeface="Calibri" pitchFamily="34" charset="-120"/>
+                <a:cs typeface="Amiri" pitchFamily="2" charset="-78"/>
               </a:rPr>
               <a:t>When the timer ends, type in the chat:</a:t>
             </a:r>
@@ -18462,8 +18127,7 @@
                   <a:srgbClr val="1B3B6F"/>
                 </a:solidFill>
                 <a:latin typeface="Consolas" pitchFamily="34" charset="0"/>
-                <a:ea typeface="Consolas" pitchFamily="34" charset="-122"/>
-                <a:cs typeface="Consolas" pitchFamily="34" charset="-120"/>
+                <a:cs typeface="Amiri" pitchFamily="2" charset="-78"/>
               </a:rPr>
               <a:t>1_  2_  3_  4_  5_</a:t>
             </a:r>
@@ -18501,8 +18165,7 @@
                   <a:srgbClr val="0E7C86"/>
                 </a:solidFill>
                 <a:latin typeface="Calibri" pitchFamily="34" charset="0"/>
-                <a:ea typeface="Calibri" pitchFamily="34" charset="-122"/>
-                <a:cs typeface="Calibri" pitchFamily="34" charset="-120"/>
+                <a:cs typeface="Amiri" pitchFamily="2" charset="-78"/>
               </a:rPr>
               <a:t>⏱  5 : 00</a:t>
             </a:r>
@@ -18540,8 +18203,7 @@
                   <a:srgbClr val="8A93A0"/>
                 </a:solidFill>
                 <a:latin typeface="Calibri" pitchFamily="34" charset="0"/>
-                <a:ea typeface="Calibri" pitchFamily="34" charset="-122"/>
-                <a:cs typeface="Calibri" pitchFamily="34" charset="-120"/>
+                <a:cs typeface="Amiri" pitchFamily="2" charset="-78"/>
               </a:rPr>
               <a:t>4 / 17</a:t>
             </a:r>
@@ -18635,9 +18297,8 @@
                 <a:solidFill>
                   <a:srgbClr val="D4AF37"/>
                 </a:solidFill>
-                <a:latin typeface="Amiri" pitchFamily="34" charset="0"/>
-                <a:ea typeface="Amiri" pitchFamily="34" charset="-122"/>
-                <a:cs typeface="Amiri" pitchFamily="34" charset="-120"/>
+                <a:latin typeface="Amiri" pitchFamily="2" charset="-78"/>
+                <a:cs typeface="Amiri" pitchFamily="2" charset="-78"/>
               </a:rPr>
               <a:t>م</a:t>
             </a:r>
@@ -18675,8 +18336,7 @@
                   <a:srgbClr val="1B3B6F"/>
                 </a:solidFill>
                 <a:latin typeface="Cambria" pitchFamily="34" charset="0"/>
-                <a:ea typeface="Cambria" pitchFamily="34" charset="-122"/>
-                <a:cs typeface="Cambria" pitchFamily="34" charset="-120"/>
+                <a:cs typeface="Amiri" pitchFamily="2" charset="-78"/>
               </a:rPr>
               <a:t>Al Madina Online School</a:t>
             </a:r>
@@ -18714,8 +18374,7 @@
                   <a:srgbClr val="8A6D1E"/>
                 </a:solidFill>
                 <a:latin typeface="Calibri" pitchFamily="34" charset="0"/>
-                <a:ea typeface="Calibri" pitchFamily="34" charset="-122"/>
-                <a:cs typeface="Calibri" pitchFamily="34" charset="-120"/>
+                <a:cs typeface="Amiri" pitchFamily="2" charset="-78"/>
               </a:rPr>
               <a:t>ARABIC DEPARTMENT · MIFTAH ARABIC · IGCSE 0544</a:t>
             </a:r>
@@ -18780,8 +18439,7 @@
                   <a:srgbClr val="FFFFFF"/>
                 </a:solidFill>
                 <a:latin typeface="Calibri" pitchFamily="34" charset="0"/>
-                <a:ea typeface="Calibri" pitchFamily="34" charset="-122"/>
-                <a:cs typeface="Calibri" pitchFamily="34" charset="-120"/>
+                <a:cs typeface="Amiri" pitchFamily="2" charset="-78"/>
               </a:rPr>
               <a:t>P6-L12 · IGCSE Bridge</a:t>
             </a:r>
@@ -18846,8 +18504,7 @@
                   <a:srgbClr val="FFFFFF"/>
                 </a:solidFill>
                 <a:latin typeface="Calibri" pitchFamily="34" charset="0"/>
-                <a:ea typeface="Calibri" pitchFamily="34" charset="-122"/>
-                <a:cs typeface="Calibri" pitchFamily="34" charset="-120"/>
+                <a:cs typeface="Amiri" pitchFamily="2" charset="-78"/>
               </a:rPr>
               <a:t>DO NOW · 2 MIN</a:t>
             </a:r>
@@ -18885,8 +18542,7 @@
                   <a:srgbClr val="0E7C86"/>
                 </a:solidFill>
                 <a:latin typeface="Calibri" pitchFamily="34" charset="0"/>
-                <a:ea typeface="Calibri" pitchFamily="34" charset="-122"/>
-                <a:cs typeface="Calibri" pitchFamily="34" charset="-120"/>
+                <a:cs typeface="Amiri" pitchFamily="2" charset="-78"/>
               </a:rPr>
               <a:t>DO NOW · ANSWERS AND REASONS</a:t>
             </a:r>
@@ -18924,8 +18580,7 @@
                   <a:srgbClr val="1B3B6F"/>
                 </a:solidFill>
                 <a:latin typeface="Cambria" pitchFamily="34" charset="0"/>
-                <a:ea typeface="Cambria" pitchFamily="34" charset="-122"/>
-                <a:cs typeface="Cambria" pitchFamily="34" charset="-120"/>
+                <a:cs typeface="Amiri" pitchFamily="2" charset="-78"/>
               </a:rPr>
               <a:t>Let’s check — and explain why</a:t>
             </a:r>
@@ -18962,9 +18617,8 @@
                 <a:solidFill>
                   <a:srgbClr val="8A6D1E"/>
                 </a:solidFill>
-                <a:latin typeface="Amiri" pitchFamily="34" charset="0"/>
-                <a:ea typeface="Amiri" pitchFamily="34" charset="-122"/>
-                <a:cs typeface="Amiri" pitchFamily="34" charset="-120"/>
+                <a:latin typeface="Amiri" pitchFamily="2" charset="-78"/>
+                <a:cs typeface="Amiri" pitchFamily="2" charset="-78"/>
               </a:rPr>
               <a:t>الإِجَابَاتُ وَالتَّعْلِيلُ</a:t>
             </a:r>
@@ -19002,8 +18656,7 @@
                   <a:srgbClr val="8A93A0"/>
                 </a:solidFill>
                 <a:latin typeface="Calibri" pitchFamily="34" charset="0"/>
-                <a:ea typeface="Calibri" pitchFamily="34" charset="-122"/>
-                <a:cs typeface="Calibri" pitchFamily="34" charset="-120"/>
+                <a:cs typeface="Amiri" pitchFamily="2" charset="-78"/>
               </a:rPr>
               <a:t>Miftah Arabic · Progression P6 · IGCSE Bridge · P6-L12</a:t>
             </a:r>
@@ -19100,8 +18753,7 @@
                   <a:srgbClr val="FFFFFF"/>
                 </a:solidFill>
                 <a:latin typeface="Calibri" pitchFamily="34" charset="0"/>
-                <a:ea typeface="Calibri" pitchFamily="34" charset="-122"/>
-                <a:cs typeface="Calibri" pitchFamily="34" charset="-120"/>
+                <a:cs typeface="Amiri" pitchFamily="2" charset="-78"/>
               </a:rPr>
               <a:t>1</a:t>
             </a:r>
@@ -19139,8 +18791,7 @@
                   <a:srgbClr val="1B3B6F"/>
                 </a:solidFill>
                 <a:latin typeface="Calibri" pitchFamily="34" charset="0"/>
-                <a:ea typeface="Calibri" pitchFamily="34" charset="-122"/>
-                <a:cs typeface="Calibri" pitchFamily="34" charset="-120"/>
+                <a:cs typeface="Amiri" pitchFamily="2" charset="-78"/>
               </a:rPr>
               <a:t>What does </a:t>
             </a:r>
@@ -19152,9 +18803,8 @@
                 <a:solidFill>
                   <a:srgbClr val="1B3B6F"/>
                 </a:solidFill>
-                <a:latin typeface="Amiri" pitchFamily="34" charset="0"/>
-                <a:ea typeface="Amiri" pitchFamily="34" charset="-122"/>
-                <a:cs typeface="Amiri" pitchFamily="34" charset="-120"/>
+                <a:latin typeface="Amiri" pitchFamily="2" charset="-78"/>
+                <a:cs typeface="Amiri" pitchFamily="2" charset="-78"/>
               </a:rPr>
               <a:t>الإِنْجَازُ</a:t>
             </a:r>
@@ -19167,8 +18817,7 @@
                   <a:srgbClr val="1B3B6F"/>
                 </a:solidFill>
                 <a:latin typeface="Calibri" pitchFamily="34" charset="0"/>
-                <a:ea typeface="Calibri" pitchFamily="34" charset="-122"/>
-                <a:cs typeface="Calibri" pitchFamily="34" charset="-120"/>
+                <a:cs typeface="Amiri" pitchFamily="2" charset="-78"/>
               </a:rPr>
               <a:t> mean?</a:t>
             </a:r>
@@ -19231,8 +18880,7 @@
                   <a:srgbClr val="1B3B6F"/>
                 </a:solidFill>
                 <a:latin typeface="Calibri" pitchFamily="34" charset="0"/>
-                <a:ea typeface="Calibri" pitchFamily="34" charset="-122"/>
-                <a:cs typeface="Calibri" pitchFamily="34" charset="-120"/>
+                <a:cs typeface="Amiri" pitchFamily="2" charset="-78"/>
               </a:rPr>
               <a:t>A</a:t>
             </a:r>
@@ -19270,8 +18918,7 @@
                   <a:srgbClr val="9AA1AB"/>
                 </a:solidFill>
                 <a:latin typeface="Calibri" pitchFamily="34" charset="0"/>
-                <a:ea typeface="Calibri" pitchFamily="34" charset="-122"/>
-                <a:cs typeface="Calibri" pitchFamily="34" charset="-120"/>
+                <a:cs typeface="Amiri" pitchFamily="2" charset="-78"/>
               </a:rPr>
               <a:t>celebration</a:t>
             </a:r>
@@ -19361,8 +19008,7 @@
                   <a:srgbClr val="FFFFFF"/>
                 </a:solidFill>
                 <a:latin typeface="Calibri" pitchFamily="34" charset="0"/>
-                <a:ea typeface="Calibri" pitchFamily="34" charset="-122"/>
-                <a:cs typeface="Calibri" pitchFamily="34" charset="-120"/>
+                <a:cs typeface="Amiri" pitchFamily="2" charset="-78"/>
               </a:rPr>
               <a:t>B</a:t>
             </a:r>
@@ -19400,8 +19046,7 @@
                   <a:srgbClr val="1F2A37"/>
                 </a:solidFill>
                 <a:latin typeface="Calibri" pitchFamily="34" charset="0"/>
-                <a:ea typeface="Calibri" pitchFamily="34" charset="-122"/>
-                <a:cs typeface="Calibri" pitchFamily="34" charset="-120"/>
+                <a:cs typeface="Amiri" pitchFamily="2" charset="-78"/>
               </a:rPr>
               <a:t>achievement</a:t>
             </a:r>
@@ -19464,8 +19109,7 @@
                   <a:srgbClr val="1B3B6F"/>
                 </a:solidFill>
                 <a:latin typeface="Calibri" pitchFamily="34" charset="0"/>
-                <a:ea typeface="Calibri" pitchFamily="34" charset="-122"/>
-                <a:cs typeface="Calibri" pitchFamily="34" charset="-120"/>
+                <a:cs typeface="Amiri" pitchFamily="2" charset="-78"/>
               </a:rPr>
               <a:t>C</a:t>
             </a:r>
@@ -19503,8 +19147,7 @@
                   <a:srgbClr val="9AA1AB"/>
                 </a:solidFill>
                 <a:latin typeface="Calibri" pitchFamily="34" charset="0"/>
-                <a:ea typeface="Calibri" pitchFamily="34" charset="-122"/>
-                <a:cs typeface="Calibri" pitchFamily="34" charset="-120"/>
+                <a:cs typeface="Amiri" pitchFamily="2" charset="-78"/>
               </a:rPr>
               <a:t>ambition</a:t>
             </a:r>
@@ -19542,8 +19185,7 @@
                   <a:srgbClr val="8A6D1E"/>
                 </a:solidFill>
                 <a:latin typeface="Calibri" pitchFamily="34" charset="0"/>
-                <a:ea typeface="Calibri" pitchFamily="34" charset="-122"/>
-                <a:cs typeface="Calibri" pitchFamily="34" charset="-120"/>
+                <a:cs typeface="Amiri" pitchFamily="2" charset="-78"/>
               </a:rPr>
               <a:t>Prepared at home (P6-L11).</a:t>
             </a:r>
@@ -19640,8 +19282,7 @@
                   <a:srgbClr val="FFFFFF"/>
                 </a:solidFill>
                 <a:latin typeface="Calibri" pitchFamily="34" charset="0"/>
-                <a:ea typeface="Calibri" pitchFamily="34" charset="-122"/>
-                <a:cs typeface="Calibri" pitchFamily="34" charset="-120"/>
+                <a:cs typeface="Amiri" pitchFamily="2" charset="-78"/>
               </a:rPr>
               <a:t>2</a:t>
             </a:r>
@@ -19679,8 +19320,7 @@
                   <a:srgbClr val="1B3B6F"/>
                 </a:solidFill>
                 <a:latin typeface="Calibri" pitchFamily="34" charset="0"/>
-                <a:ea typeface="Calibri" pitchFamily="34" charset="-122"/>
-                <a:cs typeface="Calibri" pitchFamily="34" charset="-120"/>
+                <a:cs typeface="Amiri" pitchFamily="2" charset="-78"/>
               </a:rPr>
               <a:t>What does </a:t>
             </a:r>
@@ -19692,9 +19332,8 @@
                 <a:solidFill>
                   <a:srgbClr val="1B3B6F"/>
                 </a:solidFill>
-                <a:latin typeface="Amiri" pitchFamily="34" charset="0"/>
-                <a:ea typeface="Amiri" pitchFamily="34" charset="-122"/>
-                <a:cs typeface="Amiri" pitchFamily="34" charset="-120"/>
+                <a:latin typeface="Amiri" pitchFamily="2" charset="-78"/>
+                <a:cs typeface="Amiri" pitchFamily="2" charset="-78"/>
               </a:rPr>
               <a:t>الطُّمُوحُ</a:t>
             </a:r>
@@ -19707,8 +19346,7 @@
                   <a:srgbClr val="1B3B6F"/>
                 </a:solidFill>
                 <a:latin typeface="Calibri" pitchFamily="34" charset="0"/>
-                <a:ea typeface="Calibri" pitchFamily="34" charset="-122"/>
-                <a:cs typeface="Calibri" pitchFamily="34" charset="-120"/>
+                <a:cs typeface="Amiri" pitchFamily="2" charset="-78"/>
               </a:rPr>
               <a:t> mean?</a:t>
             </a:r>
@@ -19798,8 +19436,7 @@
                   <a:srgbClr val="FFFFFF"/>
                 </a:solidFill>
                 <a:latin typeface="Calibri" pitchFamily="34" charset="0"/>
-                <a:ea typeface="Calibri" pitchFamily="34" charset="-122"/>
-                <a:cs typeface="Calibri" pitchFamily="34" charset="-120"/>
+                <a:cs typeface="Amiri" pitchFamily="2" charset="-78"/>
               </a:rPr>
               <a:t>A</a:t>
             </a:r>
@@ -19837,8 +19474,7 @@
                   <a:srgbClr val="1F2A37"/>
                 </a:solidFill>
                 <a:latin typeface="Calibri" pitchFamily="34" charset="0"/>
-                <a:ea typeface="Calibri" pitchFamily="34" charset="-122"/>
-                <a:cs typeface="Calibri" pitchFamily="34" charset="-120"/>
+                <a:cs typeface="Amiri" pitchFamily="2" charset="-78"/>
               </a:rPr>
               <a:t>ambition</a:t>
             </a:r>
@@ -19901,8 +19537,7 @@
                   <a:srgbClr val="1B3B6F"/>
                 </a:solidFill>
                 <a:latin typeface="Calibri" pitchFamily="34" charset="0"/>
-                <a:ea typeface="Calibri" pitchFamily="34" charset="-122"/>
-                <a:cs typeface="Calibri" pitchFamily="34" charset="-120"/>
+                <a:cs typeface="Amiri" pitchFamily="2" charset="-78"/>
               </a:rPr>
               <a:t>B</a:t>
             </a:r>
@@ -19940,8 +19575,7 @@
                   <a:srgbClr val="9AA1AB"/>
                 </a:solidFill>
                 <a:latin typeface="Calibri" pitchFamily="34" charset="0"/>
-                <a:ea typeface="Calibri" pitchFamily="34" charset="-122"/>
-                <a:cs typeface="Calibri" pitchFamily="34" charset="-120"/>
+                <a:cs typeface="Amiri" pitchFamily="2" charset="-78"/>
               </a:rPr>
               <a:t>the journey</a:t>
             </a:r>
@@ -20004,8 +19638,7 @@
                   <a:srgbClr val="1B3B6F"/>
                 </a:solidFill>
                 <a:latin typeface="Calibri" pitchFamily="34" charset="0"/>
-                <a:ea typeface="Calibri" pitchFamily="34" charset="-122"/>
-                <a:cs typeface="Calibri" pitchFamily="34" charset="-120"/>
+                <a:cs typeface="Amiri" pitchFamily="2" charset="-78"/>
               </a:rPr>
               <a:t>C</a:t>
             </a:r>
@@ -20043,8 +19676,7 @@
                   <a:srgbClr val="9AA1AB"/>
                 </a:solidFill>
                 <a:latin typeface="Calibri" pitchFamily="34" charset="0"/>
-                <a:ea typeface="Calibri" pitchFamily="34" charset="-122"/>
-                <a:cs typeface="Calibri" pitchFamily="34" charset="-120"/>
+                <a:cs typeface="Amiri" pitchFamily="2" charset="-78"/>
               </a:rPr>
               <a:t>the road ahead</a:t>
             </a:r>
@@ -20082,8 +19714,7 @@
                   <a:srgbClr val="8A6D1E"/>
                 </a:solidFill>
                 <a:latin typeface="Calibri" pitchFamily="34" charset="0"/>
-                <a:ea typeface="Calibri" pitchFamily="34" charset="-122"/>
-                <a:cs typeface="Calibri" pitchFamily="34" charset="-120"/>
+                <a:cs typeface="Amiri" pitchFamily="2" charset="-78"/>
               </a:rPr>
               <a:t>Prepared at home (P6-L11).</a:t>
             </a:r>
@@ -20180,8 +19811,7 @@
                   <a:srgbClr val="FFFFFF"/>
                 </a:solidFill>
                 <a:latin typeface="Calibri" pitchFamily="34" charset="0"/>
-                <a:ea typeface="Calibri" pitchFamily="34" charset="-122"/>
-                <a:cs typeface="Calibri" pitchFamily="34" charset="-120"/>
+                <a:cs typeface="Amiri" pitchFamily="2" charset="-78"/>
               </a:rPr>
               <a:t>3</a:t>
             </a:r>
@@ -20219,8 +19849,7 @@
                   <a:srgbClr val="1B3B6F"/>
                 </a:solidFill>
                 <a:latin typeface="Calibri" pitchFamily="34" charset="0"/>
-                <a:ea typeface="Calibri" pitchFamily="34" charset="-122"/>
-                <a:cs typeface="Calibri" pitchFamily="34" charset="-120"/>
+                <a:cs typeface="Amiri" pitchFamily="2" charset="-78"/>
               </a:rPr>
               <a:t>What does </a:t>
             </a:r>
@@ -20232,9 +19861,8 @@
                 <a:solidFill>
                   <a:srgbClr val="1B3B6F"/>
                 </a:solidFill>
-                <a:latin typeface="Amiri" pitchFamily="34" charset="0"/>
-                <a:ea typeface="Amiri" pitchFamily="34" charset="-122"/>
-                <a:cs typeface="Amiri" pitchFamily="34" charset="-120"/>
+                <a:latin typeface="Amiri" pitchFamily="2" charset="-78"/>
+                <a:cs typeface="Amiri" pitchFamily="2" charset="-78"/>
               </a:rPr>
               <a:t>الطَّرِيقُ إِلَى الأَمَامِ</a:t>
             </a:r>
@@ -20247,8 +19875,7 @@
                   <a:srgbClr val="1B3B6F"/>
                 </a:solidFill>
                 <a:latin typeface="Calibri" pitchFamily="34" charset="0"/>
-                <a:ea typeface="Calibri" pitchFamily="34" charset="-122"/>
-                <a:cs typeface="Calibri" pitchFamily="34" charset="-120"/>
+                <a:cs typeface="Amiri" pitchFamily="2" charset="-78"/>
               </a:rPr>
               <a:t> mean?</a:t>
             </a:r>
@@ -20311,8 +19938,7 @@
                   <a:srgbClr val="1B3B6F"/>
                 </a:solidFill>
                 <a:latin typeface="Calibri" pitchFamily="34" charset="0"/>
-                <a:ea typeface="Calibri" pitchFamily="34" charset="-122"/>
-                <a:cs typeface="Calibri" pitchFamily="34" charset="-120"/>
+                <a:cs typeface="Amiri" pitchFamily="2" charset="-78"/>
               </a:rPr>
               <a:t>A</a:t>
             </a:r>
@@ -20350,8 +19976,7 @@
                   <a:srgbClr val="9AA1AB"/>
                 </a:solidFill>
                 <a:latin typeface="Calibri" pitchFamily="34" charset="0"/>
-                <a:ea typeface="Calibri" pitchFamily="34" charset="-122"/>
-                <a:cs typeface="Calibri" pitchFamily="34" charset="-120"/>
+                <a:cs typeface="Amiri" pitchFamily="2" charset="-78"/>
               </a:rPr>
               <a:t>the road behind</a:t>
             </a:r>
@@ -20414,8 +20039,7 @@
                   <a:srgbClr val="1B3B6F"/>
                 </a:solidFill>
                 <a:latin typeface="Calibri" pitchFamily="34" charset="0"/>
-                <a:ea typeface="Calibri" pitchFamily="34" charset="-122"/>
-                <a:cs typeface="Calibri" pitchFamily="34" charset="-120"/>
+                <a:cs typeface="Amiri" pitchFamily="2" charset="-78"/>
               </a:rPr>
               <a:t>B</a:t>
             </a:r>
@@ -20453,8 +20077,7 @@
                   <a:srgbClr val="9AA1AB"/>
                 </a:solidFill>
                 <a:latin typeface="Calibri" pitchFamily="34" charset="0"/>
-                <a:ea typeface="Calibri" pitchFamily="34" charset="-122"/>
-                <a:cs typeface="Calibri" pitchFamily="34" charset="-120"/>
+                <a:cs typeface="Amiri" pitchFamily="2" charset="-78"/>
               </a:rPr>
               <a:t>a long road</a:t>
             </a:r>
@@ -20544,8 +20167,7 @@
                   <a:srgbClr val="FFFFFF"/>
                 </a:solidFill>
                 <a:latin typeface="Calibri" pitchFamily="34" charset="0"/>
-                <a:ea typeface="Calibri" pitchFamily="34" charset="-122"/>
-                <a:cs typeface="Calibri" pitchFamily="34" charset="-120"/>
+                <a:cs typeface="Amiri" pitchFamily="2" charset="-78"/>
               </a:rPr>
               <a:t>C</a:t>
             </a:r>
@@ -20583,8 +20205,7 @@
                   <a:srgbClr val="1F2A37"/>
                 </a:solidFill>
                 <a:latin typeface="Calibri" pitchFamily="34" charset="0"/>
-                <a:ea typeface="Calibri" pitchFamily="34" charset="-122"/>
-                <a:cs typeface="Calibri" pitchFamily="34" charset="-120"/>
+                <a:cs typeface="Amiri" pitchFamily="2" charset="-78"/>
               </a:rPr>
               <a:t>the road ahead</a:t>
             </a:r>
@@ -20622,8 +20243,7 @@
                   <a:srgbClr val="8A6D1E"/>
                 </a:solidFill>
                 <a:latin typeface="Calibri" pitchFamily="34" charset="0"/>
-                <a:ea typeface="Calibri" pitchFamily="34" charset="-122"/>
-                <a:cs typeface="Calibri" pitchFamily="34" charset="-120"/>
+                <a:cs typeface="Amiri" pitchFamily="2" charset="-78"/>
               </a:rPr>
               <a:t>Prepared at home (P6-L11).</a:t>
             </a:r>
@@ -20720,8 +20340,7 @@
                   <a:srgbClr val="FFFFFF"/>
                 </a:solidFill>
                 <a:latin typeface="Calibri" pitchFamily="34" charset="0"/>
-                <a:ea typeface="Calibri" pitchFamily="34" charset="-122"/>
-                <a:cs typeface="Calibri" pitchFamily="34" charset="-120"/>
+                <a:cs typeface="Amiri" pitchFamily="2" charset="-78"/>
               </a:rPr>
               <a:t>4</a:t>
             </a:r>
@@ -20759,8 +20378,7 @@
                   <a:srgbClr val="1B3B6F"/>
                 </a:solidFill>
                 <a:latin typeface="Calibri" pitchFamily="34" charset="0"/>
-                <a:ea typeface="Calibri" pitchFamily="34" charset="-122"/>
-                <a:cs typeface="Calibri" pitchFamily="34" charset="-120"/>
+                <a:cs typeface="Amiri" pitchFamily="2" charset="-78"/>
               </a:rPr>
               <a:t>How many IGCSE papers did you sit as mocks?</a:t>
             </a:r>
@@ -20823,8 +20441,7 @@
                   <a:srgbClr val="1B3B6F"/>
                 </a:solidFill>
                 <a:latin typeface="Calibri" pitchFamily="34" charset="0"/>
-                <a:ea typeface="Calibri" pitchFamily="34" charset="-122"/>
-                <a:cs typeface="Calibri" pitchFamily="34" charset="-120"/>
+                <a:cs typeface="Amiri" pitchFamily="2" charset="-78"/>
               </a:rPr>
               <a:t>A</a:t>
             </a:r>
@@ -20862,8 +20479,7 @@
                   <a:srgbClr val="9AA1AB"/>
                 </a:solidFill>
                 <a:latin typeface="Calibri" pitchFamily="34" charset="0"/>
-                <a:ea typeface="Calibri" pitchFamily="34" charset="-122"/>
-                <a:cs typeface="Calibri" pitchFamily="34" charset="-120"/>
+                <a:cs typeface="Amiri" pitchFamily="2" charset="-78"/>
               </a:rPr>
               <a:t>three</a:t>
             </a:r>
@@ -20926,8 +20542,7 @@
                   <a:srgbClr val="1B3B6F"/>
                 </a:solidFill>
                 <a:latin typeface="Calibri" pitchFamily="34" charset="0"/>
-                <a:ea typeface="Calibri" pitchFamily="34" charset="-122"/>
-                <a:cs typeface="Calibri" pitchFamily="34" charset="-120"/>
+                <a:cs typeface="Amiri" pitchFamily="2" charset="-78"/>
               </a:rPr>
               <a:t>B</a:t>
             </a:r>
@@ -20965,8 +20580,7 @@
                   <a:srgbClr val="9AA1AB"/>
                 </a:solidFill>
                 <a:latin typeface="Calibri" pitchFamily="34" charset="0"/>
-                <a:ea typeface="Calibri" pitchFamily="34" charset="-122"/>
-                <a:cs typeface="Calibri" pitchFamily="34" charset="-120"/>
+                <a:cs typeface="Amiri" pitchFamily="2" charset="-78"/>
               </a:rPr>
               <a:t>two</a:t>
             </a:r>
@@ -21056,8 +20670,7 @@
                   <a:srgbClr val="FFFFFF"/>
                 </a:solidFill>
                 <a:latin typeface="Calibri" pitchFamily="34" charset="0"/>
-                <a:ea typeface="Calibri" pitchFamily="34" charset="-122"/>
-                <a:cs typeface="Calibri" pitchFamily="34" charset="-120"/>
+                <a:cs typeface="Amiri" pitchFamily="2" charset="-78"/>
               </a:rPr>
               <a:t>C</a:t>
             </a:r>
@@ -21095,8 +20708,7 @@
                   <a:srgbClr val="1F2A37"/>
                 </a:solidFill>
                 <a:latin typeface="Calibri" pitchFamily="34" charset="0"/>
-                <a:ea typeface="Calibri" pitchFamily="34" charset="-122"/>
-                <a:cs typeface="Calibri" pitchFamily="34" charset="-120"/>
+                <a:cs typeface="Amiri" pitchFamily="2" charset="-78"/>
               </a:rPr>
               <a:t>four</a:t>
             </a:r>
@@ -21134,8 +20746,7 @@
                   <a:srgbClr val="8A6D1E"/>
                 </a:solidFill>
                 <a:latin typeface="Calibri" pitchFamily="34" charset="0"/>
-                <a:ea typeface="Calibri" pitchFamily="34" charset="-122"/>
-                <a:cs typeface="Calibri" pitchFamily="34" charset="-120"/>
+                <a:cs typeface="Amiri" pitchFamily="2" charset="-78"/>
               </a:rPr>
               <a:t>Listening · Reading · Speaking · Writing (P6-L08 to P6-L10).</a:t>
             </a:r>
@@ -21232,8 +20843,7 @@
                   <a:srgbClr val="FFFFFF"/>
                 </a:solidFill>
                 <a:latin typeface="Calibri" pitchFamily="34" charset="0"/>
-                <a:ea typeface="Calibri" pitchFamily="34" charset="-122"/>
-                <a:cs typeface="Calibri" pitchFamily="34" charset="-120"/>
+                <a:cs typeface="Amiri" pitchFamily="2" charset="-78"/>
               </a:rPr>
               <a:t>5</a:t>
             </a:r>
@@ -21271,8 +20881,7 @@
                   <a:srgbClr val="1B3B6F"/>
                 </a:solidFill>
                 <a:latin typeface="Calibri" pitchFamily="34" charset="0"/>
-                <a:ea typeface="Calibri" pitchFamily="34" charset="-122"/>
-                <a:cs typeface="Calibri" pitchFamily="34" charset="-120"/>
+                <a:cs typeface="Amiri" pitchFamily="2" charset="-78"/>
               </a:rPr>
               <a:t>What does </a:t>
             </a:r>
@@ -21284,9 +20893,8 @@
                 <a:solidFill>
                   <a:srgbClr val="1B3B6F"/>
                 </a:solidFill>
-                <a:latin typeface="Amiri" pitchFamily="34" charset="0"/>
-                <a:ea typeface="Amiri" pitchFamily="34" charset="-122"/>
-                <a:cs typeface="Amiri" pitchFamily="34" charset="-120"/>
+                <a:latin typeface="Amiri" pitchFamily="2" charset="-78"/>
+                <a:cs typeface="Amiri" pitchFamily="2" charset="-78"/>
               </a:rPr>
               <a:t>العَرَبِيَّةُ الآنَ لَكَ</a:t>
             </a:r>
@@ -21299,8 +20907,7 @@
                   <a:srgbClr val="1B3B6F"/>
                 </a:solidFill>
                 <a:latin typeface="Calibri" pitchFamily="34" charset="0"/>
-                <a:ea typeface="Calibri" pitchFamily="34" charset="-122"/>
-                <a:cs typeface="Calibri" pitchFamily="34" charset="-120"/>
+                <a:cs typeface="Amiri" pitchFamily="2" charset="-78"/>
               </a:rPr>
               <a:t> mean?</a:t>
             </a:r>
@@ -21390,8 +20997,7 @@
                   <a:srgbClr val="FFFFFF"/>
                 </a:solidFill>
                 <a:latin typeface="Calibri" pitchFamily="34" charset="0"/>
-                <a:ea typeface="Calibri" pitchFamily="34" charset="-122"/>
-                <a:cs typeface="Calibri" pitchFamily="34" charset="-120"/>
+                <a:cs typeface="Amiri" pitchFamily="2" charset="-78"/>
               </a:rPr>
               <a:t>A</a:t>
             </a:r>
@@ -21429,8 +21035,7 @@
                   <a:srgbClr val="1F2A37"/>
                 </a:solidFill>
                 <a:latin typeface="Calibri" pitchFamily="34" charset="0"/>
-                <a:ea typeface="Calibri" pitchFamily="34" charset="-122"/>
-                <a:cs typeface="Calibri" pitchFamily="34" charset="-120"/>
+                <a:cs typeface="Amiri" pitchFamily="2" charset="-78"/>
               </a:rPr>
               <a:t>Arabic is now yours.</a:t>
             </a:r>
@@ -21493,8 +21098,7 @@
                   <a:srgbClr val="1B3B6F"/>
                 </a:solidFill>
                 <a:latin typeface="Calibri" pitchFamily="34" charset="0"/>
-                <a:ea typeface="Calibri" pitchFamily="34" charset="-122"/>
-                <a:cs typeface="Calibri" pitchFamily="34" charset="-120"/>
+                <a:cs typeface="Amiri" pitchFamily="2" charset="-78"/>
               </a:rPr>
               <a:t>B</a:t>
             </a:r>
@@ -21532,8 +21136,7 @@
                   <a:srgbClr val="9AA1AB"/>
                 </a:solidFill>
                 <a:latin typeface="Calibri" pitchFamily="34" charset="0"/>
-                <a:ea typeface="Calibri" pitchFamily="34" charset="-122"/>
-                <a:cs typeface="Calibri" pitchFamily="34" charset="-120"/>
+                <a:cs typeface="Amiri" pitchFamily="2" charset="-78"/>
               </a:rPr>
               <a:t>Arabic is now difficult.</a:t>
             </a:r>
@@ -21596,8 +21199,7 @@
                   <a:srgbClr val="1B3B6F"/>
                 </a:solidFill>
                 <a:latin typeface="Calibri" pitchFamily="34" charset="0"/>
-                <a:ea typeface="Calibri" pitchFamily="34" charset="-122"/>
-                <a:cs typeface="Calibri" pitchFamily="34" charset="-120"/>
+                <a:cs typeface="Amiri" pitchFamily="2" charset="-78"/>
               </a:rPr>
               <a:t>C</a:t>
             </a:r>
@@ -21635,8 +21237,7 @@
                   <a:srgbClr val="9AA1AB"/>
                 </a:solidFill>
                 <a:latin typeface="Calibri" pitchFamily="34" charset="0"/>
-                <a:ea typeface="Calibri" pitchFamily="34" charset="-122"/>
-                <a:cs typeface="Calibri" pitchFamily="34" charset="-120"/>
+                <a:cs typeface="Amiri" pitchFamily="2" charset="-78"/>
               </a:rPr>
               <a:t>Arabic is for later.</a:t>
             </a:r>
@@ -21674,8 +21275,7 @@
                   <a:srgbClr val="8A6D1E"/>
                 </a:solidFill>
                 <a:latin typeface="Calibri" pitchFamily="34" charset="0"/>
-                <a:ea typeface="Calibri" pitchFamily="34" charset="-122"/>
-                <a:cs typeface="Calibri" pitchFamily="34" charset="-120"/>
+                <a:cs typeface="Amiri" pitchFamily="2" charset="-78"/>
               </a:rPr>
               <a:t>The last line of today’s model letter.</a:t>
             </a:r>
@@ -21747,8 +21347,7 @@
                   <a:srgbClr val="8A6D1E"/>
                 </a:solidFill>
                 <a:latin typeface="Calibri" pitchFamily="34" charset="0"/>
-                <a:ea typeface="Calibri" pitchFamily="34" charset="-122"/>
-                <a:cs typeface="Calibri" pitchFamily="34" charset="-120"/>
+                <a:cs typeface="Amiri" pitchFamily="2" charset="-78"/>
               </a:rPr>
               <a:t>THE KEY IDEA FOR TODAY</a:t>
             </a:r>
@@ -21786,8 +21385,7 @@
                   <a:srgbClr val="1F2A37"/>
                 </a:solidFill>
                 <a:latin typeface="Calibri" pitchFamily="34" charset="0"/>
-                <a:ea typeface="Calibri" pitchFamily="34" charset="-122"/>
-                <a:cs typeface="Calibri" pitchFamily="34" charset="-120"/>
+                <a:cs typeface="Amiri" pitchFamily="2" charset="-78"/>
               </a:rPr>
               <a:t>You are an Arabic speaker — and that does not expire.</a:t>
             </a:r>
@@ -21824,9 +21422,8 @@
                 <a:solidFill>
                   <a:srgbClr val="1B3B6F"/>
                 </a:solidFill>
-                <a:latin typeface="Amiri" pitchFamily="34" charset="0"/>
-                <a:ea typeface="Amiri" pitchFamily="34" charset="-122"/>
-                <a:cs typeface="Amiri" pitchFamily="34" charset="-120"/>
+                <a:latin typeface="Amiri" pitchFamily="2" charset="-78"/>
+                <a:cs typeface="Amiri" pitchFamily="2" charset="-78"/>
               </a:rPr>
               <a:t>العَرَبِيَّةُ الآنَ لَكَ.</a:t>
             </a:r>
@@ -21864,8 +21461,7 @@
                   <a:srgbClr val="8A93A0"/>
                 </a:solidFill>
                 <a:latin typeface="Calibri" pitchFamily="34" charset="0"/>
-                <a:ea typeface="Calibri" pitchFamily="34" charset="-122"/>
-                <a:cs typeface="Calibri" pitchFamily="34" charset="-120"/>
+                <a:cs typeface="Amiri" pitchFamily="2" charset="-78"/>
               </a:rPr>
               <a:t>5 / 17</a:t>
             </a:r>
@@ -21959,9 +21555,8 @@
                 <a:solidFill>
                   <a:srgbClr val="D4AF37"/>
                 </a:solidFill>
-                <a:latin typeface="Amiri" pitchFamily="34" charset="0"/>
-                <a:ea typeface="Amiri" pitchFamily="34" charset="-122"/>
-                <a:cs typeface="Amiri" pitchFamily="34" charset="-120"/>
+                <a:latin typeface="Amiri" pitchFamily="2" charset="-78"/>
+                <a:cs typeface="Amiri" pitchFamily="2" charset="-78"/>
               </a:rPr>
               <a:t>م</a:t>
             </a:r>
@@ -21999,8 +21594,7 @@
                   <a:srgbClr val="1B3B6F"/>
                 </a:solidFill>
                 <a:latin typeface="Cambria" pitchFamily="34" charset="0"/>
-                <a:ea typeface="Cambria" pitchFamily="34" charset="-122"/>
-                <a:cs typeface="Cambria" pitchFamily="34" charset="-120"/>
+                <a:cs typeface="Amiri" pitchFamily="2" charset="-78"/>
               </a:rPr>
               <a:t>Al Madina Online School</a:t>
             </a:r>
@@ -22038,8 +21632,7 @@
                   <a:srgbClr val="8A6D1E"/>
                 </a:solidFill>
                 <a:latin typeface="Calibri" pitchFamily="34" charset="0"/>
-                <a:ea typeface="Calibri" pitchFamily="34" charset="-122"/>
-                <a:cs typeface="Calibri" pitchFamily="34" charset="-120"/>
+                <a:cs typeface="Amiri" pitchFamily="2" charset="-78"/>
               </a:rPr>
               <a:t>ARABIC DEPARTMENT · MIFTAH ARABIC · IGCSE 0544</a:t>
             </a:r>
@@ -22104,8 +21697,7 @@
                   <a:srgbClr val="FFFFFF"/>
                 </a:solidFill>
                 <a:latin typeface="Calibri" pitchFamily="34" charset="0"/>
-                <a:ea typeface="Calibri" pitchFamily="34" charset="-122"/>
-                <a:cs typeface="Calibri" pitchFamily="34" charset="-120"/>
+                <a:cs typeface="Amiri" pitchFamily="2" charset="-78"/>
               </a:rPr>
               <a:t>P6-L12 · IGCSE Bridge</a:t>
             </a:r>
@@ -22170,8 +21762,7 @@
                   <a:srgbClr val="FFFFFF"/>
                 </a:solidFill>
                 <a:latin typeface="Calibri" pitchFamily="34" charset="0"/>
-                <a:ea typeface="Calibri" pitchFamily="34" charset="-122"/>
-                <a:cs typeface="Calibri" pitchFamily="34" charset="-120"/>
+                <a:cs typeface="Amiri" pitchFamily="2" charset="-78"/>
               </a:rPr>
               <a:t>WELCOME · 1 MIN</a:t>
             </a:r>
@@ -22209,8 +21800,7 @@
                   <a:srgbClr val="5A6472"/>
                 </a:solidFill>
                 <a:latin typeface="Calibri" pitchFamily="34" charset="0"/>
-                <a:ea typeface="Calibri" pitchFamily="34" charset="-122"/>
-                <a:cs typeface="Calibri" pitchFamily="34" charset="-120"/>
+                <a:cs typeface="Amiri" pitchFamily="2" charset="-78"/>
               </a:rPr>
               <a:t>LESSON OBJECTIVES</a:t>
             </a:r>
@@ -22248,8 +21838,7 @@
                   <a:srgbClr val="1B3B6F"/>
                 </a:solidFill>
                 <a:latin typeface="Cambria" pitchFamily="34" charset="0"/>
-                <a:ea typeface="Cambria" pitchFamily="34" charset="-122"/>
-                <a:cs typeface="Cambria" pitchFamily="34" charset="-120"/>
+                <a:cs typeface="Amiri" pitchFamily="2" charset="-78"/>
               </a:rPr>
               <a:t>Objectives and success criteria</a:t>
             </a:r>
@@ -22286,9 +21875,8 @@
                 <a:solidFill>
                   <a:srgbClr val="8A6D1E"/>
                 </a:solidFill>
-                <a:latin typeface="Amiri" pitchFamily="34" charset="0"/>
-                <a:ea typeface="Amiri" pitchFamily="34" charset="-122"/>
-                <a:cs typeface="Amiri" pitchFamily="34" charset="-120"/>
+                <a:latin typeface="Amiri" pitchFamily="2" charset="-78"/>
+                <a:cs typeface="Amiri" pitchFamily="2" charset="-78"/>
               </a:rPr>
               <a:t>الأَهْدَافُ وَمَعَايِيرُ النَّجَاحِ</a:t>
             </a:r>
@@ -22326,8 +21914,7 @@
                   <a:srgbClr val="8A93A0"/>
                 </a:solidFill>
                 <a:latin typeface="Calibri" pitchFamily="34" charset="0"/>
-                <a:ea typeface="Calibri" pitchFamily="34" charset="-122"/>
-                <a:cs typeface="Calibri" pitchFamily="34" charset="-120"/>
+                <a:cs typeface="Amiri" pitchFamily="2" charset="-78"/>
               </a:rPr>
               <a:t>Miftah Arabic · Progression P6 · IGCSE Bridge · P6-L12</a:t>
             </a:r>
@@ -22399,8 +21986,7 @@
                   <a:srgbClr val="1B3B6F"/>
                 </a:solidFill>
                 <a:latin typeface="Calibri" pitchFamily="34" charset="0"/>
-                <a:ea typeface="Calibri" pitchFamily="34" charset="-122"/>
-                <a:cs typeface="Calibri" pitchFamily="34" charset="-120"/>
+                <a:cs typeface="Amiri" pitchFamily="2" charset="-78"/>
               </a:rPr>
               <a:t>TODAY YOU WILL</a:t>
             </a:r>
@@ -22437,9 +22023,8 @@
                 <a:solidFill>
                   <a:srgbClr val="8A6D1E"/>
                 </a:solidFill>
-                <a:latin typeface="Amiri" pitchFamily="34" charset="0"/>
-                <a:ea typeface="Amiri" pitchFamily="34" charset="-122"/>
-                <a:cs typeface="Amiri" pitchFamily="34" charset="-120"/>
+                <a:latin typeface="Amiri" pitchFamily="2" charset="-78"/>
+                <a:cs typeface="Amiri" pitchFamily="2" charset="-78"/>
               </a:rPr>
               <a:t>سَتَتَعَلَّمُ اليَوْمَ</a:t>
             </a:r>
@@ -22502,8 +22087,7 @@
                   <a:srgbClr val="D4AF37"/>
                 </a:solidFill>
                 <a:latin typeface="Calibri" pitchFamily="34" charset="0"/>
-                <a:ea typeface="Calibri" pitchFamily="34" charset="-122"/>
-                <a:cs typeface="Calibri" pitchFamily="34" charset="-120"/>
+                <a:cs typeface="Amiri" pitchFamily="2" charset="-78"/>
               </a:rPr>
               <a:t>1</a:t>
             </a:r>
@@ -22541,8 +22125,7 @@
                   <a:srgbClr val="1F2A37"/>
                 </a:solidFill>
                 <a:latin typeface="Calibri" pitchFamily="34" charset="0"/>
-                <a:ea typeface="Calibri" pitchFamily="34" charset="-122"/>
-                <a:cs typeface="Calibri" pitchFamily="34" charset="-120"/>
+                <a:cs typeface="Amiri" pitchFamily="2" charset="-78"/>
               </a:rPr>
               <a:t>Celebrate completing the full three-year IGCSE Arabic 0544 preparation programme.</a:t>
             </a:r>
@@ -22605,8 +22188,7 @@
                   <a:srgbClr val="D4AF37"/>
                 </a:solidFill>
                 <a:latin typeface="Calibri" pitchFamily="34" charset="0"/>
-                <a:ea typeface="Calibri" pitchFamily="34" charset="-122"/>
-                <a:cs typeface="Calibri" pitchFamily="34" charset="-120"/>
+                <a:cs typeface="Amiri" pitchFamily="2" charset="-78"/>
               </a:rPr>
               <a:t>2</a:t>
             </a:r>
@@ -22644,8 +22226,7 @@
                   <a:srgbClr val="1F2A37"/>
                 </a:solidFill>
                 <a:latin typeface="Calibri" pitchFamily="34" charset="0"/>
-                <a:ea typeface="Calibri" pitchFamily="34" charset="-122"/>
-                <a:cs typeface="Calibri" pitchFamily="34" charset="-120"/>
+                <a:cs typeface="Amiri" pitchFamily="2" charset="-78"/>
               </a:rPr>
               <a:t>Reflect on your linguistic journey from F1 to P6.</a:t>
             </a:r>
@@ -22708,8 +22289,7 @@
                   <a:srgbClr val="D4AF37"/>
                 </a:solidFill>
                 <a:latin typeface="Calibri" pitchFamily="34" charset="0"/>
-                <a:ea typeface="Calibri" pitchFamily="34" charset="-122"/>
-                <a:cs typeface="Calibri" pitchFamily="34" charset="-120"/>
+                <a:cs typeface="Amiri" pitchFamily="2" charset="-78"/>
               </a:rPr>
               <a:t>3</a:t>
             </a:r>
@@ -22747,8 +22327,7 @@
                   <a:srgbClr val="1F2A37"/>
                 </a:solidFill>
                 <a:latin typeface="Calibri" pitchFamily="34" charset="0"/>
-                <a:ea typeface="Calibri" pitchFamily="34" charset="-122"/>
-                <a:cs typeface="Calibri" pitchFamily="34" charset="-120"/>
+                <a:cs typeface="Amiri" pitchFamily="2" charset="-78"/>
               </a:rPr>
               <a:t>Produce free, authentic Arabic communication.</a:t>
             </a:r>
@@ -22811,8 +22390,7 @@
                   <a:srgbClr val="D4AF37"/>
                 </a:solidFill>
                 <a:latin typeface="Calibri" pitchFamily="34" charset="0"/>
-                <a:ea typeface="Calibri" pitchFamily="34" charset="-122"/>
-                <a:cs typeface="Calibri" pitchFamily="34" charset="-120"/>
+                <a:cs typeface="Amiri" pitchFamily="2" charset="-78"/>
               </a:rPr>
               <a:t>4</a:t>
             </a:r>
@@ -22850,8 +22428,7 @@
                   <a:srgbClr val="1F2A37"/>
                 </a:solidFill>
                 <a:latin typeface="Calibri" pitchFamily="34" charset="0"/>
-                <a:ea typeface="Calibri" pitchFamily="34" charset="-122"/>
-                <a:cs typeface="Calibri" pitchFamily="34" charset="-120"/>
+                <a:cs typeface="Amiri" pitchFamily="2" charset="-78"/>
               </a:rPr>
               <a:t>Look ahead to the exam and to Arabic beyond it.</a:t>
             </a:r>
@@ -22943,8 +22520,7 @@
                   <a:srgbClr val="FFFFFF"/>
                 </a:solidFill>
                 <a:latin typeface="Calibri" pitchFamily="34" charset="0"/>
-                <a:ea typeface="Calibri" pitchFamily="34" charset="-122"/>
-                <a:cs typeface="Calibri" pitchFamily="34" charset="-120"/>
+                <a:cs typeface="Amiri" pitchFamily="2" charset="-78"/>
               </a:rPr>
               <a:t>CORE</a:t>
             </a:r>
@@ -22982,8 +22558,7 @@
                   <a:srgbClr val="2E8B57"/>
                 </a:solidFill>
                 <a:latin typeface="Calibri" pitchFamily="34" charset="0"/>
-                <a:ea typeface="Calibri" pitchFamily="34" charset="-122"/>
-                <a:cs typeface="Calibri" pitchFamily="34" charset="-120"/>
+                <a:cs typeface="Amiri" pitchFamily="2" charset="-78"/>
               </a:rPr>
               <a:t>Everyone</a:t>
             </a:r>
@@ -23021,8 +22596,7 @@
                   <a:srgbClr val="2E8B57"/>
                 </a:solidFill>
                 <a:latin typeface="Calibri" pitchFamily="34" charset="0"/>
-                <a:ea typeface="Calibri" pitchFamily="34" charset="-122"/>
-                <a:cs typeface="Calibri" pitchFamily="34" charset="-120"/>
+                <a:cs typeface="Amiri" pitchFamily="2" charset="-78"/>
               </a:rPr>
               <a:t>☐  I can name how far I have come in Arabic.</a:t>
             </a:r>
@@ -23060,8 +22634,7 @@
                   <a:srgbClr val="2E8B57"/>
                 </a:solidFill>
                 <a:latin typeface="Calibri" pitchFamily="34" charset="0"/>
-                <a:ea typeface="Calibri" pitchFamily="34" charset="-122"/>
-                <a:cs typeface="Calibri" pitchFamily="34" charset="-120"/>
+                <a:cs typeface="Amiri" pitchFamily="2" charset="-78"/>
               </a:rPr>
               <a:t>☐  I can write my proudest Arabic sentence.</a:t>
             </a:r>
@@ -23153,8 +22726,7 @@
                   <a:srgbClr val="FFFFFF"/>
                 </a:solidFill>
                 <a:latin typeface="Calibri" pitchFamily="34" charset="0"/>
-                <a:ea typeface="Calibri" pitchFamily="34" charset="-122"/>
-                <a:cs typeface="Calibri" pitchFamily="34" charset="-120"/>
+                <a:cs typeface="Amiri" pitchFamily="2" charset="-78"/>
               </a:rPr>
               <a:t>DEVELOP</a:t>
             </a:r>
@@ -23192,8 +22764,7 @@
                   <a:srgbClr val="C9780A"/>
                 </a:solidFill>
                 <a:latin typeface="Calibri" pitchFamily="34" charset="0"/>
-                <a:ea typeface="Calibri" pitchFamily="34" charset="-122"/>
-                <a:cs typeface="Calibri" pitchFamily="34" charset="-120"/>
+                <a:cs typeface="Amiri" pitchFamily="2" charset="-78"/>
               </a:rPr>
               <a:t>Most of us</a:t>
             </a:r>
@@ -23231,8 +22802,7 @@
                   <a:srgbClr val="C9780A"/>
                 </a:solidFill>
                 <a:latin typeface="Calibri" pitchFamily="34" charset="0"/>
-                <a:ea typeface="Calibri" pitchFamily="34" charset="-122"/>
-                <a:cs typeface="Calibri" pitchFamily="34" charset="-120"/>
+                <a:cs typeface="Amiri" pitchFamily="2" charset="-78"/>
               </a:rPr>
               <a:t>☐  I can write or speak freely for one of the three options.</a:t>
             </a:r>
@@ -23270,8 +22840,7 @@
                   <a:srgbClr val="C9780A"/>
                 </a:solidFill>
                 <a:latin typeface="Calibri" pitchFamily="34" charset="0"/>
-                <a:ea typeface="Calibri" pitchFamily="34" charset="-122"/>
-                <a:cs typeface="Calibri" pitchFamily="34" charset="-120"/>
+                <a:cs typeface="Amiri" pitchFamily="2" charset="-78"/>
               </a:rPr>
               <a:t>☐  I can name the structures in my sentence.</a:t>
             </a:r>
@@ -23363,8 +22932,7 @@
                   <a:srgbClr val="FFFFFF"/>
                 </a:solidFill>
                 <a:latin typeface="Calibri" pitchFamily="34" charset="0"/>
-                <a:ea typeface="Calibri" pitchFamily="34" charset="-122"/>
-                <a:cs typeface="Calibri" pitchFamily="34" charset="-120"/>
+                <a:cs typeface="Amiri" pitchFamily="2" charset="-78"/>
               </a:rPr>
               <a:t>STRETCH</a:t>
             </a:r>
@@ -23402,8 +22970,7 @@
                   <a:srgbClr val="B83227"/>
                 </a:solidFill>
                 <a:latin typeface="Calibri" pitchFamily="34" charset="0"/>
-                <a:ea typeface="Calibri" pitchFamily="34" charset="-122"/>
-                <a:cs typeface="Calibri" pitchFamily="34" charset="-120"/>
+                <a:cs typeface="Amiri" pitchFamily="2" charset="-78"/>
               </a:rPr>
               <a:t>Aim high</a:t>
             </a:r>
@@ -23441,8 +23008,7 @@
                   <a:srgbClr val="B83227"/>
                 </a:solidFill>
                 <a:latin typeface="Calibri" pitchFamily="34" charset="0"/>
-                <a:ea typeface="Calibri" pitchFamily="34" charset="-122"/>
-                <a:cs typeface="Calibri" pitchFamily="34" charset="-120"/>
+                <a:cs typeface="Amiri" pitchFamily="2" charset="-78"/>
               </a:rPr>
               <a:t>☐  I can hold a five-minute conversation in Arabic, without a script.</a:t>
             </a:r>
@@ -23480,8 +23046,7 @@
                   <a:srgbClr val="B83227"/>
                 </a:solidFill>
                 <a:latin typeface="Calibri" pitchFamily="34" charset="0"/>
-                <a:ea typeface="Calibri" pitchFamily="34" charset="-122"/>
-                <a:cs typeface="Calibri" pitchFamily="34" charset="-120"/>
+                <a:cs typeface="Amiri" pitchFamily="2" charset="-78"/>
               </a:rPr>
               <a:t>☐  I can name the doors Arabic opens next.</a:t>
             </a:r>
@@ -23519,8 +23084,7 @@
                   <a:srgbClr val="8A93A0"/>
                 </a:solidFill>
                 <a:latin typeface="Calibri" pitchFamily="34" charset="0"/>
-                <a:ea typeface="Calibri" pitchFamily="34" charset="-122"/>
-                <a:cs typeface="Calibri" pitchFamily="34" charset="-120"/>
+                <a:cs typeface="Amiri" pitchFamily="2" charset="-78"/>
               </a:rPr>
               <a:t>6 / 17</a:t>
             </a:r>
@@ -23614,9 +23178,8 @@
                 <a:solidFill>
                   <a:srgbClr val="D4AF37"/>
                 </a:solidFill>
-                <a:latin typeface="Amiri" pitchFamily="34" charset="0"/>
-                <a:ea typeface="Amiri" pitchFamily="34" charset="-122"/>
-                <a:cs typeface="Amiri" pitchFamily="34" charset="-120"/>
+                <a:latin typeface="Amiri" pitchFamily="2" charset="-78"/>
+                <a:cs typeface="Amiri" pitchFamily="2" charset="-78"/>
               </a:rPr>
               <a:t>م</a:t>
             </a:r>
@@ -23654,8 +23217,7 @@
                   <a:srgbClr val="1B3B6F"/>
                 </a:solidFill>
                 <a:latin typeface="Cambria" pitchFamily="34" charset="0"/>
-                <a:ea typeface="Cambria" pitchFamily="34" charset="-122"/>
-                <a:cs typeface="Cambria" pitchFamily="34" charset="-120"/>
+                <a:cs typeface="Amiri" pitchFamily="2" charset="-78"/>
               </a:rPr>
               <a:t>Al Madina Online School</a:t>
             </a:r>
@@ -23693,8 +23255,7 @@
                   <a:srgbClr val="8A6D1E"/>
                 </a:solidFill>
                 <a:latin typeface="Calibri" pitchFamily="34" charset="0"/>
-                <a:ea typeface="Calibri" pitchFamily="34" charset="-122"/>
-                <a:cs typeface="Calibri" pitchFamily="34" charset="-120"/>
+                <a:cs typeface="Amiri" pitchFamily="2" charset="-78"/>
               </a:rPr>
               <a:t>ARABIC DEPARTMENT · MIFTAH ARABIC · IGCSE 0544</a:t>
             </a:r>
@@ -23759,8 +23320,7 @@
                   <a:srgbClr val="FFFFFF"/>
                 </a:solidFill>
                 <a:latin typeface="Calibri" pitchFamily="34" charset="0"/>
-                <a:ea typeface="Calibri" pitchFamily="34" charset="-122"/>
-                <a:cs typeface="Calibri" pitchFamily="34" charset="-120"/>
+                <a:cs typeface="Amiri" pitchFamily="2" charset="-78"/>
               </a:rPr>
               <a:t>P6-L12 · IGCSE Bridge</a:t>
             </a:r>
@@ -23825,8 +23385,7 @@
                   <a:srgbClr val="FFFFFF"/>
                 </a:solidFill>
                 <a:latin typeface="Calibri" pitchFamily="34" charset="0"/>
-                <a:ea typeface="Calibri" pitchFamily="34" charset="-122"/>
-                <a:cs typeface="Calibri" pitchFamily="34" charset="-120"/>
+                <a:cs typeface="Amiri" pitchFamily="2" charset="-78"/>
               </a:rPr>
               <a:t>TEACHER INSTRUCTION · 3 MIN</a:t>
             </a:r>
@@ -23864,8 +23423,7 @@
                   <a:srgbClr val="1B3B6F"/>
                 </a:solidFill>
                 <a:latin typeface="Calibri" pitchFamily="34" charset="0"/>
-                <a:ea typeface="Calibri" pitchFamily="34" charset="-122"/>
-                <a:cs typeface="Calibri" pitchFamily="34" charset="-120"/>
+                <a:cs typeface="Amiri" pitchFamily="2" charset="-78"/>
               </a:rPr>
               <a:t>TEACH · THEN · NOW · DISTANCE (WEBSITE)</a:t>
             </a:r>
@@ -23903,8 +23461,7 @@
                   <a:srgbClr val="1B3B6F"/>
                 </a:solidFill>
                 <a:latin typeface="Cambria" pitchFamily="34" charset="0"/>
-                <a:ea typeface="Cambria" pitchFamily="34" charset="-122"/>
-                <a:cs typeface="Cambria" pitchFamily="34" charset="-120"/>
+                <a:cs typeface="Amiri" pitchFamily="2" charset="-78"/>
               </a:rPr>
               <a:t>From F1 to P6 — the distance</a:t>
             </a:r>
@@ -23941,9 +23498,8 @@
                 <a:solidFill>
                   <a:srgbClr val="8A6D1E"/>
                 </a:solidFill>
-                <a:latin typeface="Amiri" pitchFamily="34" charset="0"/>
-                <a:ea typeface="Amiri" pitchFamily="34" charset="-122"/>
-                <a:cs typeface="Amiri" pitchFamily="34" charset="-120"/>
+                <a:latin typeface="Amiri" pitchFamily="2" charset="-78"/>
+                <a:cs typeface="Amiri" pitchFamily="2" charset="-78"/>
               </a:rPr>
               <a:t>المَسَافَةُ</a:t>
             </a:r>
@@ -23981,8 +23537,7 @@
                   <a:srgbClr val="8A93A0"/>
                 </a:solidFill>
                 <a:latin typeface="Calibri" pitchFamily="34" charset="0"/>
-                <a:ea typeface="Calibri" pitchFamily="34" charset="-122"/>
-                <a:cs typeface="Calibri" pitchFamily="34" charset="-120"/>
+                <a:cs typeface="Amiri" pitchFamily="2" charset="-78"/>
               </a:rPr>
               <a:t>Miftah Arabic · Progression P6 · IGCSE Bridge · P6-L12</a:t>
             </a:r>
@@ -24054,8 +23609,7 @@
                   <a:srgbClr val="1B3B6F"/>
                 </a:solidFill>
                 <a:latin typeface="Calibri" pitchFamily="34" charset="0"/>
-                <a:ea typeface="Calibri" pitchFamily="34" charset="-122"/>
-                <a:cs typeface="Calibri" pitchFamily="34" charset="-120"/>
+                <a:cs typeface="Amiri" pitchFamily="2" charset="-78"/>
               </a:rPr>
               <a:t>WHAT YOU NEED TO KNOW</a:t>
             </a:r>
@@ -24118,8 +23672,7 @@
                   <a:srgbClr val="D4AF37"/>
                 </a:solidFill>
                 <a:latin typeface="Calibri" pitchFamily="34" charset="0"/>
-                <a:ea typeface="Calibri" pitchFamily="34" charset="-122"/>
-                <a:cs typeface="Calibri" pitchFamily="34" charset="-120"/>
+                <a:cs typeface="Amiri" pitchFamily="2" charset="-78"/>
               </a:rPr>
               <a:t>1</a:t>
             </a:r>
@@ -24157,8 +23710,7 @@
                   <a:srgbClr val="1F2A37"/>
                 </a:solidFill>
                 <a:latin typeface="Calibri" pitchFamily="34" charset="0"/>
-                <a:ea typeface="Calibri" pitchFamily="34" charset="-122"/>
-                <a:cs typeface="Calibri" pitchFamily="34" charset="-120"/>
+                <a:cs typeface="Amiri" pitchFamily="2" charset="-78"/>
               </a:rPr>
               <a:t>In F1 you learned to write the letter </a:t>
             </a:r>
@@ -24170,9 +23722,8 @@
                 <a:solidFill>
                   <a:srgbClr val="1F2A37"/>
                 </a:solidFill>
-                <a:latin typeface="Amiri" pitchFamily="34" charset="0"/>
-                <a:ea typeface="Amiri" pitchFamily="34" charset="-122"/>
-                <a:cs typeface="Amiri" pitchFamily="34" charset="-120"/>
+                <a:latin typeface="Amiri" pitchFamily="2" charset="-78"/>
+                <a:cs typeface="Amiri" pitchFamily="2" charset="-78"/>
               </a:rPr>
               <a:t>ب</a:t>
             </a:r>
@@ -24185,8 +23736,7 @@
                   <a:srgbClr val="1F2A37"/>
                 </a:solidFill>
                 <a:latin typeface="Calibri" pitchFamily="34" charset="0"/>
-                <a:ea typeface="Calibri" pitchFamily="34" charset="-122"/>
-                <a:cs typeface="Calibri" pitchFamily="34" charset="-120"/>
+                <a:cs typeface="Amiri" pitchFamily="2" charset="-78"/>
               </a:rPr>
               <a:t>. Today you can construct a formal Arabic argument in 150 words with conditionals, reported speech, the past perfect, three subjunctive triggers and a concession-refutation architecture.</a:t>
             </a:r>
@@ -24249,8 +23799,7 @@
                   <a:srgbClr val="D4AF37"/>
                 </a:solidFill>
                 <a:latin typeface="Calibri" pitchFamily="34" charset="0"/>
-                <a:ea typeface="Calibri" pitchFamily="34" charset="-122"/>
-                <a:cs typeface="Calibri" pitchFamily="34" charset="-120"/>
+                <a:cs typeface="Amiri" pitchFamily="2" charset="-78"/>
               </a:rPr>
               <a:t>2</a:t>
             </a:r>
@@ -24288,8 +23837,7 @@
                   <a:srgbClr val="1F2A37"/>
                 </a:solidFill>
                 <a:latin typeface="Calibri" pitchFamily="34" charset="0"/>
-                <a:ea typeface="Calibri" pitchFamily="34" charset="-122"/>
-                <a:cs typeface="Calibri" pitchFamily="34" charset="-120"/>
+                <a:cs typeface="Amiri" pitchFamily="2" charset="-78"/>
               </a:rPr>
               <a:t>Whatever grade the exam returns, you are not the person who walked into the F1 classroom. You are an Arabic speaker — and that does not expire.</a:t>
             </a:r>
@@ -24361,8 +23909,7 @@
                   <a:srgbClr val="8A6D1E"/>
                 </a:solidFill>
                 <a:latin typeface="Calibri" pitchFamily="34" charset="0"/>
-                <a:ea typeface="Calibri" pitchFamily="34" charset="-122"/>
-                <a:cs typeface="Calibri" pitchFamily="34" charset="-120"/>
+                <a:cs typeface="Amiri" pitchFamily="2" charset="-78"/>
               </a:rPr>
               <a:t>THEN → NOW</a:t>
             </a:r>
@@ -24399,9 +23946,8 @@
                 <a:solidFill>
                   <a:srgbClr val="1B3B6F"/>
                 </a:solidFill>
-                <a:latin typeface="Amiri" pitchFamily="34" charset="0"/>
-                <a:ea typeface="Amiri" pitchFamily="34" charset="-122"/>
-                <a:cs typeface="Amiri" pitchFamily="34" charset="-120"/>
+                <a:latin typeface="Amiri" pitchFamily="2" charset="-78"/>
+                <a:cs typeface="Amiri" pitchFamily="2" charset="-78"/>
               </a:rPr>
               <a:t>بَ</a:t>
             </a:r>
@@ -24439,8 +23985,7 @@
                   <a:srgbClr val="5A6472"/>
                 </a:solidFill>
                 <a:latin typeface="Calibri" pitchFamily="34" charset="0"/>
-                <a:ea typeface="Calibri" pitchFamily="34" charset="-122"/>
-                <a:cs typeface="Calibri" pitchFamily="34" charset="-120"/>
+                <a:cs typeface="Amiri" pitchFamily="2" charset="-78"/>
               </a:rPr>
               <a:t>F1 — the first letter you wrote</a:t>
             </a:r>
@@ -24503,9 +24048,8 @@
                 <a:solidFill>
                   <a:srgbClr val="1B3B6F"/>
                 </a:solidFill>
-                <a:latin typeface="Amiri" pitchFamily="34" charset="0"/>
-                <a:ea typeface="Amiri" pitchFamily="34" charset="-122"/>
-                <a:cs typeface="Amiri" pitchFamily="34" charset="-120"/>
+                <a:latin typeface="Amiri" pitchFamily="2" charset="-78"/>
+                <a:cs typeface="Amiri" pitchFamily="2" charset="-78"/>
               </a:rPr>
               <a:t>صَحِيحٌ أَنَّ الطَّرِيقَ طَوِيلٌ، غَيْرَ أَنَّهُ يَسْتَحِقُّ كُلَّ جُهْدٍ.</a:t>
             </a:r>
@@ -24543,8 +24087,7 @@
                   <a:srgbClr val="5A6472"/>
                 </a:solidFill>
                 <a:latin typeface="Calibri" pitchFamily="34" charset="0"/>
-                <a:ea typeface="Calibri" pitchFamily="34" charset="-122"/>
-                <a:cs typeface="Calibri" pitchFamily="34" charset="-120"/>
+                <a:cs typeface="Amiri" pitchFamily="2" charset="-78"/>
               </a:rPr>
               <a:t>P6 — “It is true that the road is long; however, it is worth every effort.”</a:t>
             </a:r>
@@ -24582,8 +24125,7 @@
                   <a:srgbClr val="8A93A0"/>
                 </a:solidFill>
                 <a:latin typeface="Calibri" pitchFamily="34" charset="0"/>
-                <a:ea typeface="Calibri" pitchFamily="34" charset="-122"/>
-                <a:cs typeface="Calibri" pitchFamily="34" charset="-120"/>
+                <a:cs typeface="Amiri" pitchFamily="2" charset="-78"/>
               </a:rPr>
               <a:t>7 / 17</a:t>
             </a:r>
@@ -24677,9 +24219,8 @@
                 <a:solidFill>
                   <a:srgbClr val="D4AF37"/>
                 </a:solidFill>
-                <a:latin typeface="Amiri" pitchFamily="34" charset="0"/>
-                <a:ea typeface="Amiri" pitchFamily="34" charset="-122"/>
-                <a:cs typeface="Amiri" pitchFamily="34" charset="-120"/>
+                <a:latin typeface="Amiri" pitchFamily="2" charset="-78"/>
+                <a:cs typeface="Amiri" pitchFamily="2" charset="-78"/>
               </a:rPr>
               <a:t>م</a:t>
             </a:r>
@@ -24717,8 +24258,7 @@
                   <a:srgbClr val="1B3B6F"/>
                 </a:solidFill>
                 <a:latin typeface="Cambria" pitchFamily="34" charset="0"/>
-                <a:ea typeface="Cambria" pitchFamily="34" charset="-122"/>
-                <a:cs typeface="Cambria" pitchFamily="34" charset="-120"/>
+                <a:cs typeface="Amiri" pitchFamily="2" charset="-78"/>
               </a:rPr>
               <a:t>Al Madina Online School</a:t>
             </a:r>
@@ -24756,8 +24296,7 @@
                   <a:srgbClr val="8A6D1E"/>
                 </a:solidFill>
                 <a:latin typeface="Calibri" pitchFamily="34" charset="0"/>
-                <a:ea typeface="Calibri" pitchFamily="34" charset="-122"/>
-                <a:cs typeface="Calibri" pitchFamily="34" charset="-120"/>
+                <a:cs typeface="Amiri" pitchFamily="2" charset="-78"/>
               </a:rPr>
               <a:t>ARABIC DEPARTMENT · MIFTAH ARABIC · IGCSE 0544</a:t>
             </a:r>
@@ -24822,8 +24361,7 @@
                   <a:srgbClr val="FFFFFF"/>
                 </a:solidFill>
                 <a:latin typeface="Calibri" pitchFamily="34" charset="0"/>
-                <a:ea typeface="Calibri" pitchFamily="34" charset="-122"/>
-                <a:cs typeface="Calibri" pitchFamily="34" charset="-120"/>
+                <a:cs typeface="Amiri" pitchFamily="2" charset="-78"/>
               </a:rPr>
               <a:t>P6-L12 · IGCSE Bridge</a:t>
             </a:r>
@@ -24888,8 +24426,7 @@
                   <a:srgbClr val="FFFFFF"/>
                 </a:solidFill>
                 <a:latin typeface="Calibri" pitchFamily="34" charset="0"/>
-                <a:ea typeface="Calibri" pitchFamily="34" charset="-122"/>
-                <a:cs typeface="Calibri" pitchFamily="34" charset="-120"/>
+                <a:cs typeface="Amiri" pitchFamily="2" charset="-78"/>
               </a:rPr>
               <a:t>YOU DO · 6 MIN</a:t>
             </a:r>
@@ -24927,8 +24464,7 @@
                   <a:srgbClr val="1E6B52"/>
                 </a:solidFill>
                 <a:latin typeface="Calibri" pitchFamily="34" charset="0"/>
-                <a:ea typeface="Calibri" pitchFamily="34" charset="-122"/>
-                <a:cs typeface="Calibri" pitchFamily="34" charset="-120"/>
+                <a:cs typeface="Amiri" pitchFamily="2" charset="-78"/>
               </a:rPr>
               <a:t>YOU DO · THEN → NOW (WEBSITE)</a:t>
             </a:r>
@@ -24966,8 +24502,7 @@
                   <a:srgbClr val="1B3B6F"/>
                 </a:solidFill>
                 <a:latin typeface="Cambria" pitchFamily="34" charset="0"/>
-                <a:ea typeface="Cambria" pitchFamily="34" charset="-122"/>
-                <a:cs typeface="Cambria" pitchFamily="34" charset="-120"/>
+                <a:cs typeface="Amiri" pitchFamily="2" charset="-78"/>
               </a:rPr>
               <a:t>Name the journey</a:t>
             </a:r>
@@ -25004,9 +24539,8 @@
                 <a:solidFill>
                   <a:srgbClr val="8A6D1E"/>
                 </a:solidFill>
-                <a:latin typeface="Amiri" pitchFamily="34" charset="0"/>
-                <a:ea typeface="Amiri" pitchFamily="34" charset="-122"/>
-                <a:cs typeface="Amiri" pitchFamily="34" charset="-120"/>
+                <a:latin typeface="Amiri" pitchFamily="2" charset="-78"/>
+                <a:cs typeface="Amiri" pitchFamily="2" charset="-78"/>
               </a:rPr>
               <a:t>سَمِّ الرِّحْلَةَ</a:t>
             </a:r>
@@ -25044,8 +24578,7 @@
                   <a:srgbClr val="8A93A0"/>
                 </a:solidFill>
                 <a:latin typeface="Calibri" pitchFamily="34" charset="0"/>
-                <a:ea typeface="Calibri" pitchFamily="34" charset="-122"/>
-                <a:cs typeface="Calibri" pitchFamily="34" charset="-120"/>
+                <a:cs typeface="Amiri" pitchFamily="2" charset="-78"/>
               </a:rPr>
               <a:t>Miftah Arabic · Progression P6 · IGCSE Bridge · P6-L12</a:t>
             </a:r>
@@ -25108,8 +24641,7 @@
                   <a:srgbClr val="FFFFFF"/>
                 </a:solidFill>
                 <a:latin typeface="Calibri" pitchFamily="34" charset="0"/>
-                <a:ea typeface="Calibri" pitchFamily="34" charset="-122"/>
-                <a:cs typeface="Calibri" pitchFamily="34" charset="-120"/>
+                <a:cs typeface="Amiri" pitchFamily="2" charset="-78"/>
               </a:rPr>
               <a:t>Yours</a:t>
             </a:r>
@@ -25147,8 +24679,7 @@
                   <a:srgbClr val="FFFFFF"/>
                 </a:solidFill>
                 <a:latin typeface="Calibri" pitchFamily="34" charset="0"/>
-                <a:ea typeface="Calibri" pitchFamily="34" charset="-122"/>
-                <a:cs typeface="Calibri" pitchFamily="34" charset="-120"/>
+                <a:cs typeface="Amiri" pitchFamily="2" charset="-78"/>
               </a:rPr>
               <a:t>Example</a:t>
             </a:r>
@@ -25186,8 +24717,7 @@
                   <a:srgbClr val="FFFFFF"/>
                 </a:solidFill>
                 <a:latin typeface="Calibri" pitchFamily="34" charset="0"/>
-                <a:ea typeface="Calibri" pitchFamily="34" charset="-122"/>
-                <a:cs typeface="Calibri" pitchFamily="34" charset="-120"/>
+                <a:cs typeface="Amiri" pitchFamily="2" charset="-78"/>
               </a:rPr>
               <a:t>Name the journey</a:t>
             </a:r>
@@ -25252,8 +24782,7 @@
                   <a:srgbClr val="5A6472"/>
                 </a:solidFill>
                 <a:latin typeface="Calibri" pitchFamily="34" charset="0"/>
-                <a:ea typeface="Calibri" pitchFamily="34" charset="-122"/>
-                <a:cs typeface="Calibri" pitchFamily="34" charset="-120"/>
+                <a:cs typeface="Amiri" pitchFamily="2" charset="-78"/>
               </a:rPr>
               <a:t>______________</a:t>
             </a:r>
@@ -25290,9 +24819,8 @@
                 <a:solidFill>
                   <a:srgbClr val="1B3B6F"/>
                 </a:solidFill>
-                <a:latin typeface="Amiri" pitchFamily="34" charset="0"/>
-                <a:ea typeface="Amiri" pitchFamily="34" charset="-122"/>
-                <a:cs typeface="Amiri" pitchFamily="34" charset="-120"/>
+                <a:latin typeface="Amiri" pitchFamily="2" charset="-78"/>
+                <a:cs typeface="Amiri" pitchFamily="2" charset="-78"/>
               </a:rPr>
               <a:t>فِي الصَّفِّ الأَوَّلِ كُنْتُ لَا أَقْرَأُ حَرْفًا، أَمَّا اليَوْمَ فَأَسْتَطِيعُ أَنْ أَكْتُبَ مَقَالًا.</a:t>
             </a:r>
@@ -25330,8 +24858,7 @@
                   <a:srgbClr val="5A6472"/>
                 </a:solidFill>
                 <a:latin typeface="Calibri" pitchFamily="34" charset="0"/>
-                <a:ea typeface="Calibri" pitchFamily="34" charset="-122"/>
-                <a:cs typeface="Calibri" pitchFamily="34" charset="-120"/>
+                <a:cs typeface="Amiri" pitchFamily="2" charset="-78"/>
               </a:rPr>
               <a:t>In F1 I was… but today I can…</a:t>
             </a:r>
@@ -25396,8 +24923,7 @@
                   <a:srgbClr val="FFFFFF"/>
                 </a:solidFill>
                 <a:latin typeface="Calibri" pitchFamily="34" charset="0"/>
-                <a:ea typeface="Calibri" pitchFamily="34" charset="-122"/>
-                <a:cs typeface="Calibri" pitchFamily="34" charset="-120"/>
+                <a:cs typeface="Amiri" pitchFamily="2" charset="-78"/>
               </a:rPr>
               <a:t>CORE</a:t>
             </a:r>
@@ -25462,8 +24988,7 @@
                   <a:srgbClr val="5A6472"/>
                 </a:solidFill>
                 <a:latin typeface="Calibri" pitchFamily="34" charset="0"/>
-                <a:ea typeface="Calibri" pitchFamily="34" charset="-122"/>
-                <a:cs typeface="Calibri" pitchFamily="34" charset="-120"/>
+                <a:cs typeface="Amiri" pitchFamily="2" charset="-78"/>
               </a:rPr>
               <a:t>______________</a:t>
             </a:r>
@@ -25501,8 +25026,7 @@
                   <a:srgbClr val="5A6472"/>
                 </a:solidFill>
                 <a:latin typeface="Calibri" pitchFamily="34" charset="0"/>
-                <a:ea typeface="Calibri" pitchFamily="34" charset="-122"/>
-                <a:cs typeface="Calibri" pitchFamily="34" charset="-120"/>
+                <a:cs typeface="Amiri" pitchFamily="2" charset="-78"/>
               </a:rPr>
               <a:t>the first time I read a whole sentence aloud</a:t>
             </a:r>
@@ -25540,8 +25064,7 @@
                   <a:srgbClr val="5A6472"/>
                 </a:solidFill>
                 <a:latin typeface="Calibri" pitchFamily="34" charset="0"/>
-                <a:ea typeface="Calibri" pitchFamily="34" charset="-122"/>
-                <a:cs typeface="Calibri" pitchFamily="34" charset="-120"/>
+                <a:cs typeface="Amiri" pitchFamily="2" charset="-78"/>
               </a:rPr>
               <a:t>The lesson or moment I remember most</a:t>
             </a:r>
@@ -25606,8 +25129,7 @@
                   <a:srgbClr val="5A6472"/>
                 </a:solidFill>
                 <a:latin typeface="Calibri" pitchFamily="34" charset="0"/>
-                <a:ea typeface="Calibri" pitchFamily="34" charset="-122"/>
-                <a:cs typeface="Calibri" pitchFamily="34" charset="-120"/>
+                <a:cs typeface="Amiri" pitchFamily="2" charset="-78"/>
               </a:rPr>
               <a:t>______________</a:t>
             </a:r>
@@ -25645,8 +25167,7 @@
                   <a:srgbClr val="5A6472"/>
                 </a:solidFill>
                 <a:latin typeface="Calibri" pitchFamily="34" charset="0"/>
-                <a:ea typeface="Calibri" pitchFamily="34" charset="-122"/>
-                <a:cs typeface="Calibri" pitchFamily="34" charset="-120"/>
+                <a:cs typeface="Amiri" pitchFamily="2" charset="-78"/>
               </a:rPr>
               <a:t>the Type 2 conditional (lau … la-)</a:t>
             </a:r>
@@ -25684,8 +25205,7 @@
                   <a:srgbClr val="5A6472"/>
                 </a:solidFill>
                 <a:latin typeface="Calibri" pitchFamily="34" charset="0"/>
-                <a:ea typeface="Calibri" pitchFamily="34" charset="-122"/>
-                <a:cs typeface="Calibri" pitchFamily="34" charset="-120"/>
+                <a:cs typeface="Amiri" pitchFamily="2" charset="-78"/>
               </a:rPr>
               <a:t>The structure I am proudest of now</a:t>
             </a:r>
@@ -25723,8 +25243,7 @@
                   <a:srgbClr val="1B3B6F"/>
                 </a:solidFill>
                 <a:latin typeface="Calibri" pitchFamily="34" charset="0"/>
-                <a:ea typeface="Calibri" pitchFamily="34" charset="-122"/>
-                <a:cs typeface="Calibri" pitchFamily="34" charset="-120"/>
+                <a:cs typeface="Amiri" pitchFamily="2" charset="-78"/>
               </a:rPr>
               <a:t>Row 1 is the website frame — write it in Arabic. Rows 2–3 can be in English.</a:t>
             </a:r>
@@ -25762,8 +25281,7 @@
                   <a:srgbClr val="8A93A0"/>
                 </a:solidFill>
                 <a:latin typeface="Calibri" pitchFamily="34" charset="0"/>
-                <a:ea typeface="Calibri" pitchFamily="34" charset="-122"/>
-                <a:cs typeface="Calibri" pitchFamily="34" charset="-120"/>
+                <a:cs typeface="Amiri" pitchFamily="2" charset="-78"/>
               </a:rPr>
               <a:t>8 / 17</a:t>
             </a:r>
@@ -25857,9 +25375,8 @@
                 <a:solidFill>
                   <a:srgbClr val="D4AF37"/>
                 </a:solidFill>
-                <a:latin typeface="Amiri" pitchFamily="34" charset="0"/>
-                <a:ea typeface="Amiri" pitchFamily="34" charset="-122"/>
-                <a:cs typeface="Amiri" pitchFamily="34" charset="-120"/>
+                <a:latin typeface="Amiri" pitchFamily="2" charset="-78"/>
+                <a:cs typeface="Amiri" pitchFamily="2" charset="-78"/>
               </a:rPr>
               <a:t>م</a:t>
             </a:r>
@@ -25897,8 +25414,7 @@
                   <a:srgbClr val="1B3B6F"/>
                 </a:solidFill>
                 <a:latin typeface="Cambria" pitchFamily="34" charset="0"/>
-                <a:ea typeface="Cambria" pitchFamily="34" charset="-122"/>
-                <a:cs typeface="Cambria" pitchFamily="34" charset="-120"/>
+                <a:cs typeface="Amiri" pitchFamily="2" charset="-78"/>
               </a:rPr>
               <a:t>Al Madina Online School</a:t>
             </a:r>
@@ -25936,8 +25452,7 @@
                   <a:srgbClr val="8A6D1E"/>
                 </a:solidFill>
                 <a:latin typeface="Calibri" pitchFamily="34" charset="0"/>
-                <a:ea typeface="Calibri" pitchFamily="34" charset="-122"/>
-                <a:cs typeface="Calibri" pitchFamily="34" charset="-120"/>
+                <a:cs typeface="Amiri" pitchFamily="2" charset="-78"/>
               </a:rPr>
               <a:t>ARABIC DEPARTMENT · MIFTAH ARABIC · IGCSE 0544</a:t>
             </a:r>
@@ -26002,8 +25517,7 @@
                   <a:srgbClr val="FFFFFF"/>
                 </a:solidFill>
                 <a:latin typeface="Calibri" pitchFamily="34" charset="0"/>
-                <a:ea typeface="Calibri" pitchFamily="34" charset="-122"/>
-                <a:cs typeface="Calibri" pitchFamily="34" charset="-120"/>
+                <a:cs typeface="Amiri" pitchFamily="2" charset="-78"/>
               </a:rPr>
               <a:t>P6-L12 · IGCSE Bridge</a:t>
             </a:r>
@@ -26068,8 +25582,7 @@
                   <a:srgbClr val="FFFFFF"/>
                 </a:solidFill>
                 <a:latin typeface="Calibri" pitchFamily="34" charset="0"/>
-                <a:ea typeface="Calibri" pitchFamily="34" charset="-122"/>
-                <a:cs typeface="Calibri" pitchFamily="34" charset="-120"/>
+                <a:cs typeface="Amiri" pitchFamily="2" charset="-78"/>
               </a:rPr>
               <a:t>TEACHER INSTRUCTION · 3 MIN</a:t>
             </a:r>
@@ -26107,8 +25620,7 @@
                   <a:srgbClr val="1B3B6F"/>
                 </a:solidFill>
                 <a:latin typeface="Calibri" pitchFamily="34" charset="0"/>
-                <a:ea typeface="Calibri" pitchFamily="34" charset="-122"/>
-                <a:cs typeface="Calibri" pitchFamily="34" charset="-120"/>
+                <a:cs typeface="Amiri" pitchFamily="2" charset="-78"/>
               </a:rPr>
               <a:t>TEACH · CHOOSE ONE · SPEAK OR WRITE FREELY (WEBSITE)</a:t>
             </a:r>
@@ -26146,8 +25658,7 @@
                   <a:srgbClr val="1B3B6F"/>
                 </a:solidFill>
                 <a:latin typeface="Cambria" pitchFamily="34" charset="0"/>
-                <a:ea typeface="Cambria" pitchFamily="34" charset="-122"/>
-                <a:cs typeface="Cambria" pitchFamily="34" charset="-120"/>
+                <a:cs typeface="Amiri" pitchFamily="2" charset="-78"/>
               </a:rPr>
               <a:t>Arabic in the wild — authentic communication</a:t>
             </a:r>
@@ -26184,9 +25695,8 @@
                 <a:solidFill>
                   <a:srgbClr val="8A6D1E"/>
                 </a:solidFill>
-                <a:latin typeface="Amiri" pitchFamily="34" charset="0"/>
-                <a:ea typeface="Amiri" pitchFamily="34" charset="-122"/>
-                <a:cs typeface="Amiri" pitchFamily="34" charset="-120"/>
+                <a:latin typeface="Amiri" pitchFamily="2" charset="-78"/>
+                <a:cs typeface="Amiri" pitchFamily="2" charset="-78"/>
               </a:rPr>
               <a:t>العَرَبِيَّةُ فِي الحَيَاةِ</a:t>
             </a:r>
@@ -26224,8 +25734,7 @@
                   <a:srgbClr val="8A93A0"/>
                 </a:solidFill>
                 <a:latin typeface="Calibri" pitchFamily="34" charset="0"/>
-                <a:ea typeface="Calibri" pitchFamily="34" charset="-122"/>
-                <a:cs typeface="Calibri" pitchFamily="34" charset="-120"/>
+                <a:cs typeface="Amiri" pitchFamily="2" charset="-78"/>
               </a:rPr>
               <a:t>Miftah Arabic · Progression P6 · IGCSE Bridge · P6-L12</a:t>
             </a:r>
@@ -26297,8 +25806,7 @@
                   <a:srgbClr val="1B3B6F"/>
                 </a:solidFill>
                 <a:latin typeface="Calibri" pitchFamily="34" charset="0"/>
-                <a:ea typeface="Calibri" pitchFamily="34" charset="-122"/>
-                <a:cs typeface="Calibri" pitchFamily="34" charset="-120"/>
+                <a:cs typeface="Amiri" pitchFamily="2" charset="-78"/>
               </a:rPr>
               <a:t>ARABIC IN THE WILD — AUTHENTIC COMMUNICATION</a:t>
             </a:r>
@@ -26361,8 +25869,7 @@
                   <a:srgbClr val="D4AF37"/>
                 </a:solidFill>
                 <a:latin typeface="Calibri" pitchFamily="34" charset="0"/>
-                <a:ea typeface="Calibri" pitchFamily="34" charset="-122"/>
-                <a:cs typeface="Calibri" pitchFamily="34" charset="-120"/>
+                <a:cs typeface="Amiri" pitchFamily="2" charset="-78"/>
               </a:rPr>
               <a:t>1</a:t>
             </a:r>
@@ -26400,8 +25907,7 @@
                   <a:srgbClr val="1F2A37"/>
                 </a:solidFill>
                 <a:latin typeface="Calibri" pitchFamily="34" charset="0"/>
-                <a:ea typeface="Calibri" pitchFamily="34" charset="-122"/>
-                <a:cs typeface="Calibri" pitchFamily="34" charset="-120"/>
+                <a:cs typeface="Amiri" pitchFamily="2" charset="-78"/>
               </a:rPr>
               <a:t>A · Conversation — Have a genuine five-minute conversation entirely in Arabic — no topic set, just talk.</a:t>
             </a:r>
@@ -26464,8 +25970,7 @@
                   <a:srgbClr val="D4AF37"/>
                 </a:solidFill>
                 <a:latin typeface="Calibri" pitchFamily="34" charset="0"/>
-                <a:ea typeface="Calibri" pitchFamily="34" charset="-122"/>
-                <a:cs typeface="Calibri" pitchFamily="34" charset="-120"/>
+                <a:cs typeface="Amiri" pitchFamily="2" charset="-78"/>
               </a:rPr>
               <a:t>2</a:t>
             </a:r>
@@ -26503,8 +26008,7 @@
                   <a:srgbClr val="1F2A37"/>
                 </a:solidFill>
                 <a:latin typeface="Calibri" pitchFamily="34" charset="0"/>
-                <a:ea typeface="Calibri" pitchFamily="34" charset="-122"/>
-                <a:cs typeface="Calibri" pitchFamily="34" charset="-120"/>
+                <a:cs typeface="Amiri" pitchFamily="2" charset="-78"/>
               </a:rPr>
               <a:t>B · Creative — Write a 100-word piece of free Arabic: a story opening, a poem, a diary entry, or a letter to a future student.</a:t>
             </a:r>
@@ -26567,8 +26071,7 @@
                   <a:srgbClr val="D4AF37"/>
                 </a:solidFill>
                 <a:latin typeface="Calibri" pitchFamily="34" charset="0"/>
-                <a:ea typeface="Calibri" pitchFamily="34" charset="-122"/>
-                <a:cs typeface="Calibri" pitchFamily="34" charset="-120"/>
+                <a:cs typeface="Amiri" pitchFamily="2" charset="-78"/>
               </a:rPr>
               <a:t>3</a:t>
             </a:r>
@@ -26606,8 +26109,7 @@
                   <a:srgbClr val="1F2A37"/>
                 </a:solidFill>
                 <a:latin typeface="Calibri" pitchFamily="34" charset="0"/>
-                <a:ea typeface="Calibri" pitchFamily="34" charset="-122"/>
-                <a:cs typeface="Calibri" pitchFamily="34" charset="-120"/>
+                <a:cs typeface="Amiri" pitchFamily="2" charset="-78"/>
               </a:rPr>
               <a:t>C · Cultural — Give a three-minute spoken summary of something about the Arab world that genuinely moved or surprised you.</a:t>
             </a:r>
@@ -26679,8 +26181,7 @@
                   <a:srgbClr val="8A6D1E"/>
                 </a:solidFill>
                 <a:latin typeface="Calibri" pitchFamily="34" charset="0"/>
-                <a:ea typeface="Calibri" pitchFamily="34" charset="-122"/>
-                <a:cs typeface="Calibri" pitchFamily="34" charset="-120"/>
+                <a:cs typeface="Amiri" pitchFamily="2" charset="-78"/>
               </a:rPr>
               <a:t>IN ARABIC</a:t>
             </a:r>
@@ -26717,9 +26218,8 @@
                 <a:solidFill>
                   <a:srgbClr val="1B3B6F"/>
                 </a:solidFill>
-                <a:latin typeface="Amiri" pitchFamily="34" charset="0"/>
-                <a:ea typeface="Amiri" pitchFamily="34" charset="-122"/>
-                <a:cs typeface="Amiri" pitchFamily="34" charset="-120"/>
+                <a:latin typeface="Amiri" pitchFamily="2" charset="-78"/>
+                <a:cs typeface="Amiri" pitchFamily="2" charset="-78"/>
               </a:rPr>
               <a:t>مَا أَجْمَلُ شَيْءٍ تَعَلَّمْتَهُ هٰذَا العَامَ؟</a:t>
             </a:r>
@@ -26757,8 +26257,7 @@
                   <a:srgbClr val="5A6472"/>
                 </a:solidFill>
                 <a:latin typeface="Calibri" pitchFamily="34" charset="0"/>
-                <a:ea typeface="Calibri" pitchFamily="34" charset="-122"/>
-                <a:cs typeface="Calibri" pitchFamily="34" charset="-120"/>
+                <a:cs typeface="Amiri" pitchFamily="2" charset="-78"/>
               </a:rPr>
               <a:t>A · a conversation opener</a:t>
             </a:r>
@@ -26818,9 +26317,8 @@
                 <a:solidFill>
                   <a:srgbClr val="1B3B6F"/>
                 </a:solidFill>
-                <a:latin typeface="Amiri" pitchFamily="34" charset="0"/>
-                <a:ea typeface="Amiri" pitchFamily="34" charset="-122"/>
-                <a:cs typeface="Amiri" pitchFamily="34" charset="-120"/>
+                <a:latin typeface="Amiri" pitchFamily="2" charset="-78"/>
+                <a:cs typeface="Amiri" pitchFamily="2" charset="-78"/>
               </a:rPr>
               <a:t>فِي صَبَاحٍ هَادِئٍ، فَتَحْتُ البَابَ فَوَجَدْتُ …</a:t>
             </a:r>
@@ -26858,8 +26356,7 @@
                   <a:srgbClr val="5A6472"/>
                 </a:solidFill>
                 <a:latin typeface="Calibri" pitchFamily="34" charset="0"/>
-                <a:ea typeface="Calibri" pitchFamily="34" charset="-122"/>
-                <a:cs typeface="Calibri" pitchFamily="34" charset="-120"/>
+                <a:cs typeface="Amiri" pitchFamily="2" charset="-78"/>
               </a:rPr>
               <a:t>B · a story opening</a:t>
             </a:r>
@@ -26919,9 +26416,8 @@
                 <a:solidFill>
                   <a:srgbClr val="1B3B6F"/>
                 </a:solidFill>
-                <a:latin typeface="Amiri" pitchFamily="34" charset="0"/>
-                <a:ea typeface="Amiri" pitchFamily="34" charset="-122"/>
-                <a:cs typeface="Amiri" pitchFamily="34" charset="-120"/>
+                <a:latin typeface="Amiri" pitchFamily="2" charset="-78"/>
+                <a:cs typeface="Amiri" pitchFamily="2" charset="-78"/>
               </a:rPr>
               <a:t>أَكْثَرُ مَا أَدْهَشَنِي فِي العَالَمِ العَرَبِيِّ هُوَ …</a:t>
             </a:r>
@@ -26959,8 +26455,7 @@
                   <a:srgbClr val="5A6472"/>
                 </a:solidFill>
                 <a:latin typeface="Calibri" pitchFamily="34" charset="0"/>
-                <a:ea typeface="Calibri" pitchFamily="34" charset="-122"/>
-                <a:cs typeface="Calibri" pitchFamily="34" charset="-120"/>
+                <a:cs typeface="Amiri" pitchFamily="2" charset="-78"/>
               </a:rPr>
               <a:t>C · a cultural talk</a:t>
             </a:r>
@@ -26998,8 +26493,7 @@
                   <a:srgbClr val="8A93A0"/>
                 </a:solidFill>
                 <a:latin typeface="Calibri" pitchFamily="34" charset="0"/>
-                <a:ea typeface="Calibri" pitchFamily="34" charset="-122"/>
-                <a:cs typeface="Calibri" pitchFamily="34" charset="-120"/>
+                <a:cs typeface="Amiri" pitchFamily="2" charset="-78"/>
               </a:rPr>
               <a:t>9 / 17</a:t>
             </a:r>

--- a/Progression_P6/P6-L12_Celebration_and_the_Road_Ahead.pptx
+++ b/Progression_P6/P6-L12_Celebration_and_the_Road_Ahead.pptx
@@ -1062,7 +1062,11 @@
           <a:lstStyle/>
           <a:p>
             <a:r>
-              <a:rPr lang="en-US" dirty="0"/>
+              <a:rPr lang="ar-SA" dirty="0">
+                <a:latin typeface="Amiri" pitchFamily="2" charset="-78"/>
+                <a:ea typeface="Amiri" pitchFamily="2" charset="-78"/>
+                <a:cs typeface="Amiri" pitchFamily="2" charset="-78"/>
+              </a:rPr>
               <a:t>FINAL REFLECTION (2 min) — website frames plus a teacher frame with masculine and feminine forms (فَخُورٌ / فَخُورَةٌ).
 Website:  (The road ahead)</a:t>
             </a:r>
@@ -1328,7 +1332,11 @@
           <a:lstStyle/>
           <a:p>
             <a:r>
-              <a:rPr lang="en-US" dirty="0"/>
+              <a:rPr lang="ar-SA" dirty="0">
+                <a:latin typeface="Amiri" pitchFamily="2" charset="-78"/>
+                <a:ea typeface="Amiri" pitchFamily="2" charset="-78"/>
+                <a:cs typeface="Amiri" pitchFamily="2" charset="-78"/>
+              </a:rPr>
               <a:t>WELCOME (1 min) — while students join.
 • Greet each student by name as they arrive: السَّلَامُ عَلَيْكُمْ. Take the register (Pastoral Tracker: attendance 0/1).
 • 2-MINUTE CHECK-IN (SEND training): a private chat to any student who seemed unsettled last lesson — “Are you okay today? 👍 / 👎”.
@@ -1783,7 +1791,11 @@
           <a:lstStyle/>
           <a:p>
             <a:r>
-              <a:rPr lang="en-US" dirty="0"/>
+              <a:rPr lang="ar-SA" dirty="0">
+                <a:latin typeface="Amiri" pitchFamily="2" charset="-78"/>
+                <a:ea typeface="Amiri" pitchFamily="2" charset="-78"/>
+                <a:cs typeface="Amiri" pitchFamily="2" charset="-78"/>
+              </a:rPr>
               <a:t>TEACH (3 min) — read the website panel slowly. Pause on the last line: “You are an Arabic speaker — and that does not expire.” If you have a photo or worksheet from F1, show it now.
 WEBSITE PANEL “From F1 to P6 — the distance”: In F1 you learned to write the letter ب. Today you can construct a formal Arabic argument in 150 words with conditionals, reported speech, the past perfect, three subjunctive triggers and a concession-refutation architecture. Whatever grade the exam returns, you are not the person who walked into the F1 classroom. You are an Arabic speaker — and that does not expire.</a:t>
             </a:r>
@@ -2445,6 +2457,7 @@
                   <a:srgbClr val="D4AF37"/>
                 </a:solidFill>
                 <a:latin typeface="Amiri" pitchFamily="2" charset="-78"/>
+                <a:ea typeface="Amiri" pitchFamily="2" charset="-78"/>
                 <a:cs typeface="Amiri" pitchFamily="2" charset="-78"/>
               </a:rPr>
               <a:t>م</a:t>
@@ -2651,6 +2664,7 @@
                   <a:srgbClr val="D4AF37"/>
                 </a:solidFill>
                 <a:latin typeface="Amiri" pitchFamily="2" charset="-78"/>
+                <a:ea typeface="Amiri" pitchFamily="2" charset="-78"/>
                 <a:cs typeface="Amiri" pitchFamily="2" charset="-78"/>
               </a:rPr>
               <a:t>الاحْتِفَالُ وَالتَّأَمُّلُ وَالطَّرِيقُ إِلَى الأَمَامِ</a:t>
@@ -3108,6 +3122,7 @@
                   <a:srgbClr val="D4AF37"/>
                 </a:solidFill>
                 <a:latin typeface="Amiri" pitchFamily="2" charset="-78"/>
+                <a:ea typeface="Amiri" pitchFamily="2" charset="-78"/>
                 <a:cs typeface="Amiri" pitchFamily="2" charset="-78"/>
               </a:rPr>
               <a:t>م</a:t>
@@ -3428,6 +3443,7 @@
                   <a:srgbClr val="8A6D1E"/>
                 </a:solidFill>
                 <a:latin typeface="Amiri" pitchFamily="2" charset="-78"/>
+                <a:ea typeface="Amiri" pitchFamily="2" charset="-78"/>
                 <a:cs typeface="Amiri" pitchFamily="2" charset="-78"/>
               </a:rPr>
               <a:t>العَرَبِيَّةُ الحُرَّةُ</a:t>
@@ -3827,6 +3843,7 @@
                   <a:srgbClr val="1B3B6F"/>
                 </a:solidFill>
                 <a:latin typeface="Amiri" pitchFamily="2" charset="-78"/>
+                <a:ea typeface="Amiri" pitchFamily="2" charset="-78"/>
                 <a:cs typeface="Amiri" pitchFamily="2" charset="-78"/>
               </a:rPr>
               <a:t>إِلَى طَالِبٍ يَبْدَأُ رِحْلَتَهُ مَعَ العَرَبِيَّةِ،</a:t>
@@ -3903,6 +3920,7 @@
                   <a:srgbClr val="1B3B6F"/>
                 </a:solidFill>
                 <a:latin typeface="Amiri" pitchFamily="2" charset="-78"/>
+                <a:ea typeface="Amiri" pitchFamily="2" charset="-78"/>
                 <a:cs typeface="Amiri" pitchFamily="2" charset="-78"/>
               </a:rPr>
               <a:t>أَتَذَكَّرُ يَوْمَ …</a:t>
@@ -3979,6 +3997,7 @@
                   <a:srgbClr val="1B3B6F"/>
                 </a:solidFill>
                 <a:latin typeface="Amiri" pitchFamily="2" charset="-78"/>
+                <a:ea typeface="Amiri" pitchFamily="2" charset="-78"/>
                 <a:cs typeface="Amiri" pitchFamily="2" charset="-78"/>
               </a:rPr>
               <a:t>أَنْصَحُكَ بِأَنْ …</a:t>
@@ -4150,6 +4169,7 @@
                   <a:srgbClr val="D4AF37"/>
                 </a:solidFill>
                 <a:latin typeface="Amiri" pitchFamily="2" charset="-78"/>
+                <a:ea typeface="Amiri" pitchFamily="2" charset="-78"/>
                 <a:cs typeface="Amiri" pitchFamily="2" charset="-78"/>
               </a:rPr>
               <a:t>م</a:t>
@@ -4470,6 +4490,7 @@
                   <a:srgbClr val="8A6D1E"/>
                 </a:solidFill>
                 <a:latin typeface="Amiri" pitchFamily="2" charset="-78"/>
+                <a:ea typeface="Amiri" pitchFamily="2" charset="-78"/>
                 <a:cs typeface="Amiri" pitchFamily="2" charset="-78"/>
               </a:rPr>
               <a:t>نَمُوذَجُ الإِجَابَةِ</a:t>
@@ -4583,6 +4604,7 @@
                   <a:srgbClr val="1F2A37"/>
                 </a:solidFill>
                 <a:latin typeface="Amiri" pitchFamily="2" charset="-78"/>
+                <a:ea typeface="Amiri" pitchFamily="2" charset="-78"/>
                 <a:cs typeface="Amiri" pitchFamily="2" charset="-78"/>
               </a:rPr>
               <a:t>أَكْتُبُ إِلَى طَالِبٍ يَبْدَأُ رِحْلَتَهُ مَعَ العَرَبِيَّةِ: لَا تَخَفْ مِنَ الحَرْفِ الأَوَّلِ، فَكُلُّ لُغَةٍ تَبْدَأُ بِخُطْوَةٍ. صَحِيحٌ أَنَّ الطَّرِيقَ طَوِيلٌ، غَيْرَ أَنَّهُ يَسْتَحِقُّ كُلَّ جُهْدٍ. وَبِنَاءً عَلَى تَجْرِبَتِي، أَنْصَحُكَ بِأَنْ تَقْرَأَ وَتَتَحَدَّثَ كُلَّ يَوْمٍ. وَلَوْ ثَابَرْتَ، لَوَجَدْتَ نَفْسَكَ يَوْمًا تَكْتُبُ بِالعَرَبِيَّةِ بِثِقَةٍ. العَرَبِيَّةُ الآنَ لَكَ.</a:t>
@@ -4746,11 +4768,12 @@
               <a:buNone/>
             </a:pPr>
             <a:r>
-              <a:rPr lang="en-US" sz="950" b="1" dirty="0">
+              <a:rPr lang="ar-SA" sz="950" b="1" dirty="0">
                 <a:solidFill>
                   <a:srgbClr val="FFFFFF"/>
                 </a:solidFill>
                 <a:latin typeface="Calibri" pitchFamily="34" charset="0"/>
+                <a:ea typeface="Amiri" pitchFamily="2" charset="-78"/>
                 <a:cs typeface="Amiri" pitchFamily="2" charset="-78"/>
               </a:rPr>
               <a:t>لَا تَخَفْ</a:t>
@@ -4811,11 +4834,12 @@
               <a:buNone/>
             </a:pPr>
             <a:r>
-              <a:rPr lang="en-US" sz="950" b="1" dirty="0">
+              <a:rPr lang="ar-SA" sz="950" b="1" dirty="0">
                 <a:solidFill>
                   <a:srgbClr val="FFFFFF"/>
                 </a:solidFill>
                 <a:latin typeface="Calibri" pitchFamily="34" charset="0"/>
+                <a:ea typeface="Amiri" pitchFamily="2" charset="-78"/>
                 <a:cs typeface="Amiri" pitchFamily="2" charset="-78"/>
               </a:rPr>
               <a:t>صَحِيحٌ أَنَّ … غَيْرَ أَنَّ</a:t>
@@ -4876,11 +4900,12 @@
               <a:buNone/>
             </a:pPr>
             <a:r>
-              <a:rPr lang="en-US" sz="950" b="1" dirty="0">
+              <a:rPr lang="ar-SA" sz="950" b="1" dirty="0">
                 <a:solidFill>
                   <a:srgbClr val="FFFFFF"/>
                 </a:solidFill>
                 <a:latin typeface="Calibri" pitchFamily="34" charset="0"/>
+                <a:ea typeface="Amiri" pitchFamily="2" charset="-78"/>
                 <a:cs typeface="Amiri" pitchFamily="2" charset="-78"/>
               </a:rPr>
               <a:t>أَنْصَحُكَ بِأَنْ</a:t>
@@ -4941,11 +4966,12 @@
               <a:buNone/>
             </a:pPr>
             <a:r>
-              <a:rPr lang="en-US" sz="950" b="1" dirty="0">
+              <a:rPr lang="ar-SA" sz="950" b="1" dirty="0">
                 <a:solidFill>
                   <a:srgbClr val="FFFFFF"/>
                 </a:solidFill>
                 <a:latin typeface="Calibri" pitchFamily="34" charset="0"/>
+                <a:ea typeface="Amiri" pitchFamily="2" charset="-78"/>
                 <a:cs typeface="Amiri" pitchFamily="2" charset="-78"/>
               </a:rPr>
               <a:t>وَلَوْ ثَابَرْتَ، لَوَجَدْتَ</a:t>
@@ -5079,6 +5105,7 @@
                   <a:srgbClr val="D4AF37"/>
                 </a:solidFill>
                 <a:latin typeface="Amiri" pitchFamily="2" charset="-78"/>
+                <a:ea typeface="Amiri" pitchFamily="2" charset="-78"/>
                 <a:cs typeface="Amiri" pitchFamily="2" charset="-78"/>
               </a:rPr>
               <a:t>م</a:t>
@@ -5399,6 +5426,7 @@
                   <a:srgbClr val="8A6D1E"/>
                 </a:solidFill>
                 <a:latin typeface="Amiri" pitchFamily="2" charset="-78"/>
+                <a:ea typeface="Amiri" pitchFamily="2" charset="-78"/>
                 <a:cs typeface="Amiri" pitchFamily="2" charset="-78"/>
               </a:rPr>
               <a:t>شَهَادَةُ الإِنْجَازِ</a:t>
@@ -5682,6 +5710,7 @@
                   <a:srgbClr val="1B3B6F"/>
                 </a:solidFill>
                 <a:latin typeface="Amiri" pitchFamily="2" charset="-78"/>
+                <a:ea typeface="Amiri" pitchFamily="2" charset="-78"/>
                 <a:cs typeface="Amiri" pitchFamily="2" charset="-78"/>
               </a:rPr>
               <a:t>لَوْ لَمْ أُثَابِرْ، لَمَا وَصَلْتُ إِلَى هُنَا؛ غَيْرَ أَنِّي ثَابَرْتُ، فَأَصْبَحَتِ العَرَبِيَّةُ لُغَتِي.</a:t>
@@ -6097,6 +6126,7 @@
                   <a:srgbClr val="D4AF37"/>
                 </a:solidFill>
                 <a:latin typeface="Amiri" pitchFamily="2" charset="-78"/>
+                <a:ea typeface="Amiri" pitchFamily="2" charset="-78"/>
                 <a:cs typeface="Amiri" pitchFamily="2" charset="-78"/>
               </a:rPr>
               <a:t>م</a:t>
@@ -6417,6 +6447,7 @@
                   <a:srgbClr val="8A6D1E"/>
                 </a:solidFill>
                 <a:latin typeface="Amiri" pitchFamily="2" charset="-78"/>
+                <a:ea typeface="Amiri" pitchFamily="2" charset="-78"/>
                 <a:cs typeface="Amiri" pitchFamily="2" charset="-78"/>
               </a:rPr>
               <a:t>الطَّرِيقُ إِلَى الأَمَامِ</a:t>
@@ -7041,6 +7072,7 @@
                   <a:srgbClr val="1B3B6F"/>
                 </a:solidFill>
                 <a:latin typeface="Amiri" pitchFamily="2" charset="-78"/>
+                <a:ea typeface="Amiri" pitchFamily="2" charset="-78"/>
                 <a:cs typeface="Amiri" pitchFamily="2" charset="-78"/>
               </a:rPr>
               <a:t>العَرَبِيَّةُ مِفْتَاحٌ إِلَى عَالَمٍ.</a:t>
@@ -7140,6 +7172,7 @@
                   <a:srgbClr val="1B3B6F"/>
                 </a:solidFill>
                 <a:latin typeface="Amiri" pitchFamily="2" charset="-78"/>
+                <a:ea typeface="Amiri" pitchFamily="2" charset="-78"/>
                 <a:cs typeface="Amiri" pitchFamily="2" charset="-78"/>
               </a:rPr>
               <a:t>لُغَةُ القُرْآنِ الكَرِيمِ</a:t>
@@ -7239,6 +7272,7 @@
                   <a:srgbClr val="1B3B6F"/>
                 </a:solidFill>
                 <a:latin typeface="Amiri" pitchFamily="2" charset="-78"/>
+                <a:ea typeface="Amiri" pitchFamily="2" charset="-78"/>
                 <a:cs typeface="Amiri" pitchFamily="2" charset="-78"/>
               </a:rPr>
               <a:t>أَرْبَعُمِائَةِ مِلْيُونِ مُتَحَدِّثٍ</a:t>
@@ -7410,6 +7444,7 @@
                   <a:srgbClr val="D4AF37"/>
                 </a:solidFill>
                 <a:latin typeface="Amiri" pitchFamily="2" charset="-78"/>
+                <a:ea typeface="Amiri" pitchFamily="2" charset="-78"/>
                 <a:cs typeface="Amiri" pitchFamily="2" charset="-78"/>
               </a:rPr>
               <a:t>م</a:t>
@@ -7730,6 +7765,7 @@
                   <a:srgbClr val="8A6D1E"/>
                 </a:solidFill>
                 <a:latin typeface="Amiri" pitchFamily="2" charset="-78"/>
+                <a:ea typeface="Amiri" pitchFamily="2" charset="-78"/>
                 <a:cs typeface="Amiri" pitchFamily="2" charset="-78"/>
               </a:rPr>
               <a:t>اكْتَمَلَ البَرْنَامَجُ</a:t>
@@ -8152,6 +8188,7 @@
                   <a:srgbClr val="1B3B6F"/>
                 </a:solidFill>
                 <a:latin typeface="Amiri" pitchFamily="2" charset="-78"/>
+                <a:ea typeface="Amiri" pitchFamily="2" charset="-78"/>
                 <a:cs typeface="Amiri" pitchFamily="2" charset="-78"/>
               </a:rPr>
               <a:t>العَرَبِيَّةُ الآنَ لَكَ.</a:t>
@@ -8254,6 +8291,7 @@
                   <a:srgbClr val="1B3B6F"/>
                 </a:solidFill>
                 <a:latin typeface="Amiri" pitchFamily="2" charset="-78"/>
+                <a:ea typeface="Amiri" pitchFamily="2" charset="-78"/>
                 <a:cs typeface="Amiri" pitchFamily="2" charset="-78"/>
               </a:rPr>
               <a:t>الامْتِحَانُ جِسْرٌ — وَالجِسْرُ يُوصِلُكَ إِلَى الضَّفَّةِ الأُخْرَى.</a:t>
@@ -8425,6 +8463,7 @@
                   <a:srgbClr val="D4AF37"/>
                 </a:solidFill>
                 <a:latin typeface="Amiri" pitchFamily="2" charset="-78"/>
+                <a:ea typeface="Amiri" pitchFamily="2" charset="-78"/>
                 <a:cs typeface="Amiri" pitchFamily="2" charset="-78"/>
               </a:rPr>
               <a:t>م</a:t>
@@ -8745,6 +8784,7 @@
                   <a:srgbClr val="8A6D1E"/>
                 </a:solidFill>
                 <a:latin typeface="Amiri" pitchFamily="2" charset="-78"/>
+                <a:ea typeface="Amiri" pitchFamily="2" charset="-78"/>
                 <a:cs typeface="Amiri" pitchFamily="2" charset="-78"/>
               </a:rPr>
               <a:t>التَّأَمُّلُ الأَخِيرُ</a:t>
@@ -9269,6 +9309,7 @@
                   <a:srgbClr val="1B3B6F"/>
                 </a:solidFill>
                 <a:latin typeface="Amiri" pitchFamily="2" charset="-78"/>
+                <a:ea typeface="Amiri" pitchFamily="2" charset="-78"/>
                 <a:cs typeface="Amiri" pitchFamily="2" charset="-78"/>
               </a:rPr>
               <a:t>تَعَلَّمْتُ العَرَبِيَّةَ</a:t>
@@ -9345,6 +9386,7 @@
                   <a:srgbClr val="1B3B6F"/>
                 </a:solidFill>
                 <a:latin typeface="Amiri" pitchFamily="2" charset="-78"/>
+                <a:ea typeface="Amiri" pitchFamily="2" charset="-78"/>
                 <a:cs typeface="Amiri" pitchFamily="2" charset="-78"/>
               </a:rPr>
               <a:t>أَنَا فَخُورٌ بِأَنِّي ______ .</a:t>
@@ -9516,6 +9558,7 @@
                   <a:srgbClr val="D4AF37"/>
                 </a:solidFill>
                 <a:latin typeface="Amiri" pitchFamily="2" charset="-78"/>
+                <a:ea typeface="Amiri" pitchFamily="2" charset="-78"/>
                 <a:cs typeface="Amiri" pitchFamily="2" charset="-78"/>
               </a:rPr>
               <a:t>م</a:t>
@@ -9836,6 +9879,7 @@
                   <a:srgbClr val="8A6D1E"/>
                 </a:solidFill>
                 <a:latin typeface="Amiri" pitchFamily="2" charset="-78"/>
+                <a:ea typeface="Amiri" pitchFamily="2" charset="-78"/>
                 <a:cs typeface="Amiri" pitchFamily="2" charset="-78"/>
               </a:rPr>
               <a:t>قَيِّمْ عَمَلَكَ</a:t>
@@ -10918,6 +10962,7 @@
                   <a:srgbClr val="FFFFFF"/>
                 </a:solidFill>
                 <a:latin typeface="Amiri" pitchFamily="2" charset="-78"/>
+                <a:ea typeface="Amiri" pitchFamily="2" charset="-78"/>
                 <a:cs typeface="Amiri" pitchFamily="2" charset="-78"/>
               </a:rPr>
               <a:t>أَحْسَنْتُمْ! إِلَى اللِّقَاءِ</a:t>
@@ -11070,6 +11115,7 @@
                   <a:srgbClr val="D4AF37"/>
                 </a:solidFill>
                 <a:latin typeface="Amiri" pitchFamily="2" charset="-78"/>
+                <a:ea typeface="Amiri" pitchFamily="2" charset="-78"/>
                 <a:cs typeface="Amiri" pitchFamily="2" charset="-78"/>
               </a:rPr>
               <a:t>الامْتِحَانُ جِسْرٌ — وَالجِسْرُ يُوصِلُكَ إِلَى الضَّفَّةِ الأُخْرَى</a:t>
@@ -11203,6 +11249,7 @@
                   <a:srgbClr val="D4AF37"/>
                 </a:solidFill>
                 <a:latin typeface="Amiri" pitchFamily="2" charset="-78"/>
+                <a:ea typeface="Amiri" pitchFamily="2" charset="-78"/>
                 <a:cs typeface="Amiri" pitchFamily="2" charset="-78"/>
               </a:rPr>
               <a:t>م</a:t>
@@ -11523,6 +11570,7 @@
                   <a:srgbClr val="8A6D1E"/>
                 </a:solidFill>
                 <a:latin typeface="Amiri" pitchFamily="2" charset="-78"/>
+                <a:ea typeface="Amiri" pitchFamily="2" charset="-78"/>
                 <a:cs typeface="Amiri" pitchFamily="2" charset="-78"/>
               </a:rPr>
               <a:t>آدَابُ الصَّفِّ</a:t>
@@ -13054,6 +13102,7 @@
                   <a:srgbClr val="D4AF37"/>
                 </a:solidFill>
                 <a:latin typeface="Amiri" pitchFamily="2" charset="-78"/>
+                <a:ea typeface="Amiri" pitchFamily="2" charset="-78"/>
                 <a:cs typeface="Amiri" pitchFamily="2" charset="-78"/>
               </a:rPr>
               <a:t>م</a:t>
@@ -13374,6 +13423,7 @@
                   <a:srgbClr val="8A6D1E"/>
                 </a:solidFill>
                 <a:latin typeface="Amiri" pitchFamily="2" charset="-78"/>
+                <a:ea typeface="Amiri" pitchFamily="2" charset="-78"/>
                 <a:cs typeface="Amiri" pitchFamily="2" charset="-78"/>
               </a:rPr>
               <a:t>خَرِيطَةُ الدَّرْسِ</a:t>
@@ -13688,6 +13738,7 @@
                   <a:srgbClr val="0E7C86"/>
                 </a:solidFill>
                 <a:latin typeface="Amiri" pitchFamily="2" charset="-78"/>
+                <a:ea typeface="Amiri" pitchFamily="2" charset="-78"/>
                 <a:cs typeface="Amiri" pitchFamily="2" charset="-78"/>
               </a:rPr>
               <a:t>اِبْدَأِ الآنَ</a:t>
@@ -13964,6 +14015,7 @@
                   <a:srgbClr val="1B3B6F"/>
                 </a:solidFill>
                 <a:latin typeface="Amiri" pitchFamily="2" charset="-78"/>
+                <a:ea typeface="Amiri" pitchFamily="2" charset="-78"/>
                 <a:cs typeface="Amiri" pitchFamily="2" charset="-78"/>
               </a:rPr>
               <a:t>الرِّحْلَةُ</a:t>
@@ -14240,6 +14292,7 @@
                   <a:srgbClr val="1E6B52"/>
                 </a:solidFill>
                 <a:latin typeface="Amiri" pitchFamily="2" charset="-78"/>
+                <a:ea typeface="Amiri" pitchFamily="2" charset="-78"/>
                 <a:cs typeface="Amiri" pitchFamily="2" charset="-78"/>
               </a:rPr>
               <a:t>تَحَدَّثْ وَاكْتُبْ</a:t>
@@ -14516,6 +14569,7 @@
                   <a:srgbClr val="1E6B52"/>
                 </a:solidFill>
                 <a:latin typeface="Amiri" pitchFamily="2" charset="-78"/>
+                <a:ea typeface="Amiri" pitchFamily="2" charset="-78"/>
                 <a:cs typeface="Amiri" pitchFamily="2" charset="-78"/>
               </a:rPr>
               <a:t>جُمْلَتِي</a:t>
@@ -14792,6 +14846,7 @@
                   <a:srgbClr val="8A6D1E"/>
                 </a:solidFill>
                 <a:latin typeface="Amiri" pitchFamily="2" charset="-78"/>
+                <a:ea typeface="Amiri" pitchFamily="2" charset="-78"/>
                 <a:cs typeface="Amiri" pitchFamily="2" charset="-78"/>
               </a:rPr>
               <a:t>التَّأَمُّلُ</a:t>
@@ -15068,6 +15123,7 @@
                   <a:srgbClr val="8A6D1E"/>
                 </a:solidFill>
                 <a:latin typeface="Amiri" pitchFamily="2" charset="-78"/>
+                <a:ea typeface="Amiri" pitchFamily="2" charset="-78"/>
                 <a:cs typeface="Amiri" pitchFamily="2" charset="-78"/>
               </a:rPr>
               <a:t>أَحْسَنْتُمْ</a:t>
@@ -15311,6 +15367,7 @@
                   <a:srgbClr val="D4AF37"/>
                 </a:solidFill>
                 <a:latin typeface="Amiri" pitchFamily="2" charset="-78"/>
+                <a:ea typeface="Amiri" pitchFamily="2" charset="-78"/>
                 <a:cs typeface="Amiri" pitchFamily="2" charset="-78"/>
               </a:rPr>
               <a:t>م</a:t>
@@ -15631,6 +15688,7 @@
                   <a:srgbClr val="8A6D1E"/>
                 </a:solidFill>
                 <a:latin typeface="Amiri" pitchFamily="2" charset="-78"/>
+                <a:ea typeface="Amiri" pitchFamily="2" charset="-78"/>
                 <a:cs typeface="Amiri" pitchFamily="2" charset="-78"/>
               </a:rPr>
               <a:t>اِبْدَأِ الآنَ</a:t>
@@ -15817,6 +15875,7 @@
                   <a:srgbClr val="1B3B6F"/>
                 </a:solidFill>
                 <a:latin typeface="Amiri" pitchFamily="2" charset="-78"/>
+                <a:ea typeface="Amiri" pitchFamily="2" charset="-78"/>
                 <a:cs typeface="Amiri" pitchFamily="2" charset="-78"/>
               </a:rPr>
               <a:t>الإِنْجَازُ</a:t>
@@ -16281,6 +16340,7 @@
                   <a:srgbClr val="1B3B6F"/>
                 </a:solidFill>
                 <a:latin typeface="Amiri" pitchFamily="2" charset="-78"/>
+                <a:ea typeface="Amiri" pitchFamily="2" charset="-78"/>
                 <a:cs typeface="Amiri" pitchFamily="2" charset="-78"/>
               </a:rPr>
               <a:t>الطُّمُوحُ</a:t>
@@ -16745,6 +16805,7 @@
                   <a:srgbClr val="1B3B6F"/>
                 </a:solidFill>
                 <a:latin typeface="Amiri" pitchFamily="2" charset="-78"/>
+                <a:ea typeface="Amiri" pitchFamily="2" charset="-78"/>
                 <a:cs typeface="Amiri" pitchFamily="2" charset="-78"/>
               </a:rPr>
               <a:t>الطَّرِيقُ إِلَى الأَمَامِ</a:t>
@@ -17647,6 +17708,7 @@
                   <a:srgbClr val="1B3B6F"/>
                 </a:solidFill>
                 <a:latin typeface="Amiri" pitchFamily="2" charset="-78"/>
+                <a:ea typeface="Amiri" pitchFamily="2" charset="-78"/>
                 <a:cs typeface="Amiri" pitchFamily="2" charset="-78"/>
               </a:rPr>
               <a:t>العَرَبِيَّةُ الآنَ لَكَ</a:t>
@@ -18298,6 +18360,7 @@
                   <a:srgbClr val="D4AF37"/>
                 </a:solidFill>
                 <a:latin typeface="Amiri" pitchFamily="2" charset="-78"/>
+                <a:ea typeface="Amiri" pitchFamily="2" charset="-78"/>
                 <a:cs typeface="Amiri" pitchFamily="2" charset="-78"/>
               </a:rPr>
               <a:t>م</a:t>
@@ -18618,6 +18681,7 @@
                   <a:srgbClr val="8A6D1E"/>
                 </a:solidFill>
                 <a:latin typeface="Amiri" pitchFamily="2" charset="-78"/>
+                <a:ea typeface="Amiri" pitchFamily="2" charset="-78"/>
                 <a:cs typeface="Amiri" pitchFamily="2" charset="-78"/>
               </a:rPr>
               <a:t>الإِجَابَاتُ وَالتَّعْلِيلُ</a:t>
@@ -18804,6 +18868,7 @@
                   <a:srgbClr val="1B3B6F"/>
                 </a:solidFill>
                 <a:latin typeface="Amiri" pitchFamily="2" charset="-78"/>
+                <a:ea typeface="Amiri" pitchFamily="2" charset="-78"/>
                 <a:cs typeface="Amiri" pitchFamily="2" charset="-78"/>
               </a:rPr>
               <a:t>الإِنْجَازُ</a:t>
@@ -19333,6 +19398,7 @@
                   <a:srgbClr val="1B3B6F"/>
                 </a:solidFill>
                 <a:latin typeface="Amiri" pitchFamily="2" charset="-78"/>
+                <a:ea typeface="Amiri" pitchFamily="2" charset="-78"/>
                 <a:cs typeface="Amiri" pitchFamily="2" charset="-78"/>
               </a:rPr>
               <a:t>الطُّمُوحُ</a:t>
@@ -19862,6 +19928,7 @@
                   <a:srgbClr val="1B3B6F"/>
                 </a:solidFill>
                 <a:latin typeface="Amiri" pitchFamily="2" charset="-78"/>
+                <a:ea typeface="Amiri" pitchFamily="2" charset="-78"/>
                 <a:cs typeface="Amiri" pitchFamily="2" charset="-78"/>
               </a:rPr>
               <a:t>الطَّرِيقُ إِلَى الأَمَامِ</a:t>
@@ -20894,6 +20961,7 @@
                   <a:srgbClr val="1B3B6F"/>
                 </a:solidFill>
                 <a:latin typeface="Amiri" pitchFamily="2" charset="-78"/>
+                <a:ea typeface="Amiri" pitchFamily="2" charset="-78"/>
                 <a:cs typeface="Amiri" pitchFamily="2" charset="-78"/>
               </a:rPr>
               <a:t>العَرَبِيَّةُ الآنَ لَكَ</a:t>
@@ -21423,6 +21491,7 @@
                   <a:srgbClr val="1B3B6F"/>
                 </a:solidFill>
                 <a:latin typeface="Amiri" pitchFamily="2" charset="-78"/>
+                <a:ea typeface="Amiri" pitchFamily="2" charset="-78"/>
                 <a:cs typeface="Amiri" pitchFamily="2" charset="-78"/>
               </a:rPr>
               <a:t>العَرَبِيَّةُ الآنَ لَكَ.</a:t>
@@ -21556,6 +21625,7 @@
                   <a:srgbClr val="D4AF37"/>
                 </a:solidFill>
                 <a:latin typeface="Amiri" pitchFamily="2" charset="-78"/>
+                <a:ea typeface="Amiri" pitchFamily="2" charset="-78"/>
                 <a:cs typeface="Amiri" pitchFamily="2" charset="-78"/>
               </a:rPr>
               <a:t>م</a:t>
@@ -21876,6 +21946,7 @@
                   <a:srgbClr val="8A6D1E"/>
                 </a:solidFill>
                 <a:latin typeface="Amiri" pitchFamily="2" charset="-78"/>
+                <a:ea typeface="Amiri" pitchFamily="2" charset="-78"/>
                 <a:cs typeface="Amiri" pitchFamily="2" charset="-78"/>
               </a:rPr>
               <a:t>الأَهْدَافُ وَمَعَايِيرُ النَّجَاحِ</a:t>
@@ -22024,6 +22095,7 @@
                   <a:srgbClr val="8A6D1E"/>
                 </a:solidFill>
                 <a:latin typeface="Amiri" pitchFamily="2" charset="-78"/>
+                <a:ea typeface="Amiri" pitchFamily="2" charset="-78"/>
                 <a:cs typeface="Amiri" pitchFamily="2" charset="-78"/>
               </a:rPr>
               <a:t>سَتَتَعَلَّمُ اليَوْمَ</a:t>
@@ -23179,6 +23251,7 @@
                   <a:srgbClr val="D4AF37"/>
                 </a:solidFill>
                 <a:latin typeface="Amiri" pitchFamily="2" charset="-78"/>
+                <a:ea typeface="Amiri" pitchFamily="2" charset="-78"/>
                 <a:cs typeface="Amiri" pitchFamily="2" charset="-78"/>
               </a:rPr>
               <a:t>م</a:t>
@@ -23499,6 +23572,7 @@
                   <a:srgbClr val="8A6D1E"/>
                 </a:solidFill>
                 <a:latin typeface="Amiri" pitchFamily="2" charset="-78"/>
+                <a:ea typeface="Amiri" pitchFamily="2" charset="-78"/>
                 <a:cs typeface="Amiri" pitchFamily="2" charset="-78"/>
               </a:rPr>
               <a:t>المَسَافَةُ</a:t>
@@ -23723,6 +23797,7 @@
                   <a:srgbClr val="1F2A37"/>
                 </a:solidFill>
                 <a:latin typeface="Amiri" pitchFamily="2" charset="-78"/>
+                <a:ea typeface="Amiri" pitchFamily="2" charset="-78"/>
                 <a:cs typeface="Amiri" pitchFamily="2" charset="-78"/>
               </a:rPr>
               <a:t>ب</a:t>
@@ -23947,6 +24022,7 @@
                   <a:srgbClr val="1B3B6F"/>
                 </a:solidFill>
                 <a:latin typeface="Amiri" pitchFamily="2" charset="-78"/>
+                <a:ea typeface="Amiri" pitchFamily="2" charset="-78"/>
                 <a:cs typeface="Amiri" pitchFamily="2" charset="-78"/>
               </a:rPr>
               <a:t>بَ</a:t>
@@ -24049,6 +24125,7 @@
                   <a:srgbClr val="1B3B6F"/>
                 </a:solidFill>
                 <a:latin typeface="Amiri" pitchFamily="2" charset="-78"/>
+                <a:ea typeface="Amiri" pitchFamily="2" charset="-78"/>
                 <a:cs typeface="Amiri" pitchFamily="2" charset="-78"/>
               </a:rPr>
               <a:t>صَحِيحٌ أَنَّ الطَّرِيقَ طَوِيلٌ، غَيْرَ أَنَّهُ يَسْتَحِقُّ كُلَّ جُهْدٍ.</a:t>
@@ -24220,6 +24297,7 @@
                   <a:srgbClr val="D4AF37"/>
                 </a:solidFill>
                 <a:latin typeface="Amiri" pitchFamily="2" charset="-78"/>
+                <a:ea typeface="Amiri" pitchFamily="2" charset="-78"/>
                 <a:cs typeface="Amiri" pitchFamily="2" charset="-78"/>
               </a:rPr>
               <a:t>م</a:t>
@@ -24540,6 +24618,7 @@
                   <a:srgbClr val="8A6D1E"/>
                 </a:solidFill>
                 <a:latin typeface="Amiri" pitchFamily="2" charset="-78"/>
+                <a:ea typeface="Amiri" pitchFamily="2" charset="-78"/>
                 <a:cs typeface="Amiri" pitchFamily="2" charset="-78"/>
               </a:rPr>
               <a:t>سَمِّ الرِّحْلَةَ</a:t>
@@ -24820,6 +24899,7 @@
                   <a:srgbClr val="1B3B6F"/>
                 </a:solidFill>
                 <a:latin typeface="Amiri" pitchFamily="2" charset="-78"/>
+                <a:ea typeface="Amiri" pitchFamily="2" charset="-78"/>
                 <a:cs typeface="Amiri" pitchFamily="2" charset="-78"/>
               </a:rPr>
               <a:t>فِي الصَّفِّ الأَوَّلِ كُنْتُ لَا أَقْرَأُ حَرْفًا، أَمَّا اليَوْمَ فَأَسْتَطِيعُ أَنْ أَكْتُبَ مَقَالًا.</a:t>
@@ -25376,6 +25456,7 @@
                   <a:srgbClr val="D4AF37"/>
                 </a:solidFill>
                 <a:latin typeface="Amiri" pitchFamily="2" charset="-78"/>
+                <a:ea typeface="Amiri" pitchFamily="2" charset="-78"/>
                 <a:cs typeface="Amiri" pitchFamily="2" charset="-78"/>
               </a:rPr>
               <a:t>م</a:t>
@@ -25696,6 +25777,7 @@
                   <a:srgbClr val="8A6D1E"/>
                 </a:solidFill>
                 <a:latin typeface="Amiri" pitchFamily="2" charset="-78"/>
+                <a:ea typeface="Amiri" pitchFamily="2" charset="-78"/>
                 <a:cs typeface="Amiri" pitchFamily="2" charset="-78"/>
               </a:rPr>
               <a:t>العَرَبِيَّةُ فِي الحَيَاةِ</a:t>
@@ -26219,6 +26301,7 @@
                   <a:srgbClr val="1B3B6F"/>
                 </a:solidFill>
                 <a:latin typeface="Amiri" pitchFamily="2" charset="-78"/>
+                <a:ea typeface="Amiri" pitchFamily="2" charset="-78"/>
                 <a:cs typeface="Amiri" pitchFamily="2" charset="-78"/>
               </a:rPr>
               <a:t>مَا أَجْمَلُ شَيْءٍ تَعَلَّمْتَهُ هٰذَا العَامَ؟</a:t>
@@ -26318,6 +26401,7 @@
                   <a:srgbClr val="1B3B6F"/>
                 </a:solidFill>
                 <a:latin typeface="Amiri" pitchFamily="2" charset="-78"/>
+                <a:ea typeface="Amiri" pitchFamily="2" charset="-78"/>
                 <a:cs typeface="Amiri" pitchFamily="2" charset="-78"/>
               </a:rPr>
               <a:t>فِي صَبَاحٍ هَادِئٍ، فَتَحْتُ البَابَ فَوَجَدْتُ …</a:t>
@@ -26417,6 +26501,7 @@
                   <a:srgbClr val="1B3B6F"/>
                 </a:solidFill>
                 <a:latin typeface="Amiri" pitchFamily="2" charset="-78"/>
+                <a:ea typeface="Amiri" pitchFamily="2" charset="-78"/>
                 <a:cs typeface="Amiri" pitchFamily="2" charset="-78"/>
               </a:rPr>
               <a:t>أَكْثَرُ مَا أَدْهَشَنِي فِي العَالَمِ العَرَبِيِّ هُوَ …</a:t>
@@ -26553,13 +26638,9 @@
     <a:fontScheme name="Office">
       <a:majorFont>
         <a:latin typeface="Calibri Light" panose="020F0302020204030204"/>
-        <a:ea typeface=""/>
-        <a:cs typeface=""/>
-        <a:font script="Jpan" typeface="游ゴシック Light"/>
-        <a:font script="Hang" typeface="맑은 고딕"/>
-        <a:font script="Hans" typeface="等线 Light"/>
-        <a:font script="Hant" typeface="新細明體"/>
-        <a:font script="Arab" typeface="Times New Roman"/>
+        <a:ea typeface="Amiri" pitchFamily="2" charset="-78"/>
+        <a:cs typeface="Amiri" pitchFamily="2" charset="-78"/>
+        <a:font script="Arab" typeface="Amiri"/>
         <a:font script="Hebr" typeface="Times New Roman"/>
         <a:font script="Thai" typeface="Angsana New"/>
         <a:font script="Ethi" typeface="Nyala"/>
@@ -26605,13 +26686,9 @@
       </a:majorFont>
       <a:minorFont>
         <a:latin typeface="Calibri" panose="020F0502020204030204"/>
-        <a:ea typeface=""/>
-        <a:cs typeface=""/>
-        <a:font script="Jpan" typeface="游ゴシック"/>
-        <a:font script="Hang" typeface="맑은 고딕"/>
-        <a:font script="Hans" typeface="等线"/>
-        <a:font script="Hant" typeface="新細明體"/>
-        <a:font script="Arab" typeface="Arial"/>
+        <a:ea typeface="Amiri" pitchFamily="2" charset="-78"/>
+        <a:cs typeface="Amiri" pitchFamily="2" charset="-78"/>
+        <a:font script="Arab" typeface="Amiri"/>
         <a:font script="Hebr" typeface="Arial"/>
         <a:font script="Thai" typeface="Cordia New"/>
         <a:font script="Ethi" typeface="Nyala"/>

--- a/Progression_P6/P6-L12_Celebration_and_the_Road_Ahead.pptx
+++ b/Progression_P6/P6-L12_Celebration_and_the_Road_Ahead.pptx
@@ -4772,7 +4772,7 @@
                 <a:solidFill>
                   <a:srgbClr val="FFFFFF"/>
                 </a:solidFill>
-                <a:latin typeface="Calibri" pitchFamily="34" charset="0"/>
+                <a:latin typeface="Amiri" pitchFamily="2" charset="-78"/>
                 <a:ea typeface="Amiri" pitchFamily="2" charset="-78"/>
                 <a:cs typeface="Amiri" pitchFamily="2" charset="-78"/>
               </a:rPr>
@@ -4838,7 +4838,7 @@
                 <a:solidFill>
                   <a:srgbClr val="FFFFFF"/>
                 </a:solidFill>
-                <a:latin typeface="Calibri" pitchFamily="34" charset="0"/>
+                <a:latin typeface="Amiri" pitchFamily="2" charset="-78"/>
                 <a:ea typeface="Amiri" pitchFamily="2" charset="-78"/>
                 <a:cs typeface="Amiri" pitchFamily="2" charset="-78"/>
               </a:rPr>
@@ -4904,7 +4904,7 @@
                 <a:solidFill>
                   <a:srgbClr val="FFFFFF"/>
                 </a:solidFill>
-                <a:latin typeface="Calibri" pitchFamily="34" charset="0"/>
+                <a:latin typeface="Amiri" pitchFamily="2" charset="-78"/>
                 <a:ea typeface="Amiri" pitchFamily="2" charset="-78"/>
                 <a:cs typeface="Amiri" pitchFamily="2" charset="-78"/>
               </a:rPr>
@@ -4970,7 +4970,7 @@
                 <a:solidFill>
                   <a:srgbClr val="FFFFFF"/>
                 </a:solidFill>
-                <a:latin typeface="Calibri" pitchFamily="34" charset="0"/>
+                <a:latin typeface="Amiri" pitchFamily="2" charset="-78"/>
                 <a:ea typeface="Amiri" pitchFamily="2" charset="-78"/>
                 <a:cs typeface="Amiri" pitchFamily="2" charset="-78"/>
               </a:rPr>
